--- a/Sudoku_Solver_Presentation.pptx
+++ b/Sudoku_Solver_Presentation.pptx
@@ -1,19 +1,19 @@
 
 <file path=ppt/presentation.xml><?xml version="1.0" encoding="utf-8"?>
-<p:presentation xmlns:a="http://schemas.openxmlformats.org/drawingml/2006/main" xmlns:r="http://schemas.openxmlformats.org/officeDocument/2006/relationships" xmlns:p="http://schemas.openxmlformats.org/presentationml/2006/main" saveSubsetFonts="1" autoCompressPictures="0">
+<p:presentation xmlns:a="http://schemas.openxmlformats.org/drawingml/2006/main" xmlns:r="http://schemas.openxmlformats.org/officeDocument/2006/relationships" xmlns:p="http://schemas.openxmlformats.org/presentationml/2006/main" autoCompressPictures="0">
   <p:sldMasterIdLst>
     <p:sldMasterId id="2147483648" r:id="rId1"/>
   </p:sldMasterIdLst>
+  <p:notesMasterIdLst>
+    <p:notesMasterId r:id="rId4"/>
+  </p:notesMasterIdLst>
   <p:sldIdLst>
-    <p:sldId id="256" r:id="rId2"/>
-    <p:sldId id="257" r:id="rId3"/>
-    <p:sldId id="258" r:id="rId4"/>
-    <p:sldId id="259" r:id="rId5"/>
-    <p:sldId id="260" r:id="rId6"/>
+    <p:sldId id="256" r:id="rId3"/>
+    <p:sldId id="257" r:id="rId5"/>
+    <p:sldId id="258" r:id="rId6"/>
+    <p:sldId id="259" r:id="rId7"/>
+    <p:sldId id="260" r:id="rId8"/>
   </p:sldIdLst>
-  <p:notesMasterIdLst>
-    <p:notesMasterId r:id="rId7"/>
-  </p:notesMasterIdLst>
   <p:sldSz cx="9144000" cy="5143500"/>
   <p:notesSz cx="5143500" cy="9144000"/>
   <p:defaultTextStyle>
@@ -193,7 +193,6 @@
           <a:p>
             <a:fld id="{5282F153-3F37-0F45-9E97-73ACFA13230C}" type="datetimeFigureOut">
               <a:rPr lang="en-US"/>
-              <a:t>7/23/19</a:t>
             </a:fld>
             <a:endParaRPr lang="en-US"/>
           </a:p>
@@ -260,6 +259,7 @@
               <a:rPr lang="en-US"/>
               <a:t>Click to edit Master text styles</a:t>
             </a:r>
+            <a:endParaRPr lang="en-US"/>
           </a:p>
           <a:p>
             <a:pPr lvl="1"/>
@@ -267,6 +267,7 @@
               <a:rPr lang="en-US"/>
               <a:t>Second level</a:t>
             </a:r>
+            <a:endParaRPr lang="en-US"/>
           </a:p>
           <a:p>
             <a:pPr lvl="2"/>
@@ -274,6 +275,7 @@
               <a:rPr lang="en-US"/>
               <a:t>Third level</a:t>
             </a:r>
+            <a:endParaRPr lang="en-US"/>
           </a:p>
           <a:p>
             <a:pPr lvl="3"/>
@@ -281,6 +283,7 @@
               <a:rPr lang="en-US"/>
               <a:t>Fourth level</a:t>
             </a:r>
+            <a:endParaRPr lang="en-US"/>
           </a:p>
           <a:p>
             <a:pPr lvl="4"/>
@@ -288,6 +291,7 @@
               <a:rPr lang="en-US"/>
               <a:t>Fifth level</a:t>
             </a:r>
+            <a:endParaRPr lang="en-US"/>
           </a:p>
         </p:txBody>
       </p:sp>
@@ -351,18 +355,12 @@
           <a:p>
             <a:fld id="{CE5E9CC1-C706-0F49-92D6-E571CC5EEA8F}" type="slidenum">
               <a:rPr lang="en-US"/>
-              <a:t>‹#›</a:t>
             </a:fld>
             <a:endParaRPr lang="en-US"/>
           </a:p>
         </p:txBody>
       </p:sp>
     </p:spTree>
-    <p:extLst>
-      <p:ext uri="{BB962C8B-B14F-4D97-AF65-F5344CB8AC3E}">
-        <p14:creationId xmlns:p14="http://schemas.microsoft.com/office/powerpoint/2010/main" val="1024086991"/>
-      </p:ext>
-    </p:extLst>
   </p:cSld>
   <p:clrMap bg1="lt1" tx1="dk1" bg2="lt2" tx2="dk2" accent1="accent1" accent2="accent2" accent3="accent3" accent4="accent4" accent5="accent5" accent6="accent6" hlink="hlink" folHlink="folHlink"/>
   <p:notesStyle>
@@ -504,10 +502,6 @@
           <a:bodyPr/>
           <a:lstStyle/>
           <a:p>
-            <a:r>
-              <a:rPr lang="en-US" dirty="0"/>
-              <a:t/>
-            </a:r>
             <a:endParaRPr lang="en-US" dirty="0"/>
           </a:p>
         </p:txBody>
@@ -529,18 +523,12 @@
           <a:p>
             <a:fld id="{F7021451-1387-4CA6-816F-3879F97B5CBC}" type="slidenum">
               <a:rPr lang="en-US"/>
-              <a:t>1</a:t>
             </a:fld>
             <a:endParaRPr lang="en-US"/>
           </a:p>
         </p:txBody>
       </p:sp>
     </p:spTree>
-    <p:extLst>
-      <p:ext uri="{BB962C8B-B14F-4D97-AF65-F5344CB8AC3E}">
-        <p14:creationId xmlns:p14="http://schemas.microsoft.com/office/powerpoint/2010/main" val="1024086991"/>
-      </p:ext>
-    </p:extLst>
   </p:cSld>
   <p:clrMapOvr>
     <a:masterClrMapping/>
@@ -592,10 +580,6 @@
           <a:bodyPr/>
           <a:lstStyle/>
           <a:p>
-            <a:r>
-              <a:rPr lang="en-US" dirty="0"/>
-              <a:t/>
-            </a:r>
             <a:endParaRPr lang="en-US" dirty="0"/>
           </a:p>
         </p:txBody>
@@ -617,18 +601,12 @@
           <a:p>
             <a:fld id="{F7021451-1387-4CA6-816F-3879F97B5CBC}" type="slidenum">
               <a:rPr lang="en-US"/>
-              <a:t>2</a:t>
             </a:fld>
             <a:endParaRPr lang="en-US"/>
           </a:p>
         </p:txBody>
       </p:sp>
     </p:spTree>
-    <p:extLst>
-      <p:ext uri="{BB962C8B-B14F-4D97-AF65-F5344CB8AC3E}">
-        <p14:creationId xmlns:p14="http://schemas.microsoft.com/office/powerpoint/2010/main" val="1024086991"/>
-      </p:ext>
-    </p:extLst>
   </p:cSld>
   <p:clrMapOvr>
     <a:masterClrMapping/>
@@ -680,10 +658,6 @@
           <a:bodyPr/>
           <a:lstStyle/>
           <a:p>
-            <a:r>
-              <a:rPr lang="en-US" dirty="0"/>
-              <a:t/>
-            </a:r>
             <a:endParaRPr lang="en-US" dirty="0"/>
           </a:p>
         </p:txBody>
@@ -705,18 +679,12 @@
           <a:p>
             <a:fld id="{F7021451-1387-4CA6-816F-3879F97B5CBC}" type="slidenum">
               <a:rPr lang="en-US"/>
-              <a:t>3</a:t>
             </a:fld>
             <a:endParaRPr lang="en-US"/>
           </a:p>
         </p:txBody>
       </p:sp>
     </p:spTree>
-    <p:extLst>
-      <p:ext uri="{BB962C8B-B14F-4D97-AF65-F5344CB8AC3E}">
-        <p14:creationId xmlns:p14="http://schemas.microsoft.com/office/powerpoint/2010/main" val="1024086991"/>
-      </p:ext>
-    </p:extLst>
   </p:cSld>
   <p:clrMapOvr>
     <a:masterClrMapping/>
@@ -768,10 +736,6 @@
           <a:bodyPr/>
           <a:lstStyle/>
           <a:p>
-            <a:r>
-              <a:rPr lang="en-US" dirty="0"/>
-              <a:t/>
-            </a:r>
             <a:endParaRPr lang="en-US" dirty="0"/>
           </a:p>
         </p:txBody>
@@ -793,18 +757,12 @@
           <a:p>
             <a:fld id="{F7021451-1387-4CA6-816F-3879F97B5CBC}" type="slidenum">
               <a:rPr lang="en-US"/>
-              <a:t>4</a:t>
             </a:fld>
             <a:endParaRPr lang="en-US"/>
           </a:p>
         </p:txBody>
       </p:sp>
     </p:spTree>
-    <p:extLst>
-      <p:ext uri="{BB962C8B-B14F-4D97-AF65-F5344CB8AC3E}">
-        <p14:creationId xmlns:p14="http://schemas.microsoft.com/office/powerpoint/2010/main" val="1024086991"/>
-      </p:ext>
-    </p:extLst>
   </p:cSld>
   <p:clrMapOvr>
     <a:masterClrMapping/>
@@ -856,10 +814,6 @@
           <a:bodyPr/>
           <a:lstStyle/>
           <a:p>
-            <a:r>
-              <a:rPr lang="en-US" dirty="0"/>
-              <a:t/>
-            </a:r>
             <a:endParaRPr lang="en-US" dirty="0"/>
           </a:p>
         </p:txBody>
@@ -881,18 +835,12 @@
           <a:p>
             <a:fld id="{F7021451-1387-4CA6-816F-3879F97B5CBC}" type="slidenum">
               <a:rPr lang="en-US"/>
-              <a:t>5</a:t>
             </a:fld>
             <a:endParaRPr lang="en-US"/>
           </a:p>
         </p:txBody>
       </p:sp>
     </p:spTree>
-    <p:extLst>
-      <p:ext uri="{BB962C8B-B14F-4D97-AF65-F5344CB8AC3E}">
-        <p14:creationId xmlns:p14="http://schemas.microsoft.com/office/powerpoint/2010/main" val="1024086991"/>
-      </p:ext>
-    </p:extLst>
   </p:cSld>
   <p:clrMapOvr>
     <a:masterClrMapping/>
@@ -933,6 +881,11 @@
 <file path=ppt/slideMasters/slideMaster1.xml><?xml version="1.0" encoding="utf-8"?>
 <p:sldMaster xmlns:a="http://schemas.openxmlformats.org/drawingml/2006/main" xmlns:r="http://schemas.openxmlformats.org/officeDocument/2006/relationships" xmlns:p="http://schemas.openxmlformats.org/presentationml/2006/main">
   <p:cSld>
+    <p:bg>
+      <p:bgRef idx="1001">
+        <a:schemeClr val="bg1"/>
+      </p:bgRef>
+    </p:bg>
     <p:spTree>
       <p:nvGrpSpPr>
         <p:cNvPr id="1" name=""/>
@@ -976,7 +929,7 @@
         <a:spcBef>
           <a:spcPct val="20000"/>
         </a:spcBef>
-        <a:buFont typeface="Arial" pitchFamily="34" charset="0"/>
+        <a:buFont typeface="Arial" panose="020B0604020202020204" pitchFamily="34" charset="0"/>
         <a:buChar char="•"/>
         <a:defRPr sz="3200" kern="1200">
           <a:solidFill>
@@ -991,7 +944,7 @@
         <a:spcBef>
           <a:spcPct val="20000"/>
         </a:spcBef>
-        <a:buFont typeface="Arial" pitchFamily="34" charset="0"/>
+        <a:buFont typeface="Arial" panose="020B0604020202020204" pitchFamily="34" charset="0"/>
         <a:buChar char="–"/>
         <a:defRPr sz="2800" kern="1200">
           <a:solidFill>
@@ -1006,7 +959,7 @@
         <a:spcBef>
           <a:spcPct val="20000"/>
         </a:spcBef>
-        <a:buFont typeface="Arial" pitchFamily="34" charset="0"/>
+        <a:buFont typeface="Arial" panose="020B0604020202020204" pitchFamily="34" charset="0"/>
         <a:buChar char="•"/>
         <a:defRPr sz="2400" kern="1200">
           <a:solidFill>
@@ -1021,7 +974,7 @@
         <a:spcBef>
           <a:spcPct val="20000"/>
         </a:spcBef>
-        <a:buFont typeface="Arial" pitchFamily="34" charset="0"/>
+        <a:buFont typeface="Arial" panose="020B0604020202020204" pitchFamily="34" charset="0"/>
         <a:buChar char="–"/>
         <a:defRPr sz="2000" kern="1200">
           <a:solidFill>
@@ -1036,7 +989,7 @@
         <a:spcBef>
           <a:spcPct val="20000"/>
         </a:spcBef>
-        <a:buFont typeface="Arial" pitchFamily="34" charset="0"/>
+        <a:buFont typeface="Arial" panose="020B0604020202020204" pitchFamily="34" charset="0"/>
         <a:buChar char="»"/>
         <a:defRPr sz="2000" kern="1200">
           <a:solidFill>
@@ -1051,7 +1004,7 @@
         <a:spcBef>
           <a:spcPct val="20000"/>
         </a:spcBef>
-        <a:buFont typeface="Arial" pitchFamily="34" charset="0"/>
+        <a:buFont typeface="Arial" panose="020B0604020202020204" pitchFamily="34" charset="0"/>
         <a:buChar char="•"/>
         <a:defRPr sz="2000" kern="1200">
           <a:solidFill>
@@ -1066,7 +1019,7 @@
         <a:spcBef>
           <a:spcPct val="20000"/>
         </a:spcBef>
-        <a:buFont typeface="Arial" pitchFamily="34" charset="0"/>
+        <a:buFont typeface="Arial" panose="020B0604020202020204" pitchFamily="34" charset="0"/>
         <a:buChar char="•"/>
         <a:defRPr sz="2000" kern="1200">
           <a:solidFill>
@@ -1081,7 +1034,7 @@
         <a:spcBef>
           <a:spcPct val="20000"/>
         </a:spcBef>
-        <a:buFont typeface="Arial" pitchFamily="34" charset="0"/>
+        <a:buFont typeface="Arial" panose="020B0604020202020204" pitchFamily="34" charset="0"/>
         <a:buChar char="•"/>
         <a:defRPr sz="2000" kern="1200">
           <a:solidFill>
@@ -1096,7 +1049,7 @@
         <a:spcBef>
           <a:spcPct val="20000"/>
         </a:spcBef>
-        <a:buFont typeface="Arial" pitchFamily="34" charset="0"/>
+        <a:buFont typeface="Arial" panose="020B0604020202020204" pitchFamily="34" charset="0"/>
         <a:buChar char="•"/>
         <a:defRPr sz="2000" kern="1200">
           <a:solidFill>
@@ -1209,12 +1162,13 @@
 
 <file path=ppt/slides/slide1.xml><?xml version="1.0" encoding="utf-8"?>
 <p:sld xmlns:a="http://schemas.openxmlformats.org/drawingml/2006/main" xmlns:r="http://schemas.openxmlformats.org/officeDocument/2006/relationships" xmlns:p="http://schemas.openxmlformats.org/presentationml/2006/main">
-  <p:cSld name="Slide 1">
+  <p:cSld>
     <p:bg>
       <p:bgPr>
         <a:solidFill>
           <a:srgbClr val="1A1A2E"/>
         </a:solidFill>
+        <a:effectLst/>
       </p:bgPr>
     </p:bg>
     <p:spTree>
@@ -1706,13 +1660,12 @@
             <a:avLst/>
           </a:prstGeom>
           <a:noFill/>
-          <a:ln/>
-        </p:spPr>
-        <p:txBody>
-          <a:bodyPr wrap="square" lIns="0" tIns="0" rIns="0" bIns="0" rtlCol="0" anchor="ctr"/>
-          <a:lstStyle/>
-          <a:p>
-            <a:pPr algn="ctr" indent="0" marL="0">
+        </p:spPr>
+        <p:txBody>
+          <a:bodyPr wrap="square" lIns="0" tIns="0" rIns="0" bIns="0" rtlCol="0" anchor="ctr"/>
+          <a:lstStyle/>
+          <a:p>
+            <a:pPr marL="0" indent="0" algn="ctr">
               <a:buNone/>
             </a:pPr>
             <a:r>
@@ -1742,13 +1695,12 @@
             <a:avLst/>
           </a:prstGeom>
           <a:noFill/>
-          <a:ln/>
-        </p:spPr>
-        <p:txBody>
-          <a:bodyPr wrap="square" lIns="0" tIns="0" rIns="0" bIns="0" rtlCol="0" anchor="ctr"/>
-          <a:lstStyle/>
-          <a:p>
-            <a:pPr algn="ctr" indent="0" marL="0">
+        </p:spPr>
+        <p:txBody>
+          <a:bodyPr wrap="square" lIns="0" tIns="0" rIns="0" bIns="0" rtlCol="0" anchor="ctr"/>
+          <a:lstStyle/>
+          <a:p>
+            <a:pPr marL="0" indent="0" algn="ctr">
               <a:buNone/>
             </a:pPr>
             <a:r>
@@ -1778,13 +1730,12 @@
             <a:avLst/>
           </a:prstGeom>
           <a:noFill/>
-          <a:ln/>
-        </p:spPr>
-        <p:txBody>
-          <a:bodyPr wrap="square" lIns="0" tIns="0" rIns="0" bIns="0" rtlCol="0" anchor="ctr"/>
-          <a:lstStyle/>
-          <a:p>
-            <a:pPr algn="ctr" indent="0" marL="0">
+        </p:spPr>
+        <p:txBody>
+          <a:bodyPr wrap="square" lIns="0" tIns="0" rIns="0" bIns="0" rtlCol="0" anchor="ctr"/>
+          <a:lstStyle/>
+          <a:p>
+            <a:pPr marL="0" indent="0" algn="ctr">
               <a:buNone/>
             </a:pPr>
             <a:r>
@@ -1814,13 +1765,12 @@
             <a:avLst/>
           </a:prstGeom>
           <a:noFill/>
-          <a:ln/>
-        </p:spPr>
-        <p:txBody>
-          <a:bodyPr wrap="square" lIns="0" tIns="0" rIns="0" bIns="0" rtlCol="0" anchor="ctr"/>
-          <a:lstStyle/>
-          <a:p>
-            <a:pPr algn="ctr" indent="0" marL="0">
+        </p:spPr>
+        <p:txBody>
+          <a:bodyPr wrap="square" lIns="0" tIns="0" rIns="0" bIns="0" rtlCol="0" anchor="ctr"/>
+          <a:lstStyle/>
+          <a:p>
+            <a:pPr marL="0" indent="0" algn="ctr">
               <a:buNone/>
             </a:pPr>
             <a:r>
@@ -1850,13 +1800,12 @@
             <a:avLst/>
           </a:prstGeom>
           <a:noFill/>
-          <a:ln/>
-        </p:spPr>
-        <p:txBody>
-          <a:bodyPr wrap="square" lIns="0" tIns="0" rIns="0" bIns="0" rtlCol="0" anchor="ctr"/>
-          <a:lstStyle/>
-          <a:p>
-            <a:pPr algn="ctr" indent="0" marL="0">
+        </p:spPr>
+        <p:txBody>
+          <a:bodyPr wrap="square" lIns="0" tIns="0" rIns="0" bIns="0" rtlCol="0" anchor="ctr"/>
+          <a:lstStyle/>
+          <a:p>
+            <a:pPr marL="0" indent="0" algn="ctr">
               <a:buNone/>
             </a:pPr>
             <a:r>
@@ -1886,13 +1835,12 @@
             <a:avLst/>
           </a:prstGeom>
           <a:noFill/>
-          <a:ln/>
-        </p:spPr>
-        <p:txBody>
-          <a:bodyPr wrap="square" lIns="0" tIns="0" rIns="0" bIns="0" rtlCol="0" anchor="ctr"/>
-          <a:lstStyle/>
-          <a:p>
-            <a:pPr algn="ctr" indent="0" marL="0">
+        </p:spPr>
+        <p:txBody>
+          <a:bodyPr wrap="square" lIns="0" tIns="0" rIns="0" bIns="0" rtlCol="0" anchor="ctr"/>
+          <a:lstStyle/>
+          <a:p>
+            <a:pPr marL="0" indent="0" algn="ctr">
               <a:buNone/>
             </a:pPr>
             <a:r>
@@ -1922,13 +1870,12 @@
             <a:avLst/>
           </a:prstGeom>
           <a:noFill/>
-          <a:ln/>
-        </p:spPr>
-        <p:txBody>
-          <a:bodyPr wrap="square" lIns="0" tIns="0" rIns="0" bIns="0" rtlCol="0" anchor="ctr"/>
-          <a:lstStyle/>
-          <a:p>
-            <a:pPr algn="ctr" indent="0" marL="0">
+        </p:spPr>
+        <p:txBody>
+          <a:bodyPr wrap="square" lIns="0" tIns="0" rIns="0" bIns="0" rtlCol="0" anchor="ctr"/>
+          <a:lstStyle/>
+          <a:p>
+            <a:pPr marL="0" indent="0" algn="ctr">
               <a:buNone/>
             </a:pPr>
             <a:r>
@@ -1958,13 +1905,12 @@
             <a:avLst/>
           </a:prstGeom>
           <a:noFill/>
-          <a:ln/>
-        </p:spPr>
-        <p:txBody>
-          <a:bodyPr wrap="square" lIns="0" tIns="0" rIns="0" bIns="0" rtlCol="0" anchor="ctr"/>
-          <a:lstStyle/>
-          <a:p>
-            <a:pPr algn="ctr" indent="0" marL="0">
+        </p:spPr>
+        <p:txBody>
+          <a:bodyPr wrap="square" lIns="0" tIns="0" rIns="0" bIns="0" rtlCol="0" anchor="ctr"/>
+          <a:lstStyle/>
+          <a:p>
+            <a:pPr marL="0" indent="0" algn="ctr">
               <a:buNone/>
             </a:pPr>
             <a:r>
@@ -1994,13 +1940,12 @@
             <a:avLst/>
           </a:prstGeom>
           <a:noFill/>
-          <a:ln/>
-        </p:spPr>
-        <p:txBody>
-          <a:bodyPr wrap="square" lIns="0" tIns="0" rIns="0" bIns="0" rtlCol="0" anchor="ctr"/>
-          <a:lstStyle/>
-          <a:p>
-            <a:pPr algn="ctr" indent="0" marL="0">
+        </p:spPr>
+        <p:txBody>
+          <a:bodyPr wrap="square" lIns="0" tIns="0" rIns="0" bIns="0" rtlCol="0" anchor="ctr"/>
+          <a:lstStyle/>
+          <a:p>
+            <a:pPr marL="0" indent="0" algn="ctr">
               <a:buNone/>
             </a:pPr>
             <a:r>
@@ -2030,13 +1975,12 @@
             <a:avLst/>
           </a:prstGeom>
           <a:noFill/>
-          <a:ln/>
-        </p:spPr>
-        <p:txBody>
-          <a:bodyPr wrap="square" lIns="0" tIns="0" rIns="0" bIns="0" rtlCol="0" anchor="ctr"/>
-          <a:lstStyle/>
-          <a:p>
-            <a:pPr algn="ctr" indent="0" marL="0">
+        </p:spPr>
+        <p:txBody>
+          <a:bodyPr wrap="square" lIns="0" tIns="0" rIns="0" bIns="0" rtlCol="0" anchor="ctr"/>
+          <a:lstStyle/>
+          <a:p>
+            <a:pPr marL="0" indent="0" algn="ctr">
               <a:buNone/>
             </a:pPr>
             <a:r>
@@ -2066,13 +2010,12 @@
             <a:avLst/>
           </a:prstGeom>
           <a:noFill/>
-          <a:ln/>
-        </p:spPr>
-        <p:txBody>
-          <a:bodyPr wrap="square" lIns="0" tIns="0" rIns="0" bIns="0" rtlCol="0" anchor="ctr"/>
-          <a:lstStyle/>
-          <a:p>
-            <a:pPr algn="ctr" indent="0" marL="0">
+        </p:spPr>
+        <p:txBody>
+          <a:bodyPr wrap="square" lIns="0" tIns="0" rIns="0" bIns="0" rtlCol="0" anchor="ctr"/>
+          <a:lstStyle/>
+          <a:p>
+            <a:pPr marL="0" indent="0" algn="ctr">
               <a:buNone/>
             </a:pPr>
             <a:r>
@@ -2102,13 +2045,12 @@
             <a:avLst/>
           </a:prstGeom>
           <a:noFill/>
-          <a:ln/>
-        </p:spPr>
-        <p:txBody>
-          <a:bodyPr wrap="square" lIns="0" tIns="0" rIns="0" bIns="0" rtlCol="0" anchor="ctr"/>
-          <a:lstStyle/>
-          <a:p>
-            <a:pPr algn="ctr" indent="0" marL="0">
+        </p:spPr>
+        <p:txBody>
+          <a:bodyPr wrap="square" lIns="0" tIns="0" rIns="0" bIns="0" rtlCol="0" anchor="ctr"/>
+          <a:lstStyle/>
+          <a:p>
+            <a:pPr marL="0" indent="0" algn="ctr">
               <a:buNone/>
             </a:pPr>
             <a:r>
@@ -2138,13 +2080,12 @@
             <a:avLst/>
           </a:prstGeom>
           <a:noFill/>
-          <a:ln/>
-        </p:spPr>
-        <p:txBody>
-          <a:bodyPr wrap="square" lIns="0" tIns="0" rIns="0" bIns="0" rtlCol="0" anchor="ctr"/>
-          <a:lstStyle/>
-          <a:p>
-            <a:pPr algn="ctr" indent="0" marL="0">
+        </p:spPr>
+        <p:txBody>
+          <a:bodyPr wrap="square" lIns="0" tIns="0" rIns="0" bIns="0" rtlCol="0" anchor="ctr"/>
+          <a:lstStyle/>
+          <a:p>
+            <a:pPr marL="0" indent="0" algn="ctr">
               <a:buNone/>
             </a:pPr>
             <a:r>
@@ -2174,13 +2115,12 @@
             <a:avLst/>
           </a:prstGeom>
           <a:noFill/>
-          <a:ln/>
-        </p:spPr>
-        <p:txBody>
-          <a:bodyPr wrap="square" lIns="0" tIns="0" rIns="0" bIns="0" rtlCol="0" anchor="ctr"/>
-          <a:lstStyle/>
-          <a:p>
-            <a:pPr algn="ctr" indent="0" marL="0">
+        </p:spPr>
+        <p:txBody>
+          <a:bodyPr wrap="square" lIns="0" tIns="0" rIns="0" bIns="0" rtlCol="0" anchor="ctr"/>
+          <a:lstStyle/>
+          <a:p>
+            <a:pPr marL="0" indent="0" algn="ctr">
               <a:buNone/>
             </a:pPr>
             <a:r>
@@ -2210,13 +2150,12 @@
             <a:avLst/>
           </a:prstGeom>
           <a:noFill/>
-          <a:ln/>
-        </p:spPr>
-        <p:txBody>
-          <a:bodyPr wrap="square" lIns="0" tIns="0" rIns="0" bIns="0" rtlCol="0" anchor="ctr"/>
-          <a:lstStyle/>
-          <a:p>
-            <a:pPr algn="ctr" indent="0" marL="0">
+        </p:spPr>
+        <p:txBody>
+          <a:bodyPr wrap="square" lIns="0" tIns="0" rIns="0" bIns="0" rtlCol="0" anchor="ctr"/>
+          <a:lstStyle/>
+          <a:p>
+            <a:pPr marL="0" indent="0" algn="ctr">
               <a:buNone/>
             </a:pPr>
             <a:r>
@@ -2246,13 +2185,12 @@
             <a:avLst/>
           </a:prstGeom>
           <a:noFill/>
-          <a:ln/>
-        </p:spPr>
-        <p:txBody>
-          <a:bodyPr wrap="square" lIns="0" tIns="0" rIns="0" bIns="0" rtlCol="0" anchor="ctr"/>
-          <a:lstStyle/>
-          <a:p>
-            <a:pPr algn="ctr" indent="0" marL="0">
+        </p:spPr>
+        <p:txBody>
+          <a:bodyPr wrap="square" lIns="0" tIns="0" rIns="0" bIns="0" rtlCol="0" anchor="ctr"/>
+          <a:lstStyle/>
+          <a:p>
+            <a:pPr marL="0" indent="0" algn="ctr">
               <a:buNone/>
             </a:pPr>
             <a:r>
@@ -2282,13 +2220,12 @@
             <a:avLst/>
           </a:prstGeom>
           <a:noFill/>
-          <a:ln/>
-        </p:spPr>
-        <p:txBody>
-          <a:bodyPr wrap="square" lIns="0" tIns="0" rIns="0" bIns="0" rtlCol="0" anchor="ctr"/>
-          <a:lstStyle/>
-          <a:p>
-            <a:pPr algn="ctr" indent="0" marL="0">
+        </p:spPr>
+        <p:txBody>
+          <a:bodyPr wrap="square" lIns="0" tIns="0" rIns="0" bIns="0" rtlCol="0" anchor="ctr"/>
+          <a:lstStyle/>
+          <a:p>
+            <a:pPr marL="0" indent="0" algn="ctr">
               <a:buNone/>
             </a:pPr>
             <a:r>
@@ -2318,13 +2255,12 @@
             <a:avLst/>
           </a:prstGeom>
           <a:noFill/>
-          <a:ln/>
         </p:spPr>
         <p:txBody>
           <a:bodyPr wrap="square" rtlCol="0" anchor="ctr"/>
           <a:lstStyle/>
           <a:p>
-            <a:pPr algn="l" indent="0" marL="0">
+            <a:pPr marL="0" indent="0" algn="l">
               <a:buNone/>
             </a:pPr>
             <a:r>
@@ -2332,9 +2268,9 @@
                 <a:solidFill>
                   <a:srgbClr val="2DD4BF"/>
                 </a:solidFill>
-                <a:latin typeface="Calibri" pitchFamily="34" charset="0"/>
-                <a:ea typeface="Calibri" pitchFamily="34" charset="-122"/>
-                <a:cs typeface="Calibri" pitchFamily="34" charset="-120"/>
+                <a:latin typeface="Calibri" panose="020F0502020204030204" pitchFamily="34" charset="0"/>
+                <a:ea typeface="Calibri" panose="020F0502020204030204" pitchFamily="34" charset="-122"/>
+                <a:cs typeface="Calibri" panose="020F0502020204030204" pitchFamily="34" charset="-120"/>
               </a:rPr>
               <a:t>CRT Mini Project  ·  2027 Batch</a:t>
             </a:r>
@@ -2357,13 +2293,12 @@
             <a:avLst/>
           </a:prstGeom>
           <a:noFill/>
-          <a:ln/>
         </p:spPr>
         <p:txBody>
           <a:bodyPr wrap="square" rtlCol="0" anchor="ctr"/>
           <a:lstStyle/>
           <a:p>
-            <a:pPr algn="l" indent="0" marL="0">
+            <a:pPr marL="0" indent="0" algn="l">
               <a:buNone/>
             </a:pPr>
             <a:r>
@@ -2371,9 +2306,9 @@
                 <a:solidFill>
                   <a:srgbClr val="FFFFFF"/>
                 </a:solidFill>
-                <a:latin typeface="Cambria" pitchFamily="34" charset="0"/>
-                <a:ea typeface="Cambria" pitchFamily="34" charset="-122"/>
-                <a:cs typeface="Cambria" pitchFamily="34" charset="-120"/>
+                <a:latin typeface="Cambria" panose="02040503050406030204" pitchFamily="34" charset="0"/>
+                <a:ea typeface="Cambria" panose="02040503050406030204" pitchFamily="34" charset="-122"/>
+                <a:cs typeface="Cambria" panose="02040503050406030204" pitchFamily="34" charset="-120"/>
               </a:rPr>
               <a:t>Sudoku Solver</a:t>
             </a:r>
@@ -2396,13 +2331,12 @@
             <a:avLst/>
           </a:prstGeom>
           <a:noFill/>
-          <a:ln/>
         </p:spPr>
         <p:txBody>
           <a:bodyPr wrap="square" rtlCol="0" anchor="ctr"/>
           <a:lstStyle/>
           <a:p>
-            <a:pPr algn="l" indent="0" marL="0">
+            <a:pPr marL="0" indent="0" algn="l">
               <a:buNone/>
             </a:pPr>
             <a:r>
@@ -2410,16 +2344,16 @@
                 <a:solidFill>
                   <a:srgbClr val="E94560"/>
                 </a:solidFill>
-                <a:latin typeface="Cambria" pitchFamily="34" charset="0"/>
-                <a:ea typeface="Cambria" pitchFamily="34" charset="-122"/>
-                <a:cs typeface="Cambria" pitchFamily="34" charset="-120"/>
+                <a:latin typeface="Cambria" panose="02040503050406030204" pitchFamily="34" charset="0"/>
+                <a:ea typeface="Cambria" panose="02040503050406030204" pitchFamily="34" charset="-122"/>
+                <a:cs typeface="Cambria" panose="02040503050406030204" pitchFamily="34" charset="-120"/>
               </a:rPr>
               <a:t>using Recursion &amp;</a:t>
             </a:r>
             <a:endParaRPr lang="en-US" sz="3000" dirty="0"/>
           </a:p>
           <a:p>
-            <a:pPr algn="l" indent="0" marL="0">
+            <a:pPr marL="0" indent="0" algn="l">
               <a:buNone/>
             </a:pPr>
             <a:r>
@@ -2427,9 +2361,9 @@
                 <a:solidFill>
                   <a:srgbClr val="E94560"/>
                 </a:solidFill>
-                <a:latin typeface="Cambria" pitchFamily="34" charset="0"/>
-                <a:ea typeface="Cambria" pitchFamily="34" charset="-122"/>
-                <a:cs typeface="Cambria" pitchFamily="34" charset="-120"/>
+                <a:latin typeface="Cambria" panose="02040503050406030204" pitchFamily="34" charset="0"/>
+                <a:ea typeface="Cambria" panose="02040503050406030204" pitchFamily="34" charset="-122"/>
+                <a:cs typeface="Cambria" panose="02040503050406030204" pitchFamily="34" charset="-120"/>
               </a:rPr>
               <a:t>Backtracking</a:t>
             </a:r>
@@ -2475,13 +2409,12 @@
             <a:avLst/>
           </a:prstGeom>
           <a:noFill/>
-          <a:ln/>
-        </p:spPr>
-        <p:txBody>
-          <a:bodyPr wrap="square" lIns="0" tIns="0" rIns="0" bIns="0" rtlCol="0" anchor="ctr"/>
-          <a:lstStyle/>
-          <a:p>
-            <a:pPr indent="0" marL="0">
+        </p:spPr>
+        <p:txBody>
+          <a:bodyPr wrap="square" lIns="0" tIns="0" rIns="0" bIns="0" rtlCol="0" anchor="ctr"/>
+          <a:lstStyle/>
+          <a:p>
+            <a:pPr marL="0" indent="0">
               <a:buNone/>
             </a:pPr>
             <a:r>
@@ -2489,9 +2422,9 @@
                 <a:solidFill>
                   <a:srgbClr val="A0AEC0"/>
                 </a:solidFill>
-                <a:latin typeface="Calibri" pitchFamily="34" charset="0"/>
-                <a:ea typeface="Calibri" pitchFamily="34" charset="-122"/>
-                <a:cs typeface="Calibri" pitchFamily="34" charset="-120"/>
+                <a:latin typeface="Calibri" panose="020F0502020204030204" pitchFamily="34" charset="0"/>
+                <a:ea typeface="Calibri" panose="020F0502020204030204" pitchFamily="34" charset="-122"/>
+                <a:cs typeface="Calibri" panose="020F0502020204030204" pitchFamily="34" charset="-120"/>
               </a:rPr>
               <a:t>Language:</a:t>
             </a:r>
@@ -2514,13 +2447,12 @@
             <a:avLst/>
           </a:prstGeom>
           <a:noFill/>
-          <a:ln/>
-        </p:spPr>
-        <p:txBody>
-          <a:bodyPr wrap="square" lIns="0" tIns="0" rIns="0" bIns="0" rtlCol="0" anchor="ctr"/>
-          <a:lstStyle/>
-          <a:p>
-            <a:pPr indent="0" marL="0">
+        </p:spPr>
+        <p:txBody>
+          <a:bodyPr wrap="square" lIns="0" tIns="0" rIns="0" bIns="0" rtlCol="0" anchor="ctr"/>
+          <a:lstStyle/>
+          <a:p>
+            <a:pPr marL="0" indent="0">
               <a:buNone/>
             </a:pPr>
             <a:r>
@@ -2528,9 +2460,9 @@
                 <a:solidFill>
                   <a:srgbClr val="FFFFFF"/>
                 </a:solidFill>
-                <a:latin typeface="Calibri" pitchFamily="34" charset="0"/>
-                <a:ea typeface="Calibri" pitchFamily="34" charset="-122"/>
-                <a:cs typeface="Calibri" pitchFamily="34" charset="-120"/>
+                <a:latin typeface="Calibri" panose="020F0502020204030204" pitchFamily="34" charset="0"/>
+                <a:ea typeface="Calibri" panose="020F0502020204030204" pitchFamily="34" charset="-122"/>
+                <a:cs typeface="Calibri" panose="020F0502020204030204" pitchFamily="34" charset="-120"/>
               </a:rPr>
               <a:t>Python 3.x</a:t>
             </a:r>
@@ -2553,13 +2485,12 @@
             <a:avLst/>
           </a:prstGeom>
           <a:noFill/>
-          <a:ln/>
-        </p:spPr>
-        <p:txBody>
-          <a:bodyPr wrap="square" lIns="0" tIns="0" rIns="0" bIns="0" rtlCol="0" anchor="ctr"/>
-          <a:lstStyle/>
-          <a:p>
-            <a:pPr indent="0" marL="0">
+        </p:spPr>
+        <p:txBody>
+          <a:bodyPr wrap="square" lIns="0" tIns="0" rIns="0" bIns="0" rtlCol="0" anchor="ctr"/>
+          <a:lstStyle/>
+          <a:p>
+            <a:pPr marL="0" indent="0">
               <a:buNone/>
             </a:pPr>
             <a:r>
@@ -2567,9 +2498,9 @@
                 <a:solidFill>
                   <a:srgbClr val="A0AEC0"/>
                 </a:solidFill>
-                <a:latin typeface="Calibri" pitchFamily="34" charset="0"/>
-                <a:ea typeface="Calibri" pitchFamily="34" charset="-122"/>
-                <a:cs typeface="Calibri" pitchFamily="34" charset="-120"/>
+                <a:latin typeface="Calibri" panose="020F0502020204030204" pitchFamily="34" charset="0"/>
+                <a:ea typeface="Calibri" panose="020F0502020204030204" pitchFamily="34" charset="-122"/>
+                <a:cs typeface="Calibri" panose="020F0502020204030204" pitchFamily="34" charset="-120"/>
               </a:rPr>
               <a:t>Algorithm:</a:t>
             </a:r>
@@ -2592,13 +2523,12 @@
             <a:avLst/>
           </a:prstGeom>
           <a:noFill/>
-          <a:ln/>
-        </p:spPr>
-        <p:txBody>
-          <a:bodyPr wrap="square" lIns="0" tIns="0" rIns="0" bIns="0" rtlCol="0" anchor="ctr"/>
-          <a:lstStyle/>
-          <a:p>
-            <a:pPr indent="0" marL="0">
+        </p:spPr>
+        <p:txBody>
+          <a:bodyPr wrap="square" lIns="0" tIns="0" rIns="0" bIns="0" rtlCol="0" anchor="ctr"/>
+          <a:lstStyle/>
+          <a:p>
+            <a:pPr marL="0" indent="0">
               <a:buNone/>
             </a:pPr>
             <a:r>
@@ -2606,9 +2536,9 @@
                 <a:solidFill>
                   <a:srgbClr val="FFFFFF"/>
                 </a:solidFill>
-                <a:latin typeface="Calibri" pitchFamily="34" charset="0"/>
-                <a:ea typeface="Calibri" pitchFamily="34" charset="-122"/>
-                <a:cs typeface="Calibri" pitchFamily="34" charset="-120"/>
+                <a:latin typeface="Calibri" panose="020F0502020204030204" pitchFamily="34" charset="0"/>
+                <a:ea typeface="Calibri" panose="020F0502020204030204" pitchFamily="34" charset="-122"/>
+                <a:cs typeface="Calibri" panose="020F0502020204030204" pitchFamily="34" charset="-120"/>
               </a:rPr>
               <a:t>Backtracking</a:t>
             </a:r>
@@ -2631,13 +2561,12 @@
             <a:avLst/>
           </a:prstGeom>
           <a:noFill/>
-          <a:ln/>
-        </p:spPr>
-        <p:txBody>
-          <a:bodyPr wrap="square" lIns="0" tIns="0" rIns="0" bIns="0" rtlCol="0" anchor="ctr"/>
-          <a:lstStyle/>
-          <a:p>
-            <a:pPr indent="0" marL="0">
+        </p:spPr>
+        <p:txBody>
+          <a:bodyPr wrap="square" lIns="0" tIns="0" rIns="0" bIns="0" rtlCol="0" anchor="ctr"/>
+          <a:lstStyle/>
+          <a:p>
+            <a:pPr marL="0" indent="0">
               <a:buNone/>
             </a:pPr>
             <a:r>
@@ -2645,9 +2574,9 @@
                 <a:solidFill>
                   <a:srgbClr val="A0AEC0"/>
                 </a:solidFill>
-                <a:latin typeface="Calibri" pitchFamily="34" charset="0"/>
-                <a:ea typeface="Calibri" pitchFamily="34" charset="-122"/>
-                <a:cs typeface="Calibri" pitchFamily="34" charset="-120"/>
+                <a:latin typeface="Calibri" panose="020F0502020204030204" pitchFamily="34" charset="0"/>
+                <a:ea typeface="Calibri" panose="020F0502020204030204" pitchFamily="34" charset="-122"/>
+                <a:cs typeface="Calibri" panose="020F0502020204030204" pitchFamily="34" charset="-120"/>
               </a:rPr>
               <a:t>Submitted:</a:t>
             </a:r>
@@ -2670,13 +2599,12 @@
             <a:avLst/>
           </a:prstGeom>
           <a:noFill/>
-          <a:ln/>
-        </p:spPr>
-        <p:txBody>
-          <a:bodyPr wrap="square" lIns="0" tIns="0" rIns="0" bIns="0" rtlCol="0" anchor="ctr"/>
-          <a:lstStyle/>
-          <a:p>
-            <a:pPr indent="0" marL="0">
+        </p:spPr>
+        <p:txBody>
+          <a:bodyPr wrap="square" lIns="0" tIns="0" rIns="0" bIns="0" rtlCol="0" anchor="ctr"/>
+          <a:lstStyle/>
+          <a:p>
+            <a:pPr marL="0" indent="0">
               <a:buNone/>
             </a:pPr>
             <a:r>
@@ -2684,9 +2612,9 @@
                 <a:solidFill>
                   <a:srgbClr val="FFFFFF"/>
                 </a:solidFill>
-                <a:latin typeface="Calibri" pitchFamily="34" charset="0"/>
-                <a:ea typeface="Calibri" pitchFamily="34" charset="-122"/>
-                <a:cs typeface="Calibri" pitchFamily="34" charset="-120"/>
+                <a:latin typeface="Calibri" panose="020F0502020204030204" pitchFamily="34" charset="0"/>
+                <a:ea typeface="Calibri" panose="020F0502020204030204" pitchFamily="34" charset="-122"/>
+                <a:cs typeface="Calibri" panose="020F0502020204030204" pitchFamily="34" charset="-120"/>
               </a:rPr>
               <a:t>June 2026</a:t>
             </a:r>
@@ -2709,13 +2637,12 @@
             <a:avLst/>
           </a:prstGeom>
           <a:noFill/>
-          <a:ln/>
         </p:spPr>
         <p:txBody>
           <a:bodyPr wrap="square" rtlCol="0" anchor="ctr"/>
           <a:lstStyle/>
           <a:p>
-            <a:pPr algn="l" indent="0" marL="0">
+            <a:pPr marL="0" indent="0" algn="l">
               <a:buNone/>
             </a:pPr>
             <a:r>
@@ -2723,11 +2650,11 @@
                 <a:solidFill>
                   <a:srgbClr val="A0AEC0"/>
                 </a:solidFill>
-                <a:latin typeface="Calibri" pitchFamily="34" charset="0"/>
-                <a:ea typeface="Calibri" pitchFamily="34" charset="-122"/>
-                <a:cs typeface="Calibri" pitchFamily="34" charset="-120"/>
-              </a:rPr>
-              <a:t>Department of Training &amp; Placements</a:t>
+                <a:latin typeface="Calibri" panose="020F0502020204030204" pitchFamily="34" charset="0"/>
+                <a:ea typeface="Calibri" panose="020F0502020204030204" pitchFamily="34" charset="-122"/>
+                <a:cs typeface="Calibri" panose="020F0502020204030204" pitchFamily="34" charset="-120"/>
+              </a:rPr>
+              <a:t>Department of Artificial Intelligence &amp; Machine Learning</a:t>
             </a:r>
             <a:endParaRPr lang="en-US" sz="900" dirty="0"/>
           </a:p>
@@ -2743,12 +2670,13 @@
 
 <file path=ppt/slides/slide2.xml><?xml version="1.0" encoding="utf-8"?>
 <p:sld xmlns:a="http://schemas.openxmlformats.org/drawingml/2006/main" xmlns:r="http://schemas.openxmlformats.org/officeDocument/2006/relationships" xmlns:p="http://schemas.openxmlformats.org/presentationml/2006/main">
-  <p:cSld name="Slide 2">
+  <p:cSld>
     <p:bg>
       <p:bgPr>
         <a:solidFill>
           <a:srgbClr val="F7F9FC"/>
         </a:solidFill>
+        <a:effectLst/>
       </p:bgPr>
     </p:bg>
     <p:spTree>
@@ -2782,7 +2710,6 @@
           <a:solidFill>
             <a:srgbClr val="1A1A2E"/>
           </a:solidFill>
-          <a:ln/>
         </p:spPr>
       </p:sp>
       <p:sp>
@@ -2800,13 +2727,12 @@
             <a:avLst/>
           </a:prstGeom>
           <a:noFill/>
-          <a:ln/>
-        </p:spPr>
-        <p:txBody>
-          <a:bodyPr wrap="square" lIns="0" tIns="0" rIns="0" bIns="0" rtlCol="0" anchor="ctr"/>
-          <a:lstStyle/>
-          <a:p>
-            <a:pPr algn="l" indent="0" marL="0">
+        </p:spPr>
+        <p:txBody>
+          <a:bodyPr wrap="square" lIns="0" tIns="0" rIns="0" bIns="0" rtlCol="0" anchor="ctr"/>
+          <a:lstStyle/>
+          <a:p>
+            <a:pPr marL="0" indent="0" algn="l">
               <a:buNone/>
             </a:pPr>
             <a:r>
@@ -2814,9 +2740,9 @@
                 <a:solidFill>
                   <a:srgbClr val="FFFFFF"/>
                 </a:solidFill>
-                <a:latin typeface="Cambria" pitchFamily="34" charset="0"/>
-                <a:ea typeface="Cambria" pitchFamily="34" charset="-122"/>
-                <a:cs typeface="Cambria" pitchFamily="34" charset="-120"/>
+                <a:latin typeface="Cambria" panose="02040503050406030204" pitchFamily="34" charset="0"/>
+                <a:ea typeface="Cambria" panose="02040503050406030204" pitchFamily="34" charset="-122"/>
+                <a:cs typeface="Cambria" panose="02040503050406030204" pitchFamily="34" charset="-120"/>
               </a:rPr>
               <a:t>Problem Statement</a:t>
             </a:r>
@@ -2843,9 +2769,8 @@
           <a:solidFill>
             <a:srgbClr val="1A1A2E"/>
           </a:solidFill>
-          <a:ln/>
           <a:effectLst>
-            <a:outerShdw sx="100000" sy="100000" kx="0" ky="0" algn="bl" rotWithShape="0" blurRad="152400" dist="50800" dir="2700000">
+            <a:outerShdw blurRad="152400" dist="50800" dir="2700000" algn="bl" rotWithShape="0">
               <a:srgbClr val="000000">
                 <a:alpha val="25000"/>
               </a:srgbClr>
@@ -2868,13 +2793,12 @@
             <a:avLst/>
           </a:prstGeom>
           <a:noFill/>
-          <a:ln/>
-        </p:spPr>
-        <p:txBody>
-          <a:bodyPr wrap="square" lIns="0" tIns="0" rIns="0" bIns="0" rtlCol="0" anchor="ctr"/>
-          <a:lstStyle/>
-          <a:p>
-            <a:pPr algn="l" indent="0" marL="0">
+        </p:spPr>
+        <p:txBody>
+          <a:bodyPr wrap="square" lIns="0" tIns="0" rIns="0" bIns="0" rtlCol="0" anchor="ctr"/>
+          <a:lstStyle/>
+          <a:p>
+            <a:pPr marL="0" indent="0" algn="l">
               <a:buNone/>
             </a:pPr>
             <a:r>
@@ -2882,9 +2806,9 @@
                 <a:solidFill>
                   <a:srgbClr val="E94560"/>
                 </a:solidFill>
-                <a:latin typeface="Cambria" pitchFamily="34" charset="0"/>
-                <a:ea typeface="Cambria" pitchFamily="34" charset="-122"/>
-                <a:cs typeface="Cambria" pitchFamily="34" charset="-120"/>
+                <a:latin typeface="Cambria" panose="02040503050406030204" pitchFamily="34" charset="0"/>
+                <a:ea typeface="Cambria" panose="02040503050406030204" pitchFamily="34" charset="-122"/>
+                <a:cs typeface="Cambria" panose="02040503050406030204" pitchFamily="34" charset="-120"/>
               </a:rPr>
               <a:t>What is Sudoku?</a:t>
             </a:r>
@@ -2909,7 +2833,6 @@
           <a:solidFill>
             <a:srgbClr val="E94560"/>
           </a:solidFill>
-          <a:ln/>
         </p:spPr>
       </p:sp>
       <p:sp>
@@ -2927,13 +2850,12 @@
             <a:avLst/>
           </a:prstGeom>
           <a:noFill/>
-          <a:ln/>
-        </p:spPr>
-        <p:txBody>
-          <a:bodyPr wrap="square" lIns="0" tIns="0" rIns="0" bIns="0" rtlCol="0" anchor="ctr"/>
-          <a:lstStyle/>
-          <a:p>
-            <a:pPr algn="l" indent="0" marL="0">
+        </p:spPr>
+        <p:txBody>
+          <a:bodyPr wrap="square" lIns="0" tIns="0" rIns="0" bIns="0" rtlCol="0" anchor="ctr"/>
+          <a:lstStyle/>
+          <a:p>
+            <a:pPr marL="0" indent="0" algn="l">
               <a:buNone/>
             </a:pPr>
             <a:r>
@@ -2941,9 +2863,9 @@
                 <a:solidFill>
                   <a:srgbClr val="FFFFFF"/>
                 </a:solidFill>
-                <a:latin typeface="Calibri" pitchFamily="34" charset="0"/>
-                <a:ea typeface="Calibri" pitchFamily="34" charset="-122"/>
-                <a:cs typeface="Calibri" pitchFamily="34" charset="-120"/>
+                <a:latin typeface="Calibri" panose="020F0502020204030204" pitchFamily="34" charset="0"/>
+                <a:ea typeface="Calibri" panose="020F0502020204030204" pitchFamily="34" charset="-122"/>
+                <a:cs typeface="Calibri" panose="020F0502020204030204" pitchFamily="34" charset="-120"/>
               </a:rPr>
               <a:t>9×9 grid divided into nine 3×3 sub-grids</a:t>
             </a:r>
@@ -2968,7 +2890,6 @@
           <a:solidFill>
             <a:srgbClr val="E94560"/>
           </a:solidFill>
-          <a:ln/>
         </p:spPr>
       </p:sp>
       <p:sp>
@@ -2986,13 +2907,12 @@
             <a:avLst/>
           </a:prstGeom>
           <a:noFill/>
-          <a:ln/>
-        </p:spPr>
-        <p:txBody>
-          <a:bodyPr wrap="square" lIns="0" tIns="0" rIns="0" bIns="0" rtlCol="0" anchor="ctr"/>
-          <a:lstStyle/>
-          <a:p>
-            <a:pPr algn="l" indent="0" marL="0">
+        </p:spPr>
+        <p:txBody>
+          <a:bodyPr wrap="square" lIns="0" tIns="0" rIns="0" bIns="0" rtlCol="0" anchor="ctr"/>
+          <a:lstStyle/>
+          <a:p>
+            <a:pPr marL="0" indent="0" algn="l">
               <a:buNone/>
             </a:pPr>
             <a:r>
@@ -3000,9 +2920,9 @@
                 <a:solidFill>
                   <a:srgbClr val="FFFFFF"/>
                 </a:solidFill>
-                <a:latin typeface="Calibri" pitchFamily="34" charset="0"/>
-                <a:ea typeface="Calibri" pitchFamily="34" charset="-122"/>
-                <a:cs typeface="Calibri" pitchFamily="34" charset="-120"/>
+                <a:latin typeface="Calibri" panose="020F0502020204030204" pitchFamily="34" charset="0"/>
+                <a:ea typeface="Calibri" panose="020F0502020204030204" pitchFamily="34" charset="-122"/>
+                <a:cs typeface="Calibri" panose="020F0502020204030204" pitchFamily="34" charset="-120"/>
               </a:rPr>
               <a:t>Partially filled with digits 1–9</a:t>
             </a:r>
@@ -3027,7 +2947,6 @@
           <a:solidFill>
             <a:srgbClr val="E94560"/>
           </a:solidFill>
-          <a:ln/>
         </p:spPr>
       </p:sp>
       <p:sp>
@@ -3045,13 +2964,12 @@
             <a:avLst/>
           </a:prstGeom>
           <a:noFill/>
-          <a:ln/>
-        </p:spPr>
-        <p:txBody>
-          <a:bodyPr wrap="square" lIns="0" tIns="0" rIns="0" bIns="0" rtlCol="0" anchor="ctr"/>
-          <a:lstStyle/>
-          <a:p>
-            <a:pPr algn="l" indent="0" marL="0">
+        </p:spPr>
+        <p:txBody>
+          <a:bodyPr wrap="square" lIns="0" tIns="0" rIns="0" bIns="0" rtlCol="0" anchor="ctr"/>
+          <a:lstStyle/>
+          <a:p>
+            <a:pPr marL="0" indent="0" algn="l">
               <a:buNone/>
             </a:pPr>
             <a:r>
@@ -3059,9 +2977,9 @@
                 <a:solidFill>
                   <a:srgbClr val="FFFFFF"/>
                 </a:solidFill>
-                <a:latin typeface="Calibri" pitchFamily="34" charset="0"/>
-                <a:ea typeface="Calibri" pitchFamily="34" charset="-122"/>
-                <a:cs typeface="Calibri" pitchFamily="34" charset="-120"/>
+                <a:latin typeface="Calibri" panose="020F0502020204030204" pitchFamily="34" charset="0"/>
+                <a:ea typeface="Calibri" panose="020F0502020204030204" pitchFamily="34" charset="-122"/>
+                <a:cs typeface="Calibri" panose="020F0502020204030204" pitchFamily="34" charset="-120"/>
               </a:rPr>
               <a:t>Must complete all empty cells</a:t>
             </a:r>
@@ -3086,7 +3004,6 @@
           <a:solidFill>
             <a:srgbClr val="E94560"/>
           </a:solidFill>
-          <a:ln/>
         </p:spPr>
       </p:sp>
       <p:sp>
@@ -3104,13 +3021,12 @@
             <a:avLst/>
           </a:prstGeom>
           <a:noFill/>
-          <a:ln/>
-        </p:spPr>
-        <p:txBody>
-          <a:bodyPr wrap="square" lIns="0" tIns="0" rIns="0" bIns="0" rtlCol="0" anchor="ctr"/>
-          <a:lstStyle/>
-          <a:p>
-            <a:pPr algn="l" indent="0" marL="0">
+        </p:spPr>
+        <p:txBody>
+          <a:bodyPr wrap="square" lIns="0" tIns="0" rIns="0" bIns="0" rtlCol="0" anchor="ctr"/>
+          <a:lstStyle/>
+          <a:p>
+            <a:pPr marL="0" indent="0" algn="l">
               <a:buNone/>
             </a:pPr>
             <a:r>
@@ -3118,9 +3034,9 @@
                 <a:solidFill>
                   <a:srgbClr val="FFFFFF"/>
                 </a:solidFill>
-                <a:latin typeface="Calibri" pitchFamily="34" charset="0"/>
-                <a:ea typeface="Calibri" pitchFamily="34" charset="-122"/>
-                <a:cs typeface="Calibri" pitchFamily="34" charset="-120"/>
+                <a:latin typeface="Calibri" panose="020F0502020204030204" pitchFamily="34" charset="0"/>
+                <a:ea typeface="Calibri" panose="020F0502020204030204" pitchFamily="34" charset="-122"/>
+                <a:cs typeface="Calibri" panose="020F0502020204030204" pitchFamily="34" charset="-120"/>
               </a:rPr>
               <a:t>Classic constraint satisfaction puzzle</a:t>
             </a:r>
@@ -3147,9 +3063,8 @@
           <a:solidFill>
             <a:srgbClr val="FFFFFF"/>
           </a:solidFill>
-          <a:ln/>
           <a:effectLst>
-            <a:outerShdw sx="100000" sy="100000" kx="0" ky="0" algn="bl" rotWithShape="0" blurRad="152400" dist="50800" dir="2700000">
+            <a:outerShdw blurRad="152400" dist="50800" dir="2700000" algn="bl" rotWithShape="0">
               <a:srgbClr val="000000">
                 <a:alpha val="25000"/>
               </a:srgbClr>
@@ -3174,7 +3089,6 @@
           <a:solidFill>
             <a:srgbClr val="E94560"/>
           </a:solidFill>
-          <a:ln/>
         </p:spPr>
       </p:sp>
       <p:sp>
@@ -3192,13 +3106,12 @@
             <a:avLst/>
           </a:prstGeom>
           <a:noFill/>
-          <a:ln/>
-        </p:spPr>
-        <p:txBody>
-          <a:bodyPr wrap="square" lIns="0" tIns="0" rIns="0" bIns="0" rtlCol="0" anchor="ctr"/>
-          <a:lstStyle/>
-          <a:p>
-            <a:pPr algn="ctr" indent="0" marL="0">
+        </p:spPr>
+        <p:txBody>
+          <a:bodyPr wrap="square" lIns="0" tIns="0" rIns="0" bIns="0" rtlCol="0" anchor="ctr"/>
+          <a:lstStyle/>
+          <a:p>
+            <a:pPr marL="0" indent="0" algn="ctr">
               <a:buNone/>
             </a:pPr>
             <a:r>
@@ -3228,13 +3141,12 @@
             <a:avLst/>
           </a:prstGeom>
           <a:noFill/>
-          <a:ln/>
-        </p:spPr>
-        <p:txBody>
-          <a:bodyPr wrap="square" lIns="0" tIns="0" rIns="0" bIns="0" rtlCol="0" anchor="ctr"/>
-          <a:lstStyle/>
-          <a:p>
-            <a:pPr algn="l" indent="0" marL="0">
+        </p:spPr>
+        <p:txBody>
+          <a:bodyPr wrap="square" lIns="0" tIns="0" rIns="0" bIns="0" rtlCol="0" anchor="ctr"/>
+          <a:lstStyle/>
+          <a:p>
+            <a:pPr marL="0" indent="0" algn="l">
               <a:buNone/>
             </a:pPr>
             <a:r>
@@ -3242,9 +3154,9 @@
                 <a:solidFill>
                   <a:srgbClr val="1A1A2E"/>
                 </a:solidFill>
-                <a:latin typeface="Calibri" pitchFamily="34" charset="0"/>
-                <a:ea typeface="Calibri" pitchFamily="34" charset="-122"/>
-                <a:cs typeface="Calibri" pitchFamily="34" charset="-120"/>
+                <a:latin typeface="Calibri" panose="020F0502020204030204" pitchFamily="34" charset="0"/>
+                <a:ea typeface="Calibri" panose="020F0502020204030204" pitchFamily="34" charset="-122"/>
+                <a:cs typeface="Calibri" panose="020F0502020204030204" pitchFamily="34" charset="-120"/>
               </a:rPr>
               <a:t>Row Rule</a:t>
             </a:r>
@@ -3267,13 +3179,12 @@
             <a:avLst/>
           </a:prstGeom>
           <a:noFill/>
-          <a:ln/>
-        </p:spPr>
-        <p:txBody>
-          <a:bodyPr wrap="square" lIns="0" tIns="0" rIns="0" bIns="0" rtlCol="0" anchor="ctr"/>
-          <a:lstStyle/>
-          <a:p>
-            <a:pPr algn="l" indent="0" marL="0">
+        </p:spPr>
+        <p:txBody>
+          <a:bodyPr wrap="square" lIns="0" tIns="0" rIns="0" bIns="0" rtlCol="0" anchor="ctr"/>
+          <a:lstStyle/>
+          <a:p>
+            <a:pPr marL="0" indent="0" algn="l">
               <a:buNone/>
             </a:pPr>
             <a:r>
@@ -3281,9 +3192,9 @@
                 <a:solidFill>
                   <a:srgbClr val="555555"/>
                 </a:solidFill>
-                <a:latin typeface="Calibri" pitchFamily="34" charset="0"/>
-                <a:ea typeface="Calibri" pitchFamily="34" charset="-122"/>
-                <a:cs typeface="Calibri" pitchFamily="34" charset="-120"/>
+                <a:latin typeface="Calibri" panose="020F0502020204030204" pitchFamily="34" charset="0"/>
+                <a:ea typeface="Calibri" panose="020F0502020204030204" pitchFamily="34" charset="-122"/>
+                <a:cs typeface="Calibri" panose="020F0502020204030204" pitchFamily="34" charset="-120"/>
               </a:rPr>
               <a:t>Each row must contain digits 1–9 without repetition</a:t>
             </a:r>
@@ -3310,9 +3221,8 @@
           <a:solidFill>
             <a:srgbClr val="FFFFFF"/>
           </a:solidFill>
-          <a:ln/>
           <a:effectLst>
-            <a:outerShdw sx="100000" sy="100000" kx="0" ky="0" algn="bl" rotWithShape="0" blurRad="152400" dist="50800" dir="2700000">
+            <a:outerShdw blurRad="152400" dist="50800" dir="2700000" algn="bl" rotWithShape="0">
               <a:srgbClr val="000000">
                 <a:alpha val="25000"/>
               </a:srgbClr>
@@ -3337,7 +3247,6 @@
           <a:solidFill>
             <a:srgbClr val="E94560"/>
           </a:solidFill>
-          <a:ln/>
         </p:spPr>
       </p:sp>
       <p:sp>
@@ -3355,13 +3264,12 @@
             <a:avLst/>
           </a:prstGeom>
           <a:noFill/>
-          <a:ln/>
-        </p:spPr>
-        <p:txBody>
-          <a:bodyPr wrap="square" lIns="0" tIns="0" rIns="0" bIns="0" rtlCol="0" anchor="ctr"/>
-          <a:lstStyle/>
-          <a:p>
-            <a:pPr algn="ctr" indent="0" marL="0">
+        </p:spPr>
+        <p:txBody>
+          <a:bodyPr wrap="square" lIns="0" tIns="0" rIns="0" bIns="0" rtlCol="0" anchor="ctr"/>
+          <a:lstStyle/>
+          <a:p>
+            <a:pPr marL="0" indent="0" algn="ctr">
               <a:buNone/>
             </a:pPr>
             <a:r>
@@ -3391,13 +3299,12 @@
             <a:avLst/>
           </a:prstGeom>
           <a:noFill/>
-          <a:ln/>
-        </p:spPr>
-        <p:txBody>
-          <a:bodyPr wrap="square" lIns="0" tIns="0" rIns="0" bIns="0" rtlCol="0" anchor="ctr"/>
-          <a:lstStyle/>
-          <a:p>
-            <a:pPr algn="l" indent="0" marL="0">
+        </p:spPr>
+        <p:txBody>
+          <a:bodyPr wrap="square" lIns="0" tIns="0" rIns="0" bIns="0" rtlCol="0" anchor="ctr"/>
+          <a:lstStyle/>
+          <a:p>
+            <a:pPr marL="0" indent="0" algn="l">
               <a:buNone/>
             </a:pPr>
             <a:r>
@@ -3405,9 +3312,9 @@
                 <a:solidFill>
                   <a:srgbClr val="1A1A2E"/>
                 </a:solidFill>
-                <a:latin typeface="Calibri" pitchFamily="34" charset="0"/>
-                <a:ea typeface="Calibri" pitchFamily="34" charset="-122"/>
-                <a:cs typeface="Calibri" pitchFamily="34" charset="-120"/>
+                <a:latin typeface="Calibri" panose="020F0502020204030204" pitchFamily="34" charset="0"/>
+                <a:ea typeface="Calibri" panose="020F0502020204030204" pitchFamily="34" charset="-122"/>
+                <a:cs typeface="Calibri" panose="020F0502020204030204" pitchFamily="34" charset="-120"/>
               </a:rPr>
               <a:t>Column Rule</a:t>
             </a:r>
@@ -3430,13 +3337,12 @@
             <a:avLst/>
           </a:prstGeom>
           <a:noFill/>
-          <a:ln/>
-        </p:spPr>
-        <p:txBody>
-          <a:bodyPr wrap="square" lIns="0" tIns="0" rIns="0" bIns="0" rtlCol="0" anchor="ctr"/>
-          <a:lstStyle/>
-          <a:p>
-            <a:pPr algn="l" indent="0" marL="0">
+        </p:spPr>
+        <p:txBody>
+          <a:bodyPr wrap="square" lIns="0" tIns="0" rIns="0" bIns="0" rtlCol="0" anchor="ctr"/>
+          <a:lstStyle/>
+          <a:p>
+            <a:pPr marL="0" indent="0" algn="l">
               <a:buNone/>
             </a:pPr>
             <a:r>
@@ -3444,9 +3350,9 @@
                 <a:solidFill>
                   <a:srgbClr val="555555"/>
                 </a:solidFill>
-                <a:latin typeface="Calibri" pitchFamily="34" charset="0"/>
-                <a:ea typeface="Calibri" pitchFamily="34" charset="-122"/>
-                <a:cs typeface="Calibri" pitchFamily="34" charset="-120"/>
+                <a:latin typeface="Calibri" panose="020F0502020204030204" pitchFamily="34" charset="0"/>
+                <a:ea typeface="Calibri" panose="020F0502020204030204" pitchFamily="34" charset="-122"/>
+                <a:cs typeface="Calibri" panose="020F0502020204030204" pitchFamily="34" charset="-120"/>
               </a:rPr>
               <a:t>Each column must contain digits 1–9 without repetition</a:t>
             </a:r>
@@ -3473,9 +3379,8 @@
           <a:solidFill>
             <a:srgbClr val="FFFFFF"/>
           </a:solidFill>
-          <a:ln/>
           <a:effectLst>
-            <a:outerShdw sx="100000" sy="100000" kx="0" ky="0" algn="bl" rotWithShape="0" blurRad="152400" dist="50800" dir="2700000">
+            <a:outerShdw blurRad="152400" dist="50800" dir="2700000" algn="bl" rotWithShape="0">
               <a:srgbClr val="000000">
                 <a:alpha val="25000"/>
               </a:srgbClr>
@@ -3500,7 +3405,6 @@
           <a:solidFill>
             <a:srgbClr val="E94560"/>
           </a:solidFill>
-          <a:ln/>
         </p:spPr>
       </p:sp>
       <p:sp>
@@ -3518,13 +3422,12 @@
             <a:avLst/>
           </a:prstGeom>
           <a:noFill/>
-          <a:ln/>
-        </p:spPr>
-        <p:txBody>
-          <a:bodyPr wrap="square" lIns="0" tIns="0" rIns="0" bIns="0" rtlCol="0" anchor="ctr"/>
-          <a:lstStyle/>
-          <a:p>
-            <a:pPr algn="ctr" indent="0" marL="0">
+        </p:spPr>
+        <p:txBody>
+          <a:bodyPr wrap="square" lIns="0" tIns="0" rIns="0" bIns="0" rtlCol="0" anchor="ctr"/>
+          <a:lstStyle/>
+          <a:p>
+            <a:pPr marL="0" indent="0" algn="ctr">
               <a:buNone/>
             </a:pPr>
             <a:r>
@@ -3554,13 +3457,12 @@
             <a:avLst/>
           </a:prstGeom>
           <a:noFill/>
-          <a:ln/>
-        </p:spPr>
-        <p:txBody>
-          <a:bodyPr wrap="square" lIns="0" tIns="0" rIns="0" bIns="0" rtlCol="0" anchor="ctr"/>
-          <a:lstStyle/>
-          <a:p>
-            <a:pPr algn="l" indent="0" marL="0">
+        </p:spPr>
+        <p:txBody>
+          <a:bodyPr wrap="square" lIns="0" tIns="0" rIns="0" bIns="0" rtlCol="0" anchor="ctr"/>
+          <a:lstStyle/>
+          <a:p>
+            <a:pPr marL="0" indent="0" algn="l">
               <a:buNone/>
             </a:pPr>
             <a:r>
@@ -3568,9 +3470,9 @@
                 <a:solidFill>
                   <a:srgbClr val="1A1A2E"/>
                 </a:solidFill>
-                <a:latin typeface="Calibri" pitchFamily="34" charset="0"/>
-                <a:ea typeface="Calibri" pitchFamily="34" charset="-122"/>
-                <a:cs typeface="Calibri" pitchFamily="34" charset="-120"/>
+                <a:latin typeface="Calibri" panose="020F0502020204030204" pitchFamily="34" charset="0"/>
+                <a:ea typeface="Calibri" panose="020F0502020204030204" pitchFamily="34" charset="-122"/>
+                <a:cs typeface="Calibri" panose="020F0502020204030204" pitchFamily="34" charset="-120"/>
               </a:rPr>
               <a:t>Box Rule</a:t>
             </a:r>
@@ -3593,13 +3495,12 @@
             <a:avLst/>
           </a:prstGeom>
           <a:noFill/>
-          <a:ln/>
-        </p:spPr>
-        <p:txBody>
-          <a:bodyPr wrap="square" lIns="0" tIns="0" rIns="0" bIns="0" rtlCol="0" anchor="ctr"/>
-          <a:lstStyle/>
-          <a:p>
-            <a:pPr algn="l" indent="0" marL="0">
+        </p:spPr>
+        <p:txBody>
+          <a:bodyPr wrap="square" lIns="0" tIns="0" rIns="0" bIns="0" rtlCol="0" anchor="ctr"/>
+          <a:lstStyle/>
+          <a:p>
+            <a:pPr marL="0" indent="0" algn="l">
               <a:buNone/>
             </a:pPr>
             <a:r>
@@ -3607,9 +3508,9 @@
                 <a:solidFill>
                   <a:srgbClr val="555555"/>
                 </a:solidFill>
-                <a:latin typeface="Calibri" pitchFamily="34" charset="0"/>
-                <a:ea typeface="Calibri" pitchFamily="34" charset="-122"/>
-                <a:cs typeface="Calibri" pitchFamily="34" charset="-120"/>
+                <a:latin typeface="Calibri" panose="020F0502020204030204" pitchFamily="34" charset="0"/>
+                <a:ea typeface="Calibri" panose="020F0502020204030204" pitchFamily="34" charset="-122"/>
+                <a:cs typeface="Calibri" panose="020F0502020204030204" pitchFamily="34" charset="-120"/>
               </a:rPr>
               <a:t>Each 3×3 sub-grid must contain digits 1–9 without repetition</a:t>
             </a:r>
@@ -3636,45 +3537,11 @@
           <a:solidFill>
             <a:srgbClr val="E94560"/>
           </a:solidFill>
-          <a:ln/>
-        </p:spPr>
-      </p:sp>
-      <p:sp>
-        <p:nvSpPr>
-          <p:cNvPr id="30" name="Text 28"/>
-          <p:cNvSpPr/>
-          <p:nvPr/>
-        </p:nvSpPr>
-        <p:spPr>
-          <a:xfrm>
-            <a:off x="457200" y="4608576"/>
-            <a:ext cx="8229600" cy="338328"/>
-          </a:xfrm>
-          <a:prstGeom prst="rect">
-            <a:avLst/>
-          </a:prstGeom>
-          <a:noFill/>
-          <a:ln/>
-        </p:spPr>
-        <p:txBody>
-          <a:bodyPr wrap="square" lIns="0" tIns="0" rIns="0" bIns="0" rtlCol="0" anchor="ctr"/>
-          <a:lstStyle/>
-          <a:p>
-            <a:pPr algn="ctr" indent="0" marL="0">
-              <a:buNone/>
-            </a:pPr>
-            <a:r>
-              <a:rPr lang="en-US" sz="1200" b="1" dirty="0">
-                <a:solidFill>
-                  <a:srgbClr val="FFFFFF"/>
-                </a:solidFill>
-                <a:latin typeface="Calibri" pitchFamily="34" charset="0"/>
-                <a:ea typeface="Calibri" pitchFamily="34" charset="-122"/>
-                <a:cs typeface="Calibri" pitchFamily="34" charset="-120"/>
-              </a:rPr>
-              <a:t>Challenge: Automatically solve any valid Sudoku puzzle while handling invalid inputs gracefully</a:t>
-            </a:r>
-            <a:endParaRPr lang="en-US" sz="1200" dirty="0"/>
+        </p:spPr>
+        <p:txBody>
+          <a:bodyPr/>
+          <a:p>
+            <a:endParaRPr lang="en-GB" altLang="en-US"/>
           </a:p>
         </p:txBody>
       </p:sp>
@@ -3688,12 +3555,13 @@
 
 <file path=ppt/slides/slide3.xml><?xml version="1.0" encoding="utf-8"?>
 <p:sld xmlns:a="http://schemas.openxmlformats.org/drawingml/2006/main" xmlns:r="http://schemas.openxmlformats.org/officeDocument/2006/relationships" xmlns:p="http://schemas.openxmlformats.org/presentationml/2006/main">
-  <p:cSld name="Slide 3">
+  <p:cSld>
     <p:bg>
       <p:bgPr>
         <a:solidFill>
           <a:srgbClr val="1A1A2E"/>
         </a:solidFill>
+        <a:effectLst/>
       </p:bgPr>
     </p:bg>
     <p:spTree>
@@ -3725,13 +3593,12 @@
             <a:avLst/>
           </a:prstGeom>
           <a:noFill/>
-          <a:ln/>
-        </p:spPr>
-        <p:txBody>
-          <a:bodyPr wrap="square" lIns="0" tIns="0" rIns="0" bIns="0" rtlCol="0" anchor="ctr"/>
-          <a:lstStyle/>
-          <a:p>
-            <a:pPr algn="l" indent="0" marL="0">
+        </p:spPr>
+        <p:txBody>
+          <a:bodyPr wrap="square" lIns="0" tIns="0" rIns="0" bIns="0" rtlCol="0" anchor="ctr"/>
+          <a:lstStyle/>
+          <a:p>
+            <a:pPr marL="0" indent="0" algn="l">
               <a:buNone/>
             </a:pPr>
             <a:r>
@@ -3739,9 +3606,9 @@
                 <a:solidFill>
                   <a:srgbClr val="FFFFFF"/>
                 </a:solidFill>
-                <a:latin typeface="Cambria" pitchFamily="34" charset="0"/>
-                <a:ea typeface="Cambria" pitchFamily="34" charset="-122"/>
-                <a:cs typeface="Cambria" pitchFamily="34" charset="-120"/>
+                <a:latin typeface="Cambria" panose="02040503050406030204" pitchFamily="34" charset="0"/>
+                <a:ea typeface="Cambria" panose="02040503050406030204" pitchFamily="34" charset="-122"/>
+                <a:cs typeface="Cambria" panose="02040503050406030204" pitchFamily="34" charset="-120"/>
               </a:rPr>
               <a:t>Methodology / Approach</a:t>
             </a:r>
@@ -3791,9 +3658,8 @@
           <a:solidFill>
             <a:srgbClr val="0F3460"/>
           </a:solidFill>
-          <a:ln/>
           <a:effectLst>
-            <a:outerShdw sx="100000" sy="100000" kx="0" ky="0" algn="bl" rotWithShape="0" blurRad="152400" dist="50800" dir="2700000">
+            <a:outerShdw blurRad="152400" dist="50800" dir="2700000" algn="bl" rotWithShape="0">
               <a:srgbClr val="000000">
                 <a:alpha val="25000"/>
               </a:srgbClr>
@@ -3818,7 +3684,6 @@
           <a:solidFill>
             <a:srgbClr val="E94560"/>
           </a:solidFill>
-          <a:ln/>
         </p:spPr>
       </p:sp>
       <p:sp>
@@ -3836,13 +3701,12 @@
             <a:avLst/>
           </a:prstGeom>
           <a:noFill/>
-          <a:ln/>
-        </p:spPr>
-        <p:txBody>
-          <a:bodyPr wrap="square" lIns="0" tIns="0" rIns="0" bIns="0" rtlCol="0" anchor="ctr"/>
-          <a:lstStyle/>
-          <a:p>
-            <a:pPr algn="ctr" indent="0" marL="0">
+        </p:spPr>
+        <p:txBody>
+          <a:bodyPr wrap="square" lIns="0" tIns="0" rIns="0" bIns="0" rtlCol="0" anchor="ctr"/>
+          <a:lstStyle/>
+          <a:p>
+            <a:pPr marL="0" indent="0" algn="ctr">
               <a:buNone/>
             </a:pPr>
             <a:r>
@@ -3872,13 +3736,12 @@
             <a:avLst/>
           </a:prstGeom>
           <a:noFill/>
-          <a:ln/>
-        </p:spPr>
-        <p:txBody>
-          <a:bodyPr wrap="square" lIns="0" tIns="0" rIns="0" bIns="0" rtlCol="0" anchor="ctr"/>
-          <a:lstStyle/>
-          <a:p>
-            <a:pPr algn="ctr" indent="0" marL="0">
+        </p:spPr>
+        <p:txBody>
+          <a:bodyPr wrap="square" lIns="0" tIns="0" rIns="0" bIns="0" rtlCol="0" anchor="ctr"/>
+          <a:lstStyle/>
+          <a:p>
+            <a:pPr marL="0" indent="0" algn="ctr">
               <a:buNone/>
             </a:pPr>
             <a:r>
@@ -3886,9 +3749,9 @@
                 <a:solidFill>
                   <a:srgbClr val="2DD4BF"/>
                 </a:solidFill>
-                <a:latin typeface="Calibri" pitchFamily="34" charset="0"/>
-                <a:ea typeface="Calibri" pitchFamily="34" charset="-122"/>
-                <a:cs typeface="Calibri" pitchFamily="34" charset="-120"/>
+                <a:latin typeface="Calibri" panose="020F0502020204030204" pitchFamily="34" charset="0"/>
+                <a:ea typeface="Calibri" panose="020F0502020204030204" pitchFamily="34" charset="-122"/>
+                <a:cs typeface="Calibri" panose="020F0502020204030204" pitchFamily="34" charset="-120"/>
               </a:rPr>
               <a:t>Find Empty</a:t>
             </a:r>
@@ -3911,13 +3774,12 @@
             <a:avLst/>
           </a:prstGeom>
           <a:noFill/>
-          <a:ln/>
-        </p:spPr>
-        <p:txBody>
-          <a:bodyPr wrap="square" lIns="0" tIns="0" rIns="0" bIns="0" rtlCol="0" anchor="ctr"/>
-          <a:lstStyle/>
-          <a:p>
-            <a:pPr algn="ctr" indent="0" marL="0">
+        </p:spPr>
+        <p:txBody>
+          <a:bodyPr wrap="square" lIns="0" tIns="0" rIns="0" bIns="0" rtlCol="0" anchor="ctr"/>
+          <a:lstStyle/>
+          <a:p>
+            <a:pPr marL="0" indent="0" algn="ctr">
               <a:buNone/>
             </a:pPr>
             <a:r>
@@ -3925,9 +3787,9 @@
                 <a:solidFill>
                   <a:srgbClr val="A0AEC0"/>
                 </a:solidFill>
-                <a:latin typeface="Calibri" pitchFamily="34" charset="0"/>
-                <a:ea typeface="Calibri" pitchFamily="34" charset="-122"/>
-                <a:cs typeface="Calibri" pitchFamily="34" charset="-120"/>
+                <a:latin typeface="Calibri" panose="020F0502020204030204" pitchFamily="34" charset="0"/>
+                <a:ea typeface="Calibri" panose="020F0502020204030204" pitchFamily="34" charset="-122"/>
+                <a:cs typeface="Calibri" panose="020F0502020204030204" pitchFamily="34" charset="-120"/>
               </a:rPr>
               <a:t>Scan board for next empty cell (value = 0)</a:t>
             </a:r>
@@ -3973,13 +3835,12 @@
             <a:avLst/>
           </a:prstGeom>
           <a:noFill/>
-          <a:ln/>
-        </p:spPr>
-        <p:txBody>
-          <a:bodyPr wrap="square" lIns="0" tIns="0" rIns="0" bIns="0" rtlCol="0" anchor="ctr"/>
-          <a:lstStyle/>
-          <a:p>
-            <a:pPr algn="ctr" indent="0" marL="0">
+        </p:spPr>
+        <p:txBody>
+          <a:bodyPr wrap="square" lIns="0" tIns="0" rIns="0" bIns="0" rtlCol="0" anchor="ctr"/>
+          <a:lstStyle/>
+          <a:p>
+            <a:pPr marL="0" indent="0" algn="ctr">
               <a:buNone/>
             </a:pPr>
             <a:r>
@@ -4013,9 +3874,8 @@
           <a:solidFill>
             <a:srgbClr val="0F3460"/>
           </a:solidFill>
-          <a:ln/>
           <a:effectLst>
-            <a:outerShdw sx="100000" sy="100000" kx="0" ky="0" algn="bl" rotWithShape="0" blurRad="152400" dist="50800" dir="2700000">
+            <a:outerShdw blurRad="152400" dist="50800" dir="2700000" algn="bl" rotWithShape="0">
               <a:srgbClr val="000000">
                 <a:alpha val="25000"/>
               </a:srgbClr>
@@ -4040,7 +3900,6 @@
           <a:solidFill>
             <a:srgbClr val="E94560"/>
           </a:solidFill>
-          <a:ln/>
         </p:spPr>
       </p:sp>
       <p:sp>
@@ -4058,13 +3917,12 @@
             <a:avLst/>
           </a:prstGeom>
           <a:noFill/>
-          <a:ln/>
-        </p:spPr>
-        <p:txBody>
-          <a:bodyPr wrap="square" lIns="0" tIns="0" rIns="0" bIns="0" rtlCol="0" anchor="ctr"/>
-          <a:lstStyle/>
-          <a:p>
-            <a:pPr algn="ctr" indent="0" marL="0">
+        </p:spPr>
+        <p:txBody>
+          <a:bodyPr wrap="square" lIns="0" tIns="0" rIns="0" bIns="0" rtlCol="0" anchor="ctr"/>
+          <a:lstStyle/>
+          <a:p>
+            <a:pPr marL="0" indent="0" algn="ctr">
               <a:buNone/>
             </a:pPr>
             <a:r>
@@ -4094,13 +3952,12 @@
             <a:avLst/>
           </a:prstGeom>
           <a:noFill/>
-          <a:ln/>
-        </p:spPr>
-        <p:txBody>
-          <a:bodyPr wrap="square" lIns="0" tIns="0" rIns="0" bIns="0" rtlCol="0" anchor="ctr"/>
-          <a:lstStyle/>
-          <a:p>
-            <a:pPr algn="ctr" indent="0" marL="0">
+        </p:spPr>
+        <p:txBody>
+          <a:bodyPr wrap="square" lIns="0" tIns="0" rIns="0" bIns="0" rtlCol="0" anchor="ctr"/>
+          <a:lstStyle/>
+          <a:p>
+            <a:pPr marL="0" indent="0" algn="ctr">
               <a:buNone/>
             </a:pPr>
             <a:r>
@@ -4108,9 +3965,9 @@
                 <a:solidFill>
                   <a:srgbClr val="2DD4BF"/>
                 </a:solidFill>
-                <a:latin typeface="Calibri" pitchFamily="34" charset="0"/>
-                <a:ea typeface="Calibri" pitchFamily="34" charset="-122"/>
-                <a:cs typeface="Calibri" pitchFamily="34" charset="-120"/>
+                <a:latin typeface="Calibri" panose="020F0502020204030204" pitchFamily="34" charset="0"/>
+                <a:ea typeface="Calibri" panose="020F0502020204030204" pitchFamily="34" charset="-122"/>
+                <a:cs typeface="Calibri" panose="020F0502020204030204" pitchFamily="34" charset="-120"/>
               </a:rPr>
               <a:t>Try Digits</a:t>
             </a:r>
@@ -4133,13 +3990,12 @@
             <a:avLst/>
           </a:prstGeom>
           <a:noFill/>
-          <a:ln/>
-        </p:spPr>
-        <p:txBody>
-          <a:bodyPr wrap="square" lIns="0" tIns="0" rIns="0" bIns="0" rtlCol="0" anchor="ctr"/>
-          <a:lstStyle/>
-          <a:p>
-            <a:pPr algn="ctr" indent="0" marL="0">
+        </p:spPr>
+        <p:txBody>
+          <a:bodyPr wrap="square" lIns="0" tIns="0" rIns="0" bIns="0" rtlCol="0" anchor="ctr"/>
+          <a:lstStyle/>
+          <a:p>
+            <a:pPr marL="0" indent="0" algn="ctr">
               <a:buNone/>
             </a:pPr>
             <a:r>
@@ -4147,9 +4003,9 @@
                 <a:solidFill>
                   <a:srgbClr val="A0AEC0"/>
                 </a:solidFill>
-                <a:latin typeface="Calibri" pitchFamily="34" charset="0"/>
-                <a:ea typeface="Calibri" pitchFamily="34" charset="-122"/>
-                <a:cs typeface="Calibri" pitchFamily="34" charset="-120"/>
+                <a:latin typeface="Calibri" panose="020F0502020204030204" pitchFamily="34" charset="0"/>
+                <a:ea typeface="Calibri" panose="020F0502020204030204" pitchFamily="34" charset="-122"/>
+                <a:cs typeface="Calibri" panose="020F0502020204030204" pitchFamily="34" charset="-120"/>
               </a:rPr>
               <a:t>Attempt digits 1–9 in the empty cell</a:t>
             </a:r>
@@ -4195,13 +4051,12 @@
             <a:avLst/>
           </a:prstGeom>
           <a:noFill/>
-          <a:ln/>
-        </p:spPr>
-        <p:txBody>
-          <a:bodyPr wrap="square" lIns="0" tIns="0" rIns="0" bIns="0" rtlCol="0" anchor="ctr"/>
-          <a:lstStyle/>
-          <a:p>
-            <a:pPr algn="ctr" indent="0" marL="0">
+        </p:spPr>
+        <p:txBody>
+          <a:bodyPr wrap="square" lIns="0" tIns="0" rIns="0" bIns="0" rtlCol="0" anchor="ctr"/>
+          <a:lstStyle/>
+          <a:p>
+            <a:pPr marL="0" indent="0" algn="ctr">
               <a:buNone/>
             </a:pPr>
             <a:r>
@@ -4235,9 +4090,8 @@
           <a:solidFill>
             <a:srgbClr val="0F3460"/>
           </a:solidFill>
-          <a:ln/>
           <a:effectLst>
-            <a:outerShdw sx="100000" sy="100000" kx="0" ky="0" algn="bl" rotWithShape="0" blurRad="152400" dist="50800" dir="2700000">
+            <a:outerShdw blurRad="152400" dist="50800" dir="2700000" algn="bl" rotWithShape="0">
               <a:srgbClr val="000000">
                 <a:alpha val="25000"/>
               </a:srgbClr>
@@ -4262,7 +4116,6 @@
           <a:solidFill>
             <a:srgbClr val="E94560"/>
           </a:solidFill>
-          <a:ln/>
         </p:spPr>
       </p:sp>
       <p:sp>
@@ -4280,13 +4133,12 @@
             <a:avLst/>
           </a:prstGeom>
           <a:noFill/>
-          <a:ln/>
-        </p:spPr>
-        <p:txBody>
-          <a:bodyPr wrap="square" lIns="0" tIns="0" rIns="0" bIns="0" rtlCol="0" anchor="ctr"/>
-          <a:lstStyle/>
-          <a:p>
-            <a:pPr algn="ctr" indent="0" marL="0">
+        </p:spPr>
+        <p:txBody>
+          <a:bodyPr wrap="square" lIns="0" tIns="0" rIns="0" bIns="0" rtlCol="0" anchor="ctr"/>
+          <a:lstStyle/>
+          <a:p>
+            <a:pPr marL="0" indent="0" algn="ctr">
               <a:buNone/>
             </a:pPr>
             <a:r>
@@ -4316,13 +4168,12 @@
             <a:avLst/>
           </a:prstGeom>
           <a:noFill/>
-          <a:ln/>
-        </p:spPr>
-        <p:txBody>
-          <a:bodyPr wrap="square" lIns="0" tIns="0" rIns="0" bIns="0" rtlCol="0" anchor="ctr"/>
-          <a:lstStyle/>
-          <a:p>
-            <a:pPr algn="ctr" indent="0" marL="0">
+        </p:spPr>
+        <p:txBody>
+          <a:bodyPr wrap="square" lIns="0" tIns="0" rIns="0" bIns="0" rtlCol="0" anchor="ctr"/>
+          <a:lstStyle/>
+          <a:p>
+            <a:pPr marL="0" indent="0" algn="ctr">
               <a:buNone/>
             </a:pPr>
             <a:r>
@@ -4330,9 +4181,9 @@
                 <a:solidFill>
                   <a:srgbClr val="2DD4BF"/>
                 </a:solidFill>
-                <a:latin typeface="Calibri" pitchFamily="34" charset="0"/>
-                <a:ea typeface="Calibri" pitchFamily="34" charset="-122"/>
-                <a:cs typeface="Calibri" pitchFamily="34" charset="-120"/>
+                <a:latin typeface="Calibri" panose="020F0502020204030204" pitchFamily="34" charset="0"/>
+                <a:ea typeface="Calibri" panose="020F0502020204030204" pitchFamily="34" charset="-122"/>
+                <a:cs typeface="Calibri" panose="020F0502020204030204" pitchFamily="34" charset="-120"/>
               </a:rPr>
               <a:t>Validate</a:t>
             </a:r>
@@ -4355,13 +4206,12 @@
             <a:avLst/>
           </a:prstGeom>
           <a:noFill/>
-          <a:ln/>
-        </p:spPr>
-        <p:txBody>
-          <a:bodyPr wrap="square" lIns="0" tIns="0" rIns="0" bIns="0" rtlCol="0" anchor="ctr"/>
-          <a:lstStyle/>
-          <a:p>
-            <a:pPr algn="ctr" indent="0" marL="0">
+        </p:spPr>
+        <p:txBody>
+          <a:bodyPr wrap="square" lIns="0" tIns="0" rIns="0" bIns="0" rtlCol="0" anchor="ctr"/>
+          <a:lstStyle/>
+          <a:p>
+            <a:pPr marL="0" indent="0" algn="ctr">
               <a:buNone/>
             </a:pPr>
             <a:r>
@@ -4369,9 +4219,9 @@
                 <a:solidFill>
                   <a:srgbClr val="A0AEC0"/>
                 </a:solidFill>
-                <a:latin typeface="Calibri" pitchFamily="34" charset="0"/>
-                <a:ea typeface="Calibri" pitchFamily="34" charset="-122"/>
-                <a:cs typeface="Calibri" pitchFamily="34" charset="-120"/>
+                <a:latin typeface="Calibri" panose="020F0502020204030204" pitchFamily="34" charset="0"/>
+                <a:ea typeface="Calibri" panose="020F0502020204030204" pitchFamily="34" charset="-122"/>
+                <a:cs typeface="Calibri" panose="020F0502020204030204" pitchFamily="34" charset="-120"/>
               </a:rPr>
               <a:t>Check row, column &amp; 3×3 box constraints</a:t>
             </a:r>
@@ -4417,13 +4267,12 @@
             <a:avLst/>
           </a:prstGeom>
           <a:noFill/>
-          <a:ln/>
-        </p:spPr>
-        <p:txBody>
-          <a:bodyPr wrap="square" lIns="0" tIns="0" rIns="0" bIns="0" rtlCol="0" anchor="ctr"/>
-          <a:lstStyle/>
-          <a:p>
-            <a:pPr algn="ctr" indent="0" marL="0">
+        </p:spPr>
+        <p:txBody>
+          <a:bodyPr wrap="square" lIns="0" tIns="0" rIns="0" bIns="0" rtlCol="0" anchor="ctr"/>
+          <a:lstStyle/>
+          <a:p>
+            <a:pPr marL="0" indent="0" algn="ctr">
               <a:buNone/>
             </a:pPr>
             <a:r>
@@ -4457,9 +4306,8 @@
           <a:solidFill>
             <a:srgbClr val="0F3460"/>
           </a:solidFill>
-          <a:ln/>
           <a:effectLst>
-            <a:outerShdw sx="100000" sy="100000" kx="0" ky="0" algn="bl" rotWithShape="0" blurRad="152400" dist="50800" dir="2700000">
+            <a:outerShdw blurRad="152400" dist="50800" dir="2700000" algn="bl" rotWithShape="0">
               <a:srgbClr val="000000">
                 <a:alpha val="25000"/>
               </a:srgbClr>
@@ -4484,7 +4332,6 @@
           <a:solidFill>
             <a:srgbClr val="E94560"/>
           </a:solidFill>
-          <a:ln/>
         </p:spPr>
       </p:sp>
       <p:sp>
@@ -4502,13 +4349,12 @@
             <a:avLst/>
           </a:prstGeom>
           <a:noFill/>
-          <a:ln/>
-        </p:spPr>
-        <p:txBody>
-          <a:bodyPr wrap="square" lIns="0" tIns="0" rIns="0" bIns="0" rtlCol="0" anchor="ctr"/>
-          <a:lstStyle/>
-          <a:p>
-            <a:pPr algn="ctr" indent="0" marL="0">
+        </p:spPr>
+        <p:txBody>
+          <a:bodyPr wrap="square" lIns="0" tIns="0" rIns="0" bIns="0" rtlCol="0" anchor="ctr"/>
+          <a:lstStyle/>
+          <a:p>
+            <a:pPr marL="0" indent="0" algn="ctr">
               <a:buNone/>
             </a:pPr>
             <a:r>
@@ -4538,13 +4384,12 @@
             <a:avLst/>
           </a:prstGeom>
           <a:noFill/>
-          <a:ln/>
-        </p:spPr>
-        <p:txBody>
-          <a:bodyPr wrap="square" lIns="0" tIns="0" rIns="0" bIns="0" rtlCol="0" anchor="ctr"/>
-          <a:lstStyle/>
-          <a:p>
-            <a:pPr algn="ctr" indent="0" marL="0">
+        </p:spPr>
+        <p:txBody>
+          <a:bodyPr wrap="square" lIns="0" tIns="0" rIns="0" bIns="0" rtlCol="0" anchor="ctr"/>
+          <a:lstStyle/>
+          <a:p>
+            <a:pPr marL="0" indent="0" algn="ctr">
               <a:buNone/>
             </a:pPr>
             <a:r>
@@ -4552,9 +4397,9 @@
                 <a:solidFill>
                   <a:srgbClr val="2DD4BF"/>
                 </a:solidFill>
-                <a:latin typeface="Calibri" pitchFamily="34" charset="0"/>
-                <a:ea typeface="Calibri" pitchFamily="34" charset="-122"/>
-                <a:cs typeface="Calibri" pitchFamily="34" charset="-120"/>
+                <a:latin typeface="Calibri" panose="020F0502020204030204" pitchFamily="34" charset="0"/>
+                <a:ea typeface="Calibri" panose="020F0502020204030204" pitchFamily="34" charset="-122"/>
+                <a:cs typeface="Calibri" panose="020F0502020204030204" pitchFamily="34" charset="-120"/>
               </a:rPr>
               <a:t>Recurse</a:t>
             </a:r>
@@ -4577,13 +4422,12 @@
             <a:avLst/>
           </a:prstGeom>
           <a:noFill/>
-          <a:ln/>
-        </p:spPr>
-        <p:txBody>
-          <a:bodyPr wrap="square" lIns="0" tIns="0" rIns="0" bIns="0" rtlCol="0" anchor="ctr"/>
-          <a:lstStyle/>
-          <a:p>
-            <a:pPr algn="ctr" indent="0" marL="0">
+        </p:spPr>
+        <p:txBody>
+          <a:bodyPr wrap="square" lIns="0" tIns="0" rIns="0" bIns="0" rtlCol="0" anchor="ctr"/>
+          <a:lstStyle/>
+          <a:p>
+            <a:pPr marL="0" indent="0" algn="ctr">
               <a:buNone/>
             </a:pPr>
             <a:r>
@@ -4591,9 +4435,9 @@
                 <a:solidFill>
                   <a:srgbClr val="A0AEC0"/>
                 </a:solidFill>
-                <a:latin typeface="Calibri" pitchFamily="34" charset="0"/>
-                <a:ea typeface="Calibri" pitchFamily="34" charset="-122"/>
-                <a:cs typeface="Calibri" pitchFamily="34" charset="-120"/>
+                <a:latin typeface="Calibri" panose="020F0502020204030204" pitchFamily="34" charset="0"/>
+                <a:ea typeface="Calibri" panose="020F0502020204030204" pitchFamily="34" charset="-122"/>
+                <a:cs typeface="Calibri" panose="020F0502020204030204" pitchFamily="34" charset="-120"/>
               </a:rPr>
               <a:t>If valid, place digit &amp; recurse deeper</a:t>
             </a:r>
@@ -4639,13 +4483,12 @@
             <a:avLst/>
           </a:prstGeom>
           <a:noFill/>
-          <a:ln/>
-        </p:spPr>
-        <p:txBody>
-          <a:bodyPr wrap="square" lIns="0" tIns="0" rIns="0" bIns="0" rtlCol="0" anchor="ctr"/>
-          <a:lstStyle/>
-          <a:p>
-            <a:pPr algn="ctr" indent="0" marL="0">
+        </p:spPr>
+        <p:txBody>
+          <a:bodyPr wrap="square" lIns="0" tIns="0" rIns="0" bIns="0" rtlCol="0" anchor="ctr"/>
+          <a:lstStyle/>
+          <a:p>
+            <a:pPr marL="0" indent="0" algn="ctr">
               <a:buNone/>
             </a:pPr>
             <a:r>
@@ -4679,9 +4522,8 @@
           <a:solidFill>
             <a:srgbClr val="0F3460"/>
           </a:solidFill>
-          <a:ln/>
           <a:effectLst>
-            <a:outerShdw sx="100000" sy="100000" kx="0" ky="0" algn="bl" rotWithShape="0" blurRad="152400" dist="50800" dir="2700000">
+            <a:outerShdw blurRad="152400" dist="50800" dir="2700000" algn="bl" rotWithShape="0">
               <a:srgbClr val="000000">
                 <a:alpha val="25000"/>
               </a:srgbClr>
@@ -4706,7 +4548,6 @@
           <a:solidFill>
             <a:srgbClr val="E94560"/>
           </a:solidFill>
-          <a:ln/>
         </p:spPr>
       </p:sp>
       <p:sp>
@@ -4724,13 +4565,12 @@
             <a:avLst/>
           </a:prstGeom>
           <a:noFill/>
-          <a:ln/>
-        </p:spPr>
-        <p:txBody>
-          <a:bodyPr wrap="square" lIns="0" tIns="0" rIns="0" bIns="0" rtlCol="0" anchor="ctr"/>
-          <a:lstStyle/>
-          <a:p>
-            <a:pPr algn="ctr" indent="0" marL="0">
+        </p:spPr>
+        <p:txBody>
+          <a:bodyPr wrap="square" lIns="0" tIns="0" rIns="0" bIns="0" rtlCol="0" anchor="ctr"/>
+          <a:lstStyle/>
+          <a:p>
+            <a:pPr marL="0" indent="0" algn="ctr">
               <a:buNone/>
             </a:pPr>
             <a:r>
@@ -4760,13 +4600,12 @@
             <a:avLst/>
           </a:prstGeom>
           <a:noFill/>
-          <a:ln/>
-        </p:spPr>
-        <p:txBody>
-          <a:bodyPr wrap="square" lIns="0" tIns="0" rIns="0" bIns="0" rtlCol="0" anchor="ctr"/>
-          <a:lstStyle/>
-          <a:p>
-            <a:pPr algn="ctr" indent="0" marL="0">
+        </p:spPr>
+        <p:txBody>
+          <a:bodyPr wrap="square" lIns="0" tIns="0" rIns="0" bIns="0" rtlCol="0" anchor="ctr"/>
+          <a:lstStyle/>
+          <a:p>
+            <a:pPr marL="0" indent="0" algn="ctr">
               <a:buNone/>
             </a:pPr>
             <a:r>
@@ -4774,9 +4613,9 @@
                 <a:solidFill>
                   <a:srgbClr val="2DD4BF"/>
                 </a:solidFill>
-                <a:latin typeface="Calibri" pitchFamily="34" charset="0"/>
-                <a:ea typeface="Calibri" pitchFamily="34" charset="-122"/>
-                <a:cs typeface="Calibri" pitchFamily="34" charset="-120"/>
+                <a:latin typeface="Calibri" panose="020F0502020204030204" pitchFamily="34" charset="0"/>
+                <a:ea typeface="Calibri" panose="020F0502020204030204" pitchFamily="34" charset="-122"/>
+                <a:cs typeface="Calibri" panose="020F0502020204030204" pitchFamily="34" charset="-120"/>
               </a:rPr>
               <a:t>Backtrack</a:t>
             </a:r>
@@ -4799,13 +4638,12 @@
             <a:avLst/>
           </a:prstGeom>
           <a:noFill/>
-          <a:ln/>
-        </p:spPr>
-        <p:txBody>
-          <a:bodyPr wrap="square" lIns="0" tIns="0" rIns="0" bIns="0" rtlCol="0" anchor="ctr"/>
-          <a:lstStyle/>
-          <a:p>
-            <a:pPr algn="ctr" indent="0" marL="0">
+        </p:spPr>
+        <p:txBody>
+          <a:bodyPr wrap="square" lIns="0" tIns="0" rIns="0" bIns="0" rtlCol="0" anchor="ctr"/>
+          <a:lstStyle/>
+          <a:p>
+            <a:pPr marL="0" indent="0" algn="ctr">
               <a:buNone/>
             </a:pPr>
             <a:r>
@@ -4813,9 +4651,9 @@
                 <a:solidFill>
                   <a:srgbClr val="A0AEC0"/>
                 </a:solidFill>
-                <a:latin typeface="Calibri" pitchFamily="34" charset="0"/>
-                <a:ea typeface="Calibri" pitchFamily="34" charset="-122"/>
-                <a:cs typeface="Calibri" pitchFamily="34" charset="-120"/>
+                <a:latin typeface="Calibri" panose="020F0502020204030204" pitchFamily="34" charset="0"/>
+                <a:ea typeface="Calibri" panose="020F0502020204030204" pitchFamily="34" charset="-122"/>
+                <a:cs typeface="Calibri" panose="020F0502020204030204" pitchFamily="34" charset="-120"/>
               </a:rPr>
               <a:t>If stuck, reset cell to 0 &amp; try next digit</a:t>
             </a:r>
@@ -4838,13 +4676,12 @@
             <a:avLst/>
           </a:prstGeom>
           <a:noFill/>
-          <a:ln/>
-        </p:spPr>
-        <p:txBody>
-          <a:bodyPr wrap="square" lIns="0" tIns="0" rIns="0" bIns="0" rtlCol="0" anchor="ctr"/>
-          <a:lstStyle/>
-          <a:p>
-            <a:pPr indent="0" marL="0">
+        </p:spPr>
+        <p:txBody>
+          <a:bodyPr wrap="square" lIns="0" tIns="0" rIns="0" bIns="0" rtlCol="0" anchor="ctr"/>
+          <a:lstStyle/>
+          <a:p>
+            <a:pPr marL="0" indent="0">
               <a:buNone/>
             </a:pPr>
             <a:r>
@@ -4852,9 +4689,9 @@
                 <a:solidFill>
                   <a:srgbClr val="2DD4BF"/>
                 </a:solidFill>
-                <a:latin typeface="Cambria" pitchFamily="34" charset="0"/>
-                <a:ea typeface="Cambria" pitchFamily="34" charset="-122"/>
-                <a:cs typeface="Cambria" pitchFamily="34" charset="-120"/>
+                <a:latin typeface="Cambria" panose="02040503050406030204" pitchFamily="34" charset="0"/>
+                <a:ea typeface="Cambria" panose="02040503050406030204" pitchFamily="34" charset="-122"/>
+                <a:cs typeface="Cambria" panose="02040503050406030204" pitchFamily="34" charset="-120"/>
               </a:rPr>
               <a:t>Complexity Analysis</a:t>
             </a:r>
@@ -4864,17 +4701,11 @@
       </p:sp>
       <p:graphicFrame>
         <p:nvGraphicFramePr>
-          <p:cNvPr id="4" name="Table 0"/>
+          <p:cNvPr id="38" name="Table 0"/>
           <p:cNvGraphicFramePr>
             <a:graphicFrameLocks noGrp="1"/>
           </p:cNvGraphicFramePr>
-          <p:nvPr>
-            <p:extLst>
-              <p:ext uri="{D42A27DB-BD31-4B8C-83A1-F6EECF244321}">
-                <p14:modId xmlns:p14="http://schemas.microsoft.com/office/powerpoint/2010/main" val="1579011935"/>
-              </p:ext>
-            </p:extLst>
-          </p:nvPr>
+          <p:nvPr/>
         </p:nvGraphicFramePr>
         <p:xfrm>
           <a:off x="365760" y="3657600"/>
@@ -4895,7 +4726,7 @@
                     <a:bodyPr/>
                     <a:lstStyle/>
                     <a:p>
-                      <a:pPr indent="0" marL="0">
+                      <a:pPr marL="0" indent="0">
                         <a:buNone/>
                       </a:pPr>
                       <a:r>
@@ -4903,20 +4734,20 @@
                           <a:solidFill>
                             <a:srgbClr val="FFFFFF"/>
                           </a:solidFill>
-                          <a:latin typeface="Calibri" pitchFamily="34" charset="0"/>
-                          <a:ea typeface="Calibri" pitchFamily="34" charset="-122"/>
-                          <a:cs typeface="Calibri" pitchFamily="34" charset="-120"/>
+                          <a:latin typeface="Calibri" panose="020F0502020204030204" pitchFamily="34" charset="0"/>
+                          <a:ea typeface="Calibri" panose="020F0502020204030204" pitchFamily="34" charset="-122"/>
+                          <a:cs typeface="Calibri" panose="020F0502020204030204" pitchFamily="34" charset="-120"/>
                         </a:rPr>
                         <a:t>Type</a:t>
                       </a:r>
                       <a:endParaRPr lang="en-US" sz="1100" dirty="0">
-                        <a:latin typeface="Calibri" charset="0"/>
-                        <a:ea typeface="Calibri" charset="0"/>
-                        <a:cs typeface="Calibri" charset="0"/>
+                        <a:latin typeface="Calibri" panose="020F0502020204030204" pitchFamily="34" charset="0"/>
+                        <a:ea typeface="Calibri" panose="020F0502020204030204" pitchFamily="34" charset="0"/>
+                        <a:cs typeface="Calibri" panose="020F0502020204030204" pitchFamily="34" charset="0"/>
                       </a:endParaRPr>
                     </a:p>
                   </a:txBody>
-                  <a:tcPr marL="91440" marR="91440" marT="45720" marB="45720">
+                  <a:tcPr>
                     <a:lnL w="12700" cap="flat" cmpd="sng" algn="ctr">
                       <a:solidFill>
                         <a:srgbClr val="2A3A5E"/>
@@ -4963,7 +4794,7 @@
                     <a:bodyPr/>
                     <a:lstStyle/>
                     <a:p>
-                      <a:pPr indent="0" marL="0">
+                      <a:pPr marL="0" indent="0">
                         <a:buNone/>
                       </a:pPr>
                       <a:r>
@@ -4971,20 +4802,20 @@
                           <a:solidFill>
                             <a:srgbClr val="FFFFFF"/>
                           </a:solidFill>
-                          <a:latin typeface="Calibri" pitchFamily="34" charset="0"/>
-                          <a:ea typeface="Calibri" pitchFamily="34" charset="-122"/>
-                          <a:cs typeface="Calibri" pitchFamily="34" charset="-120"/>
+                          <a:latin typeface="Calibri" panose="020F0502020204030204" pitchFamily="34" charset="0"/>
+                          <a:ea typeface="Calibri" panose="020F0502020204030204" pitchFamily="34" charset="-122"/>
+                          <a:cs typeface="Calibri" panose="020F0502020204030204" pitchFamily="34" charset="-120"/>
                         </a:rPr>
                         <a:t>Complexity</a:t>
                       </a:r>
                       <a:endParaRPr lang="en-US" sz="1100" dirty="0">
-                        <a:latin typeface="Calibri" charset="0"/>
-                        <a:ea typeface="Calibri" charset="0"/>
-                        <a:cs typeface="Calibri" charset="0"/>
+                        <a:latin typeface="Calibri" panose="020F0502020204030204" pitchFamily="34" charset="0"/>
+                        <a:ea typeface="Calibri" panose="020F0502020204030204" pitchFamily="34" charset="0"/>
+                        <a:cs typeface="Calibri" panose="020F0502020204030204" pitchFamily="34" charset="0"/>
                       </a:endParaRPr>
                     </a:p>
                   </a:txBody>
-                  <a:tcPr marL="91440" marR="91440" marT="45720" marB="45720">
+                  <a:tcPr>
                     <a:lnL w="12700" cap="flat" cmpd="sng" algn="ctr">
                       <a:solidFill>
                         <a:srgbClr val="2A3A5E"/>
@@ -5031,7 +4862,7 @@
                     <a:bodyPr/>
                     <a:lstStyle/>
                     <a:p>
-                      <a:pPr indent="0" marL="0">
+                      <a:pPr marL="0" indent="0">
                         <a:buNone/>
                       </a:pPr>
                       <a:r>
@@ -5039,20 +4870,20 @@
                           <a:solidFill>
                             <a:srgbClr val="FFFFFF"/>
                           </a:solidFill>
-                          <a:latin typeface="Calibri" pitchFamily="34" charset="0"/>
-                          <a:ea typeface="Calibri" pitchFamily="34" charset="-122"/>
-                          <a:cs typeface="Calibri" pitchFamily="34" charset="-120"/>
+                          <a:latin typeface="Calibri" panose="020F0502020204030204" pitchFamily="34" charset="0"/>
+                          <a:ea typeface="Calibri" panose="020F0502020204030204" pitchFamily="34" charset="-122"/>
+                          <a:cs typeface="Calibri" panose="020F0502020204030204" pitchFamily="34" charset="-120"/>
                         </a:rPr>
                         <a:t>Explanation</a:t>
                       </a:r>
                       <a:endParaRPr lang="en-US" sz="1100" dirty="0">
-                        <a:latin typeface="Calibri" charset="0"/>
-                        <a:ea typeface="Calibri" charset="0"/>
-                        <a:cs typeface="Calibri" charset="0"/>
+                        <a:latin typeface="Calibri" panose="020F0502020204030204" pitchFamily="34" charset="0"/>
+                        <a:ea typeface="Calibri" panose="020F0502020204030204" pitchFamily="34" charset="0"/>
+                        <a:cs typeface="Calibri" panose="020F0502020204030204" pitchFamily="34" charset="0"/>
                       </a:endParaRPr>
                     </a:p>
                   </a:txBody>
-                  <a:tcPr marL="91440" marR="91440" marT="45720" marB="45720">
+                  <a:tcPr>
                     <a:lnL w="12700" cap="flat" cmpd="sng" algn="ctr">
                       <a:solidFill>
                         <a:srgbClr val="2A3A5E"/>
@@ -5101,7 +4932,7 @@
                     <a:bodyPr/>
                     <a:lstStyle/>
                     <a:p>
-                      <a:pPr indent="0" marL="0">
+                      <a:pPr marL="0" indent="0">
                         <a:buNone/>
                       </a:pPr>
                       <a:r>
@@ -5109,20 +4940,20 @@
                           <a:solidFill>
                             <a:srgbClr val="A0AEC0"/>
                           </a:solidFill>
-                          <a:latin typeface="Calibri" pitchFamily="34" charset="0"/>
-                          <a:ea typeface="Calibri" pitchFamily="34" charset="-122"/>
-                          <a:cs typeface="Calibri" pitchFamily="34" charset="-120"/>
+                          <a:latin typeface="Calibri" panose="020F0502020204030204" pitchFamily="34" charset="0"/>
+                          <a:ea typeface="Calibri" panose="020F0502020204030204" pitchFamily="34" charset="-122"/>
+                          <a:cs typeface="Calibri" panose="020F0502020204030204" pitchFamily="34" charset="-120"/>
                         </a:rPr>
                         <a:t>Time</a:t>
                       </a:r>
                       <a:endParaRPr lang="en-US" sz="1100" dirty="0">
-                        <a:latin typeface="Calibri" charset="0"/>
-                        <a:ea typeface="Calibri" charset="0"/>
-                        <a:cs typeface="Calibri" charset="0"/>
+                        <a:latin typeface="Calibri" panose="020F0502020204030204" pitchFamily="34" charset="0"/>
+                        <a:ea typeface="Calibri" panose="020F0502020204030204" pitchFamily="34" charset="0"/>
+                        <a:cs typeface="Calibri" panose="020F0502020204030204" pitchFamily="34" charset="0"/>
                       </a:endParaRPr>
                     </a:p>
                   </a:txBody>
-                  <a:tcPr marL="91440" marR="91440" marT="45720" marB="45720">
+                  <a:tcPr>
                     <a:lnL w="12700" cap="flat" cmpd="sng" algn="ctr">
                       <a:solidFill>
                         <a:srgbClr val="2A3A5E"/>
@@ -5169,7 +5000,7 @@
                     <a:bodyPr/>
                     <a:lstStyle/>
                     <a:p>
-                      <a:pPr indent="0" marL="0">
+                      <a:pPr marL="0" indent="0">
                         <a:buNone/>
                       </a:pPr>
                       <a:r>
@@ -5177,20 +5008,20 @@
                           <a:solidFill>
                             <a:srgbClr val="A0AEC0"/>
                           </a:solidFill>
-                          <a:latin typeface="Calibri" pitchFamily="34" charset="0"/>
-                          <a:ea typeface="Calibri" pitchFamily="34" charset="-122"/>
-                          <a:cs typeface="Calibri" pitchFamily="34" charset="-120"/>
+                          <a:latin typeface="Calibri" panose="020F0502020204030204" pitchFamily="34" charset="0"/>
+                          <a:ea typeface="Calibri" panose="020F0502020204030204" pitchFamily="34" charset="-122"/>
+                          <a:cs typeface="Calibri" panose="020F0502020204030204" pitchFamily="34" charset="-120"/>
                         </a:rPr>
                         <a:t>O(9ⁿ)</a:t>
                       </a:r>
                       <a:endParaRPr lang="en-US" sz="1100" dirty="0">
-                        <a:latin typeface="Calibri" charset="0"/>
-                        <a:ea typeface="Calibri" charset="0"/>
-                        <a:cs typeface="Calibri" charset="0"/>
+                        <a:latin typeface="Calibri" panose="020F0502020204030204" pitchFamily="34" charset="0"/>
+                        <a:ea typeface="Calibri" panose="020F0502020204030204" pitchFamily="34" charset="0"/>
+                        <a:cs typeface="Calibri" panose="020F0502020204030204" pitchFamily="34" charset="0"/>
                       </a:endParaRPr>
                     </a:p>
                   </a:txBody>
-                  <a:tcPr marL="91440" marR="91440" marT="45720" marB="45720">
+                  <a:tcPr>
                     <a:lnL w="12700" cap="flat" cmpd="sng" algn="ctr">
                       <a:solidFill>
                         <a:srgbClr val="2A3A5E"/>
@@ -5237,7 +5068,7 @@
                     <a:bodyPr/>
                     <a:lstStyle/>
                     <a:p>
-                      <a:pPr indent="0" marL="0">
+                      <a:pPr marL="0" indent="0">
                         <a:buNone/>
                       </a:pPr>
                       <a:r>
@@ -5245,20 +5076,20 @@
                           <a:solidFill>
                             <a:srgbClr val="A0AEC0"/>
                           </a:solidFill>
-                          <a:latin typeface="Calibri" pitchFamily="34" charset="0"/>
-                          <a:ea typeface="Calibri" pitchFamily="34" charset="-122"/>
-                          <a:cs typeface="Calibri" pitchFamily="34" charset="-120"/>
+                          <a:latin typeface="Calibri" panose="020F0502020204030204" pitchFamily="34" charset="0"/>
+                          <a:ea typeface="Calibri" panose="020F0502020204030204" pitchFamily="34" charset="-122"/>
+                          <a:cs typeface="Calibri" panose="020F0502020204030204" pitchFamily="34" charset="-120"/>
                         </a:rPr>
                         <a:t>n = empty cells; worst case</a:t>
                       </a:r>
                       <a:endParaRPr lang="en-US" sz="1100" dirty="0">
-                        <a:latin typeface="Calibri" charset="0"/>
-                        <a:ea typeface="Calibri" charset="0"/>
-                        <a:cs typeface="Calibri" charset="0"/>
+                        <a:latin typeface="Calibri" panose="020F0502020204030204" pitchFamily="34" charset="0"/>
+                        <a:ea typeface="Calibri" panose="020F0502020204030204" pitchFamily="34" charset="0"/>
+                        <a:cs typeface="Calibri" panose="020F0502020204030204" pitchFamily="34" charset="0"/>
                       </a:endParaRPr>
                     </a:p>
                   </a:txBody>
-                  <a:tcPr marL="91440" marR="91440" marT="45720" marB="45720">
+                  <a:tcPr>
                     <a:lnL w="12700" cap="flat" cmpd="sng" algn="ctr">
                       <a:solidFill>
                         <a:srgbClr val="2A3A5E"/>
@@ -5307,7 +5138,7 @@
                     <a:bodyPr/>
                     <a:lstStyle/>
                     <a:p>
-                      <a:pPr indent="0" marL="0">
+                      <a:pPr marL="0" indent="0">
                         <a:buNone/>
                       </a:pPr>
                       <a:r>
@@ -5315,20 +5146,20 @@
                           <a:solidFill>
                             <a:srgbClr val="A0AEC0"/>
                           </a:solidFill>
-                          <a:latin typeface="Calibri" pitchFamily="34" charset="0"/>
-                          <a:ea typeface="Calibri" pitchFamily="34" charset="-122"/>
-                          <a:cs typeface="Calibri" pitchFamily="34" charset="-120"/>
+                          <a:latin typeface="Calibri" panose="020F0502020204030204" pitchFamily="34" charset="0"/>
+                          <a:ea typeface="Calibri" panose="020F0502020204030204" pitchFamily="34" charset="-122"/>
+                          <a:cs typeface="Calibri" panose="020F0502020204030204" pitchFamily="34" charset="-120"/>
                         </a:rPr>
                         <a:t>Space</a:t>
                       </a:r>
                       <a:endParaRPr lang="en-US" sz="1100" dirty="0">
-                        <a:latin typeface="Calibri" charset="0"/>
-                        <a:ea typeface="Calibri" charset="0"/>
-                        <a:cs typeface="Calibri" charset="0"/>
+                        <a:latin typeface="Calibri" panose="020F0502020204030204" pitchFamily="34" charset="0"/>
+                        <a:ea typeface="Calibri" panose="020F0502020204030204" pitchFamily="34" charset="0"/>
+                        <a:cs typeface="Calibri" panose="020F0502020204030204" pitchFamily="34" charset="0"/>
                       </a:endParaRPr>
                     </a:p>
                   </a:txBody>
-                  <a:tcPr marL="91440" marR="91440" marT="45720" marB="45720">
+                  <a:tcPr>
                     <a:lnL w="12700" cap="flat" cmpd="sng" algn="ctr">
                       <a:solidFill>
                         <a:srgbClr val="2A3A5E"/>
@@ -5375,7 +5206,7 @@
                     <a:bodyPr/>
                     <a:lstStyle/>
                     <a:p>
-                      <a:pPr indent="0" marL="0">
+                      <a:pPr marL="0" indent="0">
                         <a:buNone/>
                       </a:pPr>
                       <a:r>
@@ -5383,20 +5214,20 @@
                           <a:solidFill>
                             <a:srgbClr val="A0AEC0"/>
                           </a:solidFill>
-                          <a:latin typeface="Calibri" pitchFamily="34" charset="0"/>
-                          <a:ea typeface="Calibri" pitchFamily="34" charset="-122"/>
-                          <a:cs typeface="Calibri" pitchFamily="34" charset="-120"/>
+                          <a:latin typeface="Calibri" panose="020F0502020204030204" pitchFamily="34" charset="0"/>
+                          <a:ea typeface="Calibri" panose="020F0502020204030204" pitchFamily="34" charset="-122"/>
+                          <a:cs typeface="Calibri" panose="020F0502020204030204" pitchFamily="34" charset="-120"/>
                         </a:rPr>
                         <a:t>O(n²)</a:t>
                       </a:r>
                       <a:endParaRPr lang="en-US" sz="1100" dirty="0">
-                        <a:latin typeface="Calibri" charset="0"/>
-                        <a:ea typeface="Calibri" charset="0"/>
-                        <a:cs typeface="Calibri" charset="0"/>
+                        <a:latin typeface="Calibri" panose="020F0502020204030204" pitchFamily="34" charset="0"/>
+                        <a:ea typeface="Calibri" panose="020F0502020204030204" pitchFamily="34" charset="0"/>
+                        <a:cs typeface="Calibri" panose="020F0502020204030204" pitchFamily="34" charset="0"/>
                       </a:endParaRPr>
                     </a:p>
                   </a:txBody>
-                  <a:tcPr marL="91440" marR="91440" marT="45720" marB="45720">
+                  <a:tcPr>
                     <a:lnL w="12700" cap="flat" cmpd="sng" algn="ctr">
                       <a:solidFill>
                         <a:srgbClr val="2A3A5E"/>
@@ -5443,7 +5274,7 @@
                     <a:bodyPr/>
                     <a:lstStyle/>
                     <a:p>
-                      <a:pPr indent="0" marL="0">
+                      <a:pPr marL="0" indent="0">
                         <a:buNone/>
                       </a:pPr>
                       <a:r>
@@ -5451,20 +5282,20 @@
                           <a:solidFill>
                             <a:srgbClr val="A0AEC0"/>
                           </a:solidFill>
-                          <a:latin typeface="Calibri" pitchFamily="34" charset="0"/>
-                          <a:ea typeface="Calibri" pitchFamily="34" charset="-122"/>
-                          <a:cs typeface="Calibri" pitchFamily="34" charset="-120"/>
+                          <a:latin typeface="Calibri" panose="020F0502020204030204" pitchFamily="34" charset="0"/>
+                          <a:ea typeface="Calibri" panose="020F0502020204030204" pitchFamily="34" charset="-122"/>
+                          <a:cs typeface="Calibri" panose="020F0502020204030204" pitchFamily="34" charset="-120"/>
                         </a:rPr>
                         <a:t>Recursive call stack depth</a:t>
                       </a:r>
                       <a:endParaRPr lang="en-US" sz="1100" dirty="0">
-                        <a:latin typeface="Calibri" charset="0"/>
-                        <a:ea typeface="Calibri" charset="0"/>
-                        <a:cs typeface="Calibri" charset="0"/>
+                        <a:latin typeface="Calibri" panose="020F0502020204030204" pitchFamily="34" charset="0"/>
+                        <a:ea typeface="Calibri" panose="020F0502020204030204" pitchFamily="34" charset="0"/>
+                        <a:cs typeface="Calibri" panose="020F0502020204030204" pitchFamily="34" charset="0"/>
                       </a:endParaRPr>
                     </a:p>
                   </a:txBody>
-                  <a:tcPr marL="91440" marR="91440" marT="45720" marB="45720">
+                  <a:tcPr>
                     <a:lnL w="12700" cap="flat" cmpd="sng" algn="ctr">
                       <a:solidFill>
                         <a:srgbClr val="2A3A5E"/>
@@ -5513,7 +5344,7 @@
                     <a:bodyPr/>
                     <a:lstStyle/>
                     <a:p>
-                      <a:pPr indent="0" marL="0">
+                      <a:pPr marL="0" indent="0">
                         <a:buNone/>
                       </a:pPr>
                       <a:r>
@@ -5521,20 +5352,20 @@
                           <a:solidFill>
                             <a:srgbClr val="A0AEC0"/>
                           </a:solidFill>
-                          <a:latin typeface="Calibri" pitchFamily="34" charset="0"/>
-                          <a:ea typeface="Calibri" pitchFamily="34" charset="-122"/>
-                          <a:cs typeface="Calibri" pitchFamily="34" charset="-120"/>
+                          <a:latin typeface="Calibri" panose="020F0502020204030204" pitchFamily="34" charset="0"/>
+                          <a:ea typeface="Calibri" panose="020F0502020204030204" pitchFamily="34" charset="-122"/>
+                          <a:cs typeface="Calibri" panose="020F0502020204030204" pitchFamily="34" charset="-120"/>
                         </a:rPr>
                         <a:t>Best Case</a:t>
                       </a:r>
                       <a:endParaRPr lang="en-US" sz="1100" dirty="0">
-                        <a:latin typeface="Calibri" charset="0"/>
-                        <a:ea typeface="Calibri" charset="0"/>
-                        <a:cs typeface="Calibri" charset="0"/>
+                        <a:latin typeface="Calibri" panose="020F0502020204030204" pitchFamily="34" charset="0"/>
+                        <a:ea typeface="Calibri" panose="020F0502020204030204" pitchFamily="34" charset="0"/>
+                        <a:cs typeface="Calibri" panose="020F0502020204030204" pitchFamily="34" charset="0"/>
                       </a:endParaRPr>
                     </a:p>
                   </a:txBody>
-                  <a:tcPr marL="91440" marR="91440" marT="45720" marB="45720">
+                  <a:tcPr>
                     <a:lnL w="12700" cap="flat" cmpd="sng" algn="ctr">
                       <a:solidFill>
                         <a:srgbClr val="2A3A5E"/>
@@ -5581,7 +5412,7 @@
                     <a:bodyPr/>
                     <a:lstStyle/>
                     <a:p>
-                      <a:pPr indent="0" marL="0">
+                      <a:pPr marL="0" indent="0">
                         <a:buNone/>
                       </a:pPr>
                       <a:r>
@@ -5589,20 +5420,20 @@
                           <a:solidFill>
                             <a:srgbClr val="A0AEC0"/>
                           </a:solidFill>
-                          <a:latin typeface="Calibri" pitchFamily="34" charset="0"/>
-                          <a:ea typeface="Calibri" pitchFamily="34" charset="-122"/>
-                          <a:cs typeface="Calibri" pitchFamily="34" charset="-120"/>
+                          <a:latin typeface="Calibri" panose="020F0502020204030204" pitchFamily="34" charset="0"/>
+                          <a:ea typeface="Calibri" panose="020F0502020204030204" pitchFamily="34" charset="-122"/>
+                          <a:cs typeface="Calibri" panose="020F0502020204030204" pitchFamily="34" charset="-120"/>
                         </a:rPr>
                         <a:t>O(n)</a:t>
                       </a:r>
                       <a:endParaRPr lang="en-US" sz="1100" dirty="0">
-                        <a:latin typeface="Calibri" charset="0"/>
-                        <a:ea typeface="Calibri" charset="0"/>
-                        <a:cs typeface="Calibri" charset="0"/>
+                        <a:latin typeface="Calibri" panose="020F0502020204030204" pitchFamily="34" charset="0"/>
+                        <a:ea typeface="Calibri" panose="020F0502020204030204" pitchFamily="34" charset="0"/>
+                        <a:cs typeface="Calibri" panose="020F0502020204030204" pitchFamily="34" charset="0"/>
                       </a:endParaRPr>
                     </a:p>
                   </a:txBody>
-                  <a:tcPr marL="91440" marR="91440" marT="45720" marB="45720">
+                  <a:tcPr>
                     <a:lnL w="12700" cap="flat" cmpd="sng" algn="ctr">
                       <a:solidFill>
                         <a:srgbClr val="2A3A5E"/>
@@ -5649,7 +5480,7 @@
                     <a:bodyPr/>
                     <a:lstStyle/>
                     <a:p>
-                      <a:pPr indent="0" marL="0">
+                      <a:pPr marL="0" indent="0">
                         <a:buNone/>
                       </a:pPr>
                       <a:r>
@@ -5657,20 +5488,20 @@
                           <a:solidFill>
                             <a:srgbClr val="A0AEC0"/>
                           </a:solidFill>
-                          <a:latin typeface="Calibri" pitchFamily="34" charset="0"/>
-                          <a:ea typeface="Calibri" pitchFamily="34" charset="-122"/>
-                          <a:cs typeface="Calibri" pitchFamily="34" charset="-120"/>
+                          <a:latin typeface="Calibri" panose="020F0502020204030204" pitchFamily="34" charset="0"/>
+                          <a:ea typeface="Calibri" panose="020F0502020204030204" pitchFamily="34" charset="-122"/>
+                          <a:cs typeface="Calibri" panose="020F0502020204030204" pitchFamily="34" charset="-120"/>
                         </a:rPr>
                         <a:t>Puzzle already mostly filled</a:t>
                       </a:r>
                       <a:endParaRPr lang="en-US" sz="1100" dirty="0">
-                        <a:latin typeface="Calibri" charset="0"/>
-                        <a:ea typeface="Calibri" charset="0"/>
-                        <a:cs typeface="Calibri" charset="0"/>
+                        <a:latin typeface="Calibri" panose="020F0502020204030204" pitchFamily="34" charset="0"/>
+                        <a:ea typeface="Calibri" panose="020F0502020204030204" pitchFamily="34" charset="0"/>
+                        <a:cs typeface="Calibri" panose="020F0502020204030204" pitchFamily="34" charset="0"/>
                       </a:endParaRPr>
                     </a:p>
                   </a:txBody>
-                  <a:tcPr marL="91440" marR="91440" marT="45720" marB="45720">
+                  <a:tcPr>
                     <a:lnL w="12700" cap="flat" cmpd="sng" algn="ctr">
                       <a:solidFill>
                         <a:srgbClr val="2A3A5E"/>
@@ -5732,13 +5563,12 @@
             <a:avLst/>
           </a:prstGeom>
           <a:noFill/>
-          <a:ln/>
-        </p:spPr>
-        <p:txBody>
-          <a:bodyPr wrap="square" lIns="0" tIns="0" rIns="0" bIns="0" rtlCol="0" anchor="ctr"/>
-          <a:lstStyle/>
-          <a:p>
-            <a:pPr indent="0" marL="0">
+        </p:spPr>
+        <p:txBody>
+          <a:bodyPr wrap="square" lIns="0" tIns="0" rIns="0" bIns="0" rtlCol="0" anchor="ctr"/>
+          <a:lstStyle/>
+          <a:p>
+            <a:pPr marL="0" indent="0">
               <a:buNone/>
             </a:pPr>
             <a:r>
@@ -5746,9 +5576,9 @@
                 <a:solidFill>
                   <a:srgbClr val="2DD4BF"/>
                 </a:solidFill>
-                <a:latin typeface="Cambria" pitchFamily="34" charset="0"/>
-                <a:ea typeface="Cambria" pitchFamily="34" charset="-122"/>
-                <a:cs typeface="Cambria" pitchFamily="34" charset="-120"/>
+                <a:latin typeface="Cambria" panose="02040503050406030204" pitchFamily="34" charset="0"/>
+                <a:ea typeface="Cambria" panose="02040503050406030204" pitchFamily="34" charset="-122"/>
+                <a:cs typeface="Cambria" panose="02040503050406030204" pitchFamily="34" charset="-120"/>
               </a:rPr>
               <a:t>Key Functions</a:t>
             </a:r>
@@ -5775,7 +5605,6 @@
           <a:solidFill>
             <a:srgbClr val="0F3460"/>
           </a:solidFill>
-          <a:ln/>
         </p:spPr>
       </p:sp>
       <p:sp>
@@ -5793,13 +5622,12 @@
             <a:avLst/>
           </a:prstGeom>
           <a:noFill/>
-          <a:ln/>
-        </p:spPr>
-        <p:txBody>
-          <a:bodyPr wrap="square" lIns="0" tIns="0" rIns="0" bIns="0" rtlCol="0" anchor="ctr"/>
-          <a:lstStyle/>
-          <a:p>
-            <a:pPr indent="0" marL="0">
+        </p:spPr>
+        <p:txBody>
+          <a:bodyPr wrap="square" lIns="0" tIns="0" rIns="0" bIns="0" rtlCol="0" anchor="ctr"/>
+          <a:lstStyle/>
+          <a:p>
+            <a:pPr marL="0" indent="0">
               <a:buNone/>
             </a:pPr>
             <a:r>
@@ -5807,9 +5635,9 @@
                 <a:solidFill>
                   <a:srgbClr val="FFFFFF"/>
                 </a:solidFill>
-                <a:latin typeface="Courier New" pitchFamily="34" charset="0"/>
-                <a:ea typeface="Courier New" pitchFamily="34" charset="-122"/>
-                <a:cs typeface="Courier New" pitchFamily="34" charset="-120"/>
+                <a:latin typeface="Courier New" panose="02070309020205020404" pitchFamily="34" charset="0"/>
+                <a:ea typeface="Courier New" panose="02070309020205020404" pitchFamily="34" charset="-122"/>
+                <a:cs typeface="Courier New" panose="02070309020205020404" pitchFamily="34" charset="-120"/>
               </a:rPr>
               <a:t>is_safe()  — Validates placement</a:t>
             </a:r>
@@ -5836,7 +5664,6 @@
           <a:solidFill>
             <a:srgbClr val="0F3460"/>
           </a:solidFill>
-          <a:ln/>
         </p:spPr>
       </p:sp>
       <p:sp>
@@ -5854,13 +5681,12 @@
             <a:avLst/>
           </a:prstGeom>
           <a:noFill/>
-          <a:ln/>
-        </p:spPr>
-        <p:txBody>
-          <a:bodyPr wrap="square" lIns="0" tIns="0" rIns="0" bIns="0" rtlCol="0" anchor="ctr"/>
-          <a:lstStyle/>
-          <a:p>
-            <a:pPr indent="0" marL="0">
+        </p:spPr>
+        <p:txBody>
+          <a:bodyPr wrap="square" lIns="0" tIns="0" rIns="0" bIns="0" rtlCol="0" anchor="ctr"/>
+          <a:lstStyle/>
+          <a:p>
+            <a:pPr marL="0" indent="0">
               <a:buNone/>
             </a:pPr>
             <a:r>
@@ -5868,9 +5694,9 @@
                 <a:solidFill>
                   <a:srgbClr val="FFFFFF"/>
                 </a:solidFill>
-                <a:latin typeface="Courier New" pitchFamily="34" charset="0"/>
-                <a:ea typeface="Courier New" pitchFamily="34" charset="-122"/>
-                <a:cs typeface="Courier New" pitchFamily="34" charset="-120"/>
+                <a:latin typeface="Courier New" panose="02070309020205020404" pitchFamily="34" charset="0"/>
+                <a:ea typeface="Courier New" panose="02070309020205020404" pitchFamily="34" charset="-122"/>
+                <a:cs typeface="Courier New" panose="02070309020205020404" pitchFamily="34" charset="-120"/>
               </a:rPr>
               <a:t>solve()  — Recursive backtracker</a:t>
             </a:r>
@@ -5897,7 +5723,6 @@
           <a:solidFill>
             <a:srgbClr val="0F3460"/>
           </a:solidFill>
-          <a:ln/>
         </p:spPr>
       </p:sp>
       <p:sp>
@@ -5915,13 +5740,12 @@
             <a:avLst/>
           </a:prstGeom>
           <a:noFill/>
-          <a:ln/>
-        </p:spPr>
-        <p:txBody>
-          <a:bodyPr wrap="square" lIns="0" tIns="0" rIns="0" bIns="0" rtlCol="0" anchor="ctr"/>
-          <a:lstStyle/>
-          <a:p>
-            <a:pPr indent="0" marL="0">
+        </p:spPr>
+        <p:txBody>
+          <a:bodyPr wrap="square" lIns="0" tIns="0" rIns="0" bIns="0" rtlCol="0" anchor="ctr"/>
+          <a:lstStyle/>
+          <a:p>
+            <a:pPr marL="0" indent="0">
               <a:buNone/>
             </a:pPr>
             <a:r>
@@ -5929,9 +5753,9 @@
                 <a:solidFill>
                   <a:srgbClr val="FFFFFF"/>
                 </a:solidFill>
-                <a:latin typeface="Courier New" pitchFamily="34" charset="0"/>
-                <a:ea typeface="Courier New" pitchFamily="34" charset="-122"/>
-                <a:cs typeface="Courier New" pitchFamily="34" charset="-120"/>
+                <a:latin typeface="Courier New" panose="02070309020205020404" pitchFamily="34" charset="0"/>
+                <a:ea typeface="Courier New" panose="02070309020205020404" pitchFamily="34" charset="-122"/>
+                <a:cs typeface="Courier New" panose="02070309020205020404" pitchFamily="34" charset="-120"/>
               </a:rPr>
               <a:t>print_board()  — Formatted output</a:t>
             </a:r>
@@ -5958,7 +5782,6 @@
           <a:solidFill>
             <a:srgbClr val="0F3460"/>
           </a:solidFill>
-          <a:ln/>
         </p:spPr>
       </p:sp>
       <p:sp>
@@ -5976,13 +5799,12 @@
             <a:avLst/>
           </a:prstGeom>
           <a:noFill/>
-          <a:ln/>
-        </p:spPr>
-        <p:txBody>
-          <a:bodyPr wrap="square" lIns="0" tIns="0" rIns="0" bIns="0" rtlCol="0" anchor="ctr"/>
-          <a:lstStyle/>
-          <a:p>
-            <a:pPr indent="0" marL="0">
+        </p:spPr>
+        <p:txBody>
+          <a:bodyPr wrap="square" lIns="0" tIns="0" rIns="0" bIns="0" rtlCol="0" anchor="ctr"/>
+          <a:lstStyle/>
+          <a:p>
+            <a:pPr marL="0" indent="0">
               <a:buNone/>
             </a:pPr>
             <a:r>
@@ -5990,9 +5812,9 @@
                 <a:solidFill>
                   <a:srgbClr val="FFFFFF"/>
                 </a:solidFill>
-                <a:latin typeface="Courier New" pitchFamily="34" charset="0"/>
-                <a:ea typeface="Courier New" pitchFamily="34" charset="-122"/>
-                <a:cs typeface="Courier New" pitchFamily="34" charset="-120"/>
+                <a:latin typeface="Courier New" panose="02070309020205020404" pitchFamily="34" charset="0"/>
+                <a:ea typeface="Courier New" panose="02070309020205020404" pitchFamily="34" charset="-122"/>
+                <a:cs typeface="Courier New" panose="02070309020205020404" pitchFamily="34" charset="-120"/>
               </a:rPr>
               <a:t>get_user_input()  — Input &amp; validate</a:t>
             </a:r>
@@ -6010,12 +5832,13 @@
 
 <file path=ppt/slides/slide4.xml><?xml version="1.0" encoding="utf-8"?>
 <p:sld xmlns:a="http://schemas.openxmlformats.org/drawingml/2006/main" xmlns:r="http://schemas.openxmlformats.org/officeDocument/2006/relationships" xmlns:p="http://schemas.openxmlformats.org/presentationml/2006/main">
-  <p:cSld name="Slide 4">
+  <p:cSld>
     <p:bg>
       <p:bgPr>
         <a:solidFill>
           <a:srgbClr val="F7F9FC"/>
         </a:solidFill>
+        <a:effectLst/>
       </p:bgPr>
     </p:bg>
     <p:spTree>
@@ -6049,7 +5872,6 @@
           <a:solidFill>
             <a:srgbClr val="1A1A2E"/>
           </a:solidFill>
-          <a:ln/>
         </p:spPr>
       </p:sp>
       <p:sp>
@@ -6067,13 +5889,12 @@
             <a:avLst/>
           </a:prstGeom>
           <a:noFill/>
-          <a:ln/>
-        </p:spPr>
-        <p:txBody>
-          <a:bodyPr wrap="square" lIns="0" tIns="0" rIns="0" bIns="0" rtlCol="0" anchor="ctr"/>
-          <a:lstStyle/>
-          <a:p>
-            <a:pPr algn="l" indent="0" marL="0">
+        </p:spPr>
+        <p:txBody>
+          <a:bodyPr wrap="square" lIns="0" tIns="0" rIns="0" bIns="0" rtlCol="0" anchor="ctr"/>
+          <a:lstStyle/>
+          <a:p>
+            <a:pPr marL="0" indent="0" algn="l">
               <a:buNone/>
             </a:pPr>
             <a:r>
@@ -6081,9 +5902,9 @@
                 <a:solidFill>
                   <a:srgbClr val="FFFFFF"/>
                 </a:solidFill>
-                <a:latin typeface="Cambria" pitchFamily="34" charset="0"/>
-                <a:ea typeface="Cambria" pitchFamily="34" charset="-122"/>
-                <a:cs typeface="Cambria" pitchFamily="34" charset="-120"/>
+                <a:latin typeface="Cambria" panose="02040503050406030204" pitchFamily="34" charset="0"/>
+                <a:ea typeface="Cambria" panose="02040503050406030204" pitchFamily="34" charset="-122"/>
+                <a:cs typeface="Cambria" panose="02040503050406030204" pitchFamily="34" charset="-120"/>
               </a:rPr>
               <a:t>Results / Outcome</a:t>
             </a:r>
@@ -6110,9 +5931,8 @@
           <a:solidFill>
             <a:srgbClr val="1A1A2E"/>
           </a:solidFill>
-          <a:ln/>
           <a:effectLst>
-            <a:outerShdw sx="100000" sy="100000" kx="0" ky="0" algn="bl" rotWithShape="0" blurRad="152400" dist="50800" dir="2700000">
+            <a:outerShdw blurRad="152400" dist="50800" dir="2700000" algn="bl" rotWithShape="0">
               <a:srgbClr val="000000">
                 <a:alpha val="25000"/>
               </a:srgbClr>
@@ -6160,13 +5980,12 @@
             <a:avLst/>
           </a:prstGeom>
           <a:noFill/>
-          <a:ln/>
-        </p:spPr>
-        <p:txBody>
-          <a:bodyPr wrap="square" lIns="0" tIns="0" rIns="0" bIns="0" rtlCol="0" anchor="ctr"/>
-          <a:lstStyle/>
-          <a:p>
-            <a:pPr algn="ctr" indent="0" marL="0">
+        </p:spPr>
+        <p:txBody>
+          <a:bodyPr wrap="square" lIns="0" tIns="0" rIns="0" bIns="0" rtlCol="0" anchor="ctr"/>
+          <a:lstStyle/>
+          <a:p>
+            <a:pPr marL="0" indent="0" algn="ctr">
               <a:buNone/>
             </a:pPr>
             <a:r>
@@ -6221,13 +6040,12 @@
             <a:avLst/>
           </a:prstGeom>
           <a:noFill/>
-          <a:ln/>
-        </p:spPr>
-        <p:txBody>
-          <a:bodyPr wrap="square" lIns="0" tIns="0" rIns="0" bIns="0" rtlCol="0" anchor="ctr"/>
-          <a:lstStyle/>
-          <a:p>
-            <a:pPr algn="ctr" indent="0" marL="0">
+        </p:spPr>
+        <p:txBody>
+          <a:bodyPr wrap="square" lIns="0" tIns="0" rIns="0" bIns="0" rtlCol="0" anchor="ctr"/>
+          <a:lstStyle/>
+          <a:p>
+            <a:pPr marL="0" indent="0" algn="ctr">
               <a:buNone/>
             </a:pPr>
             <a:r>
@@ -6332,13 +6150,12 @@
             <a:avLst/>
           </a:prstGeom>
           <a:noFill/>
-          <a:ln/>
-        </p:spPr>
-        <p:txBody>
-          <a:bodyPr wrap="square" lIns="0" tIns="0" rIns="0" bIns="0" rtlCol="0" anchor="ctr"/>
-          <a:lstStyle/>
-          <a:p>
-            <a:pPr algn="ctr" indent="0" marL="0">
+        </p:spPr>
+        <p:txBody>
+          <a:bodyPr wrap="square" lIns="0" tIns="0" rIns="0" bIns="0" rtlCol="0" anchor="ctr"/>
+          <a:lstStyle/>
+          <a:p>
+            <a:pPr marL="0" indent="0" algn="ctr">
               <a:buNone/>
             </a:pPr>
             <a:r>
@@ -6493,13 +6310,12 @@
             <a:avLst/>
           </a:prstGeom>
           <a:noFill/>
-          <a:ln/>
-        </p:spPr>
-        <p:txBody>
-          <a:bodyPr wrap="square" lIns="0" tIns="0" rIns="0" bIns="0" rtlCol="0" anchor="ctr"/>
-          <a:lstStyle/>
-          <a:p>
-            <a:pPr algn="ctr" indent="0" marL="0">
+        </p:spPr>
+        <p:txBody>
+          <a:bodyPr wrap="square" lIns="0" tIns="0" rIns="0" bIns="0" rtlCol="0" anchor="ctr"/>
+          <a:lstStyle/>
+          <a:p>
+            <a:pPr marL="0" indent="0" algn="ctr">
               <a:buNone/>
             </a:pPr>
             <a:r>
@@ -6604,13 +6420,12 @@
             <a:avLst/>
           </a:prstGeom>
           <a:noFill/>
-          <a:ln/>
-        </p:spPr>
-        <p:txBody>
-          <a:bodyPr wrap="square" lIns="0" tIns="0" rIns="0" bIns="0" rtlCol="0" anchor="ctr"/>
-          <a:lstStyle/>
-          <a:p>
-            <a:pPr algn="ctr" indent="0" marL="0">
+        </p:spPr>
+        <p:txBody>
+          <a:bodyPr wrap="square" lIns="0" tIns="0" rIns="0" bIns="0" rtlCol="0" anchor="ctr"/>
+          <a:lstStyle/>
+          <a:p>
+            <a:pPr marL="0" indent="0" algn="ctr">
               <a:buNone/>
             </a:pPr>
             <a:r>
@@ -6665,13 +6480,12 @@
             <a:avLst/>
           </a:prstGeom>
           <a:noFill/>
-          <a:ln/>
-        </p:spPr>
-        <p:txBody>
-          <a:bodyPr wrap="square" lIns="0" tIns="0" rIns="0" bIns="0" rtlCol="0" anchor="ctr"/>
-          <a:lstStyle/>
-          <a:p>
-            <a:pPr algn="ctr" indent="0" marL="0">
+        </p:spPr>
+        <p:txBody>
+          <a:bodyPr wrap="square" lIns="0" tIns="0" rIns="0" bIns="0" rtlCol="0" anchor="ctr"/>
+          <a:lstStyle/>
+          <a:p>
+            <a:pPr marL="0" indent="0" algn="ctr">
               <a:buNone/>
             </a:pPr>
             <a:r>
@@ -6726,13 +6540,12 @@
             <a:avLst/>
           </a:prstGeom>
           <a:noFill/>
-          <a:ln/>
-        </p:spPr>
-        <p:txBody>
-          <a:bodyPr wrap="square" lIns="0" tIns="0" rIns="0" bIns="0" rtlCol="0" anchor="ctr"/>
-          <a:lstStyle/>
-          <a:p>
-            <a:pPr algn="ctr" indent="0" marL="0">
+        </p:spPr>
+        <p:txBody>
+          <a:bodyPr wrap="square" lIns="0" tIns="0" rIns="0" bIns="0" rtlCol="0" anchor="ctr"/>
+          <a:lstStyle/>
+          <a:p>
+            <a:pPr marL="0" indent="0" algn="ctr">
               <a:buNone/>
             </a:pPr>
             <a:r>
@@ -6887,13 +6700,12 @@
             <a:avLst/>
           </a:prstGeom>
           <a:noFill/>
-          <a:ln/>
-        </p:spPr>
-        <p:txBody>
-          <a:bodyPr wrap="square" lIns="0" tIns="0" rIns="0" bIns="0" rtlCol="0" anchor="ctr"/>
-          <a:lstStyle/>
-          <a:p>
-            <a:pPr algn="ctr" indent="0" marL="0">
+        </p:spPr>
+        <p:txBody>
+          <a:bodyPr wrap="square" lIns="0" tIns="0" rIns="0" bIns="0" rtlCol="0" anchor="ctr"/>
+          <a:lstStyle/>
+          <a:p>
+            <a:pPr marL="0" indent="0" algn="ctr">
               <a:buNone/>
             </a:pPr>
             <a:r>
@@ -6948,13 +6760,12 @@
             <a:avLst/>
           </a:prstGeom>
           <a:noFill/>
-          <a:ln/>
-        </p:spPr>
-        <p:txBody>
-          <a:bodyPr wrap="square" lIns="0" tIns="0" rIns="0" bIns="0" rtlCol="0" anchor="ctr"/>
-          <a:lstStyle/>
-          <a:p>
-            <a:pPr algn="ctr" indent="0" marL="0">
+        </p:spPr>
+        <p:txBody>
+          <a:bodyPr wrap="square" lIns="0" tIns="0" rIns="0" bIns="0" rtlCol="0" anchor="ctr"/>
+          <a:lstStyle/>
+          <a:p>
+            <a:pPr marL="0" indent="0" algn="ctr">
               <a:buNone/>
             </a:pPr>
             <a:r>
@@ -7109,13 +6920,12 @@
             <a:avLst/>
           </a:prstGeom>
           <a:noFill/>
-          <a:ln/>
-        </p:spPr>
-        <p:txBody>
-          <a:bodyPr wrap="square" lIns="0" tIns="0" rIns="0" bIns="0" rtlCol="0" anchor="ctr"/>
-          <a:lstStyle/>
-          <a:p>
-            <a:pPr algn="ctr" indent="0" marL="0">
+        </p:spPr>
+        <p:txBody>
+          <a:bodyPr wrap="square" lIns="0" tIns="0" rIns="0" bIns="0" rtlCol="0" anchor="ctr"/>
+          <a:lstStyle/>
+          <a:p>
+            <a:pPr marL="0" indent="0" algn="ctr">
               <a:buNone/>
             </a:pPr>
             <a:r>
@@ -7195,13 +7005,12 @@
             <a:avLst/>
           </a:prstGeom>
           <a:noFill/>
-          <a:ln/>
-        </p:spPr>
-        <p:txBody>
-          <a:bodyPr wrap="square" lIns="0" tIns="0" rIns="0" bIns="0" rtlCol="0" anchor="ctr"/>
-          <a:lstStyle/>
-          <a:p>
-            <a:pPr algn="ctr" indent="0" marL="0">
+        </p:spPr>
+        <p:txBody>
+          <a:bodyPr wrap="square" lIns="0" tIns="0" rIns="0" bIns="0" rtlCol="0" anchor="ctr"/>
+          <a:lstStyle/>
+          <a:p>
+            <a:pPr marL="0" indent="0" algn="ctr">
               <a:buNone/>
             </a:pPr>
             <a:r>
@@ -7331,13 +7140,12 @@
             <a:avLst/>
           </a:prstGeom>
           <a:noFill/>
-          <a:ln/>
-        </p:spPr>
-        <p:txBody>
-          <a:bodyPr wrap="square" lIns="0" tIns="0" rIns="0" bIns="0" rtlCol="0" anchor="ctr"/>
-          <a:lstStyle/>
-          <a:p>
-            <a:pPr algn="ctr" indent="0" marL="0">
+        </p:spPr>
+        <p:txBody>
+          <a:bodyPr wrap="square" lIns="0" tIns="0" rIns="0" bIns="0" rtlCol="0" anchor="ctr"/>
+          <a:lstStyle/>
+          <a:p>
+            <a:pPr marL="0" indent="0" algn="ctr">
               <a:buNone/>
             </a:pPr>
             <a:r>
@@ -7467,13 +7275,12 @@
             <a:avLst/>
           </a:prstGeom>
           <a:noFill/>
-          <a:ln/>
-        </p:spPr>
-        <p:txBody>
-          <a:bodyPr wrap="square" lIns="0" tIns="0" rIns="0" bIns="0" rtlCol="0" anchor="ctr"/>
-          <a:lstStyle/>
-          <a:p>
-            <a:pPr algn="ctr" indent="0" marL="0">
+        </p:spPr>
+        <p:txBody>
+          <a:bodyPr wrap="square" lIns="0" tIns="0" rIns="0" bIns="0" rtlCol="0" anchor="ctr"/>
+          <a:lstStyle/>
+          <a:p>
+            <a:pPr marL="0" indent="0" algn="ctr">
               <a:buNone/>
             </a:pPr>
             <a:r>
@@ -7528,13 +7335,12 @@
             <a:avLst/>
           </a:prstGeom>
           <a:noFill/>
-          <a:ln/>
-        </p:spPr>
-        <p:txBody>
-          <a:bodyPr wrap="square" lIns="0" tIns="0" rIns="0" bIns="0" rtlCol="0" anchor="ctr"/>
-          <a:lstStyle/>
-          <a:p>
-            <a:pPr algn="ctr" indent="0" marL="0">
+        </p:spPr>
+        <p:txBody>
+          <a:bodyPr wrap="square" lIns="0" tIns="0" rIns="0" bIns="0" rtlCol="0" anchor="ctr"/>
+          <a:lstStyle/>
+          <a:p>
+            <a:pPr marL="0" indent="0" algn="ctr">
               <a:buNone/>
             </a:pPr>
             <a:r>
@@ -7639,13 +7445,12 @@
             <a:avLst/>
           </a:prstGeom>
           <a:noFill/>
-          <a:ln/>
-        </p:spPr>
-        <p:txBody>
-          <a:bodyPr wrap="square" lIns="0" tIns="0" rIns="0" bIns="0" rtlCol="0" anchor="ctr"/>
-          <a:lstStyle/>
-          <a:p>
-            <a:pPr algn="ctr" indent="0" marL="0">
+        </p:spPr>
+        <p:txBody>
+          <a:bodyPr wrap="square" lIns="0" tIns="0" rIns="0" bIns="0" rtlCol="0" anchor="ctr"/>
+          <a:lstStyle/>
+          <a:p>
+            <a:pPr marL="0" indent="0" algn="ctr">
               <a:buNone/>
             </a:pPr>
             <a:r>
@@ -7725,13 +7530,12 @@
             <a:avLst/>
           </a:prstGeom>
           <a:noFill/>
-          <a:ln/>
-        </p:spPr>
-        <p:txBody>
-          <a:bodyPr wrap="square" lIns="0" tIns="0" rIns="0" bIns="0" rtlCol="0" anchor="ctr"/>
-          <a:lstStyle/>
-          <a:p>
-            <a:pPr algn="ctr" indent="0" marL="0">
+        </p:spPr>
+        <p:txBody>
+          <a:bodyPr wrap="square" lIns="0" tIns="0" rIns="0" bIns="0" rtlCol="0" anchor="ctr"/>
+          <a:lstStyle/>
+          <a:p>
+            <a:pPr marL="0" indent="0" algn="ctr">
               <a:buNone/>
             </a:pPr>
             <a:r>
@@ -7836,13 +7640,12 @@
             <a:avLst/>
           </a:prstGeom>
           <a:noFill/>
-          <a:ln/>
-        </p:spPr>
-        <p:txBody>
-          <a:bodyPr wrap="square" lIns="0" tIns="0" rIns="0" bIns="0" rtlCol="0" anchor="ctr"/>
-          <a:lstStyle/>
-          <a:p>
-            <a:pPr algn="ctr" indent="0" marL="0">
+        </p:spPr>
+        <p:txBody>
+          <a:bodyPr wrap="square" lIns="0" tIns="0" rIns="0" bIns="0" rtlCol="0" anchor="ctr"/>
+          <a:lstStyle/>
+          <a:p>
+            <a:pPr marL="0" indent="0" algn="ctr">
               <a:buNone/>
             </a:pPr>
             <a:r>
@@ -7897,13 +7700,12 @@
             <a:avLst/>
           </a:prstGeom>
           <a:noFill/>
-          <a:ln/>
-        </p:spPr>
-        <p:txBody>
-          <a:bodyPr wrap="square" lIns="0" tIns="0" rIns="0" bIns="0" rtlCol="0" anchor="ctr"/>
-          <a:lstStyle/>
-          <a:p>
-            <a:pPr algn="ctr" indent="0" marL="0">
+        </p:spPr>
+        <p:txBody>
+          <a:bodyPr wrap="square" lIns="0" tIns="0" rIns="0" bIns="0" rtlCol="0" anchor="ctr"/>
+          <a:lstStyle/>
+          <a:p>
+            <a:pPr marL="0" indent="0" algn="ctr">
               <a:buNone/>
             </a:pPr>
             <a:r>
@@ -8033,13 +7835,12 @@
             <a:avLst/>
           </a:prstGeom>
           <a:noFill/>
-          <a:ln/>
-        </p:spPr>
-        <p:txBody>
-          <a:bodyPr wrap="square" lIns="0" tIns="0" rIns="0" bIns="0" rtlCol="0" anchor="ctr"/>
-          <a:lstStyle/>
-          <a:p>
-            <a:pPr algn="ctr" indent="0" marL="0">
+        </p:spPr>
+        <p:txBody>
+          <a:bodyPr wrap="square" lIns="0" tIns="0" rIns="0" bIns="0" rtlCol="0" anchor="ctr"/>
+          <a:lstStyle/>
+          <a:p>
+            <a:pPr marL="0" indent="0" algn="ctr">
               <a:buNone/>
             </a:pPr>
             <a:r>
@@ -8169,13 +7970,12 @@
             <a:avLst/>
           </a:prstGeom>
           <a:noFill/>
-          <a:ln/>
-        </p:spPr>
-        <p:txBody>
-          <a:bodyPr wrap="square" lIns="0" tIns="0" rIns="0" bIns="0" rtlCol="0" anchor="ctr"/>
-          <a:lstStyle/>
-          <a:p>
-            <a:pPr algn="ctr" indent="0" marL="0">
+        </p:spPr>
+        <p:txBody>
+          <a:bodyPr wrap="square" lIns="0" tIns="0" rIns="0" bIns="0" rtlCol="0" anchor="ctr"/>
+          <a:lstStyle/>
+          <a:p>
+            <a:pPr marL="0" indent="0" algn="ctr">
               <a:buNone/>
             </a:pPr>
             <a:r>
@@ -8255,13 +8055,12 @@
             <a:avLst/>
           </a:prstGeom>
           <a:noFill/>
-          <a:ln/>
-        </p:spPr>
-        <p:txBody>
-          <a:bodyPr wrap="square" lIns="0" tIns="0" rIns="0" bIns="0" rtlCol="0" anchor="ctr"/>
-          <a:lstStyle/>
-          <a:p>
-            <a:pPr algn="ctr" indent="0" marL="0">
+        </p:spPr>
+        <p:txBody>
+          <a:bodyPr wrap="square" lIns="0" tIns="0" rIns="0" bIns="0" rtlCol="0" anchor="ctr"/>
+          <a:lstStyle/>
+          <a:p>
+            <a:pPr marL="0" indent="0" algn="ctr">
               <a:buNone/>
             </a:pPr>
             <a:r>
@@ -8416,13 +8215,12 @@
             <a:avLst/>
           </a:prstGeom>
           <a:noFill/>
-          <a:ln/>
-        </p:spPr>
-        <p:txBody>
-          <a:bodyPr wrap="square" lIns="0" tIns="0" rIns="0" bIns="0" rtlCol="0" anchor="ctr"/>
-          <a:lstStyle/>
-          <a:p>
-            <a:pPr algn="ctr" indent="0" marL="0">
+        </p:spPr>
+        <p:txBody>
+          <a:bodyPr wrap="square" lIns="0" tIns="0" rIns="0" bIns="0" rtlCol="0" anchor="ctr"/>
+          <a:lstStyle/>
+          <a:p>
+            <a:pPr marL="0" indent="0" algn="ctr">
               <a:buNone/>
             </a:pPr>
             <a:r>
@@ -8477,13 +8275,12 @@
             <a:avLst/>
           </a:prstGeom>
           <a:noFill/>
-          <a:ln/>
-        </p:spPr>
-        <p:txBody>
-          <a:bodyPr wrap="square" lIns="0" tIns="0" rIns="0" bIns="0" rtlCol="0" anchor="ctr"/>
-          <a:lstStyle/>
-          <a:p>
-            <a:pPr algn="ctr" indent="0" marL="0">
+        </p:spPr>
+        <p:txBody>
+          <a:bodyPr wrap="square" lIns="0" tIns="0" rIns="0" bIns="0" rtlCol="0" anchor="ctr"/>
+          <a:lstStyle/>
+          <a:p>
+            <a:pPr marL="0" indent="0" algn="ctr">
               <a:buNone/>
             </a:pPr>
             <a:r>
@@ -8638,13 +8435,12 @@
             <a:avLst/>
           </a:prstGeom>
           <a:noFill/>
-          <a:ln/>
-        </p:spPr>
-        <p:txBody>
-          <a:bodyPr wrap="square" lIns="0" tIns="0" rIns="0" bIns="0" rtlCol="0" anchor="ctr"/>
-          <a:lstStyle/>
-          <a:p>
-            <a:pPr algn="ctr" indent="0" marL="0">
+        </p:spPr>
+        <p:txBody>
+          <a:bodyPr wrap="square" lIns="0" tIns="0" rIns="0" bIns="0" rtlCol="0" anchor="ctr"/>
+          <a:lstStyle/>
+          <a:p>
+            <a:pPr marL="0" indent="0" algn="ctr">
               <a:buNone/>
             </a:pPr>
             <a:r>
@@ -8699,13 +8495,12 @@
             <a:avLst/>
           </a:prstGeom>
           <a:noFill/>
-          <a:ln/>
-        </p:spPr>
-        <p:txBody>
-          <a:bodyPr wrap="square" lIns="0" tIns="0" rIns="0" bIns="0" rtlCol="0" anchor="ctr"/>
-          <a:lstStyle/>
-          <a:p>
-            <a:pPr algn="ctr" indent="0" marL="0">
+        </p:spPr>
+        <p:txBody>
+          <a:bodyPr wrap="square" lIns="0" tIns="0" rIns="0" bIns="0" rtlCol="0" anchor="ctr"/>
+          <a:lstStyle/>
+          <a:p>
+            <a:pPr marL="0" indent="0" algn="ctr">
               <a:buNone/>
             </a:pPr>
             <a:r>
@@ -8760,13 +8555,12 @@
             <a:avLst/>
           </a:prstGeom>
           <a:noFill/>
-          <a:ln/>
-        </p:spPr>
-        <p:txBody>
-          <a:bodyPr wrap="square" lIns="0" tIns="0" rIns="0" bIns="0" rtlCol="0" anchor="ctr"/>
-          <a:lstStyle/>
-          <a:p>
-            <a:pPr algn="ctr" indent="0" marL="0">
+        </p:spPr>
+        <p:txBody>
+          <a:bodyPr wrap="square" lIns="0" tIns="0" rIns="0" bIns="0" rtlCol="0" anchor="ctr"/>
+          <a:lstStyle/>
+          <a:p>
+            <a:pPr marL="0" indent="0" algn="ctr">
               <a:buNone/>
             </a:pPr>
             <a:r>
@@ -8871,13 +8665,12 @@
             <a:avLst/>
           </a:prstGeom>
           <a:noFill/>
-          <a:ln/>
-        </p:spPr>
-        <p:txBody>
-          <a:bodyPr wrap="square" lIns="0" tIns="0" rIns="0" bIns="0" rtlCol="0" anchor="ctr"/>
-          <a:lstStyle/>
-          <a:p>
-            <a:pPr algn="ctr" indent="0" marL="0">
+        </p:spPr>
+        <p:txBody>
+          <a:bodyPr wrap="square" lIns="0" tIns="0" rIns="0" bIns="0" rtlCol="0" anchor="ctr"/>
+          <a:lstStyle/>
+          <a:p>
+            <a:pPr marL="0" indent="0" algn="ctr">
               <a:buNone/>
             </a:pPr>
             <a:r>
@@ -9032,13 +8825,12 @@
             <a:avLst/>
           </a:prstGeom>
           <a:noFill/>
-          <a:ln/>
-        </p:spPr>
-        <p:txBody>
-          <a:bodyPr wrap="square" lIns="0" tIns="0" rIns="0" bIns="0" rtlCol="0" anchor="ctr"/>
-          <a:lstStyle/>
-          <a:p>
-            <a:pPr algn="ctr" indent="0" marL="0">
+        </p:spPr>
+        <p:txBody>
+          <a:bodyPr wrap="square" lIns="0" tIns="0" rIns="0" bIns="0" rtlCol="0" anchor="ctr"/>
+          <a:lstStyle/>
+          <a:p>
+            <a:pPr marL="0" indent="0" algn="ctr">
               <a:buNone/>
             </a:pPr>
             <a:r>
@@ -9143,13 +8935,12 @@
             <a:avLst/>
           </a:prstGeom>
           <a:noFill/>
-          <a:ln/>
-        </p:spPr>
-        <p:txBody>
-          <a:bodyPr wrap="square" lIns="0" tIns="0" rIns="0" bIns="0" rtlCol="0" anchor="ctr"/>
-          <a:lstStyle/>
-          <a:p>
-            <a:pPr algn="ctr" indent="0" marL="0">
+        </p:spPr>
+        <p:txBody>
+          <a:bodyPr wrap="square" lIns="0" tIns="0" rIns="0" bIns="0" rtlCol="0" anchor="ctr"/>
+          <a:lstStyle/>
+          <a:p>
+            <a:pPr marL="0" indent="0" algn="ctr">
               <a:buNone/>
             </a:pPr>
             <a:r>
@@ -9204,13 +8995,12 @@
             <a:avLst/>
           </a:prstGeom>
           <a:noFill/>
-          <a:ln/>
-        </p:spPr>
-        <p:txBody>
-          <a:bodyPr wrap="square" lIns="0" tIns="0" rIns="0" bIns="0" rtlCol="0" anchor="ctr"/>
-          <a:lstStyle/>
-          <a:p>
-            <a:pPr algn="ctr" indent="0" marL="0">
+        </p:spPr>
+        <p:txBody>
+          <a:bodyPr wrap="square" lIns="0" tIns="0" rIns="0" bIns="0" rtlCol="0" anchor="ctr"/>
+          <a:lstStyle/>
+          <a:p>
+            <a:pPr marL="0" indent="0" algn="ctr">
               <a:buNone/>
             </a:pPr>
             <a:r>
@@ -9424,13 +9214,12 @@
             <a:avLst/>
           </a:prstGeom>
           <a:noFill/>
-          <a:ln/>
-        </p:spPr>
-        <p:txBody>
-          <a:bodyPr wrap="square" lIns="0" tIns="0" rIns="0" bIns="0" rtlCol="0" anchor="ctr"/>
-          <a:lstStyle/>
-          <a:p>
-            <a:pPr algn="ctr" indent="0" marL="0">
+        </p:spPr>
+        <p:txBody>
+          <a:bodyPr wrap="square" lIns="0" tIns="0" rIns="0" bIns="0" rtlCol="0" anchor="ctr"/>
+          <a:lstStyle/>
+          <a:p>
+            <a:pPr marL="0" indent="0" algn="ctr">
               <a:buNone/>
             </a:pPr>
             <a:r>
@@ -9438,9 +9227,9 @@
                 <a:solidFill>
                   <a:srgbClr val="1A1A2E"/>
                 </a:solidFill>
-                <a:latin typeface="Cambria" pitchFamily="34" charset="0"/>
-                <a:ea typeface="Cambria" pitchFamily="34" charset="-122"/>
-                <a:cs typeface="Cambria" pitchFamily="34" charset="-120"/>
+                <a:latin typeface="Cambria" panose="02040503050406030204" pitchFamily="34" charset="0"/>
+                <a:ea typeface="Cambria" panose="02040503050406030204" pitchFamily="34" charset="-122"/>
+                <a:cs typeface="Cambria" panose="02040503050406030204" pitchFamily="34" charset="-120"/>
               </a:rPr>
               <a:t>Input Board</a:t>
             </a:r>
@@ -9463,13 +9252,12 @@
             <a:avLst/>
           </a:prstGeom>
           <a:noFill/>
-          <a:ln/>
-        </p:spPr>
-        <p:txBody>
-          <a:bodyPr wrap="square" lIns="0" tIns="0" rIns="0" bIns="0" rtlCol="0" anchor="ctr"/>
-          <a:lstStyle/>
-          <a:p>
-            <a:pPr algn="ctr" indent="0" marL="0">
+        </p:spPr>
+        <p:txBody>
+          <a:bodyPr wrap="square" lIns="0" tIns="0" rIns="0" bIns="0" rtlCol="0" anchor="ctr"/>
+          <a:lstStyle/>
+          <a:p>
+            <a:pPr marL="0" indent="0" algn="ctr">
               <a:buNone/>
             </a:pPr>
             <a:r>
@@ -9499,13 +9287,12 @@
             <a:avLst/>
           </a:prstGeom>
           <a:noFill/>
-          <a:ln/>
-        </p:spPr>
-        <p:txBody>
-          <a:bodyPr wrap="square" lIns="0" tIns="0" rIns="0" bIns="0" rtlCol="0" anchor="ctr"/>
-          <a:lstStyle/>
-          <a:p>
-            <a:pPr algn="ctr" indent="0" marL="0">
+        </p:spPr>
+        <p:txBody>
+          <a:bodyPr wrap="square" lIns="0" tIns="0" rIns="0" bIns="0" rtlCol="0" anchor="ctr"/>
+          <a:lstStyle/>
+          <a:p>
+            <a:pPr marL="0" indent="0" algn="ctr">
               <a:buNone/>
             </a:pPr>
             <a:r>
@@ -9513,9 +9300,9 @@
                 <a:solidFill>
                   <a:srgbClr val="2DD4BF"/>
                 </a:solidFill>
-                <a:latin typeface="Calibri" pitchFamily="34" charset="0"/>
-                <a:ea typeface="Calibri" pitchFamily="34" charset="-122"/>
-                <a:cs typeface="Calibri" pitchFamily="34" charset="-120"/>
+                <a:latin typeface="Calibri" panose="020F0502020204030204" pitchFamily="34" charset="0"/>
+                <a:ea typeface="Calibri" panose="020F0502020204030204" pitchFamily="34" charset="-122"/>
+                <a:cs typeface="Calibri" panose="020F0502020204030204" pitchFamily="34" charset="-120"/>
               </a:rPr>
               <a:t>Solved!</a:t>
             </a:r>
@@ -9542,9 +9329,8 @@
           <a:solidFill>
             <a:srgbClr val="1A1A2E"/>
           </a:solidFill>
-          <a:ln/>
           <a:effectLst>
-            <a:outerShdw sx="100000" sy="100000" kx="0" ky="0" algn="bl" rotWithShape="0" blurRad="152400" dist="50800" dir="2700000">
+            <a:outerShdw blurRad="152400" dist="50800" dir="2700000" algn="bl" rotWithShape="0">
               <a:srgbClr val="000000">
                 <a:alpha val="25000"/>
               </a:srgbClr>
@@ -9592,13 +9378,12 @@
             <a:avLst/>
           </a:prstGeom>
           <a:noFill/>
-          <a:ln/>
-        </p:spPr>
-        <p:txBody>
-          <a:bodyPr wrap="square" lIns="0" tIns="0" rIns="0" bIns="0" rtlCol="0" anchor="ctr"/>
-          <a:lstStyle/>
-          <a:p>
-            <a:pPr algn="ctr" indent="0" marL="0">
+        </p:spPr>
+        <p:txBody>
+          <a:bodyPr wrap="square" lIns="0" tIns="0" rIns="0" bIns="0" rtlCol="0" anchor="ctr"/>
+          <a:lstStyle/>
+          <a:p>
+            <a:pPr marL="0" indent="0" algn="ctr">
               <a:buNone/>
             </a:pPr>
             <a:r>
@@ -9653,13 +9438,12 @@
             <a:avLst/>
           </a:prstGeom>
           <a:noFill/>
-          <a:ln/>
-        </p:spPr>
-        <p:txBody>
-          <a:bodyPr wrap="square" lIns="0" tIns="0" rIns="0" bIns="0" rtlCol="0" anchor="ctr"/>
-          <a:lstStyle/>
-          <a:p>
-            <a:pPr algn="ctr" indent="0" marL="0">
+        </p:spPr>
+        <p:txBody>
+          <a:bodyPr wrap="square" lIns="0" tIns="0" rIns="0" bIns="0" rtlCol="0" anchor="ctr"/>
+          <a:lstStyle/>
+          <a:p>
+            <a:pPr marL="0" indent="0" algn="ctr">
               <a:buNone/>
             </a:pPr>
             <a:r>
@@ -9714,13 +9498,12 @@
             <a:avLst/>
           </a:prstGeom>
           <a:noFill/>
-          <a:ln/>
-        </p:spPr>
-        <p:txBody>
-          <a:bodyPr wrap="square" lIns="0" tIns="0" rIns="0" bIns="0" rtlCol="0" anchor="ctr"/>
-          <a:lstStyle/>
-          <a:p>
-            <a:pPr algn="ctr" indent="0" marL="0">
+        </p:spPr>
+        <p:txBody>
+          <a:bodyPr wrap="square" lIns="0" tIns="0" rIns="0" bIns="0" rtlCol="0" anchor="ctr"/>
+          <a:lstStyle/>
+          <a:p>
+            <a:pPr marL="0" indent="0" algn="ctr">
               <a:buNone/>
             </a:pPr>
             <a:r>
@@ -9775,13 +9558,12 @@
             <a:avLst/>
           </a:prstGeom>
           <a:noFill/>
-          <a:ln/>
-        </p:spPr>
-        <p:txBody>
-          <a:bodyPr wrap="square" lIns="0" tIns="0" rIns="0" bIns="0" rtlCol="0" anchor="ctr"/>
-          <a:lstStyle/>
-          <a:p>
-            <a:pPr algn="ctr" indent="0" marL="0">
+        </p:spPr>
+        <p:txBody>
+          <a:bodyPr wrap="square" lIns="0" tIns="0" rIns="0" bIns="0" rtlCol="0" anchor="ctr"/>
+          <a:lstStyle/>
+          <a:p>
+            <a:pPr marL="0" indent="0" algn="ctr">
               <a:buNone/>
             </a:pPr>
             <a:r>
@@ -9836,13 +9618,12 @@
             <a:avLst/>
           </a:prstGeom>
           <a:noFill/>
-          <a:ln/>
-        </p:spPr>
-        <p:txBody>
-          <a:bodyPr wrap="square" lIns="0" tIns="0" rIns="0" bIns="0" rtlCol="0" anchor="ctr"/>
-          <a:lstStyle/>
-          <a:p>
-            <a:pPr algn="ctr" indent="0" marL="0">
+        </p:spPr>
+        <p:txBody>
+          <a:bodyPr wrap="square" lIns="0" tIns="0" rIns="0" bIns="0" rtlCol="0" anchor="ctr"/>
+          <a:lstStyle/>
+          <a:p>
+            <a:pPr marL="0" indent="0" algn="ctr">
               <a:buNone/>
             </a:pPr>
             <a:r>
@@ -9897,13 +9678,12 @@
             <a:avLst/>
           </a:prstGeom>
           <a:noFill/>
-          <a:ln/>
-        </p:spPr>
-        <p:txBody>
-          <a:bodyPr wrap="square" lIns="0" tIns="0" rIns="0" bIns="0" rtlCol="0" anchor="ctr"/>
-          <a:lstStyle/>
-          <a:p>
-            <a:pPr algn="ctr" indent="0" marL="0">
+        </p:spPr>
+        <p:txBody>
+          <a:bodyPr wrap="square" lIns="0" tIns="0" rIns="0" bIns="0" rtlCol="0" anchor="ctr"/>
+          <a:lstStyle/>
+          <a:p>
+            <a:pPr marL="0" indent="0" algn="ctr">
               <a:buNone/>
             </a:pPr>
             <a:r>
@@ -9958,13 +9738,12 @@
             <a:avLst/>
           </a:prstGeom>
           <a:noFill/>
-          <a:ln/>
-        </p:spPr>
-        <p:txBody>
-          <a:bodyPr wrap="square" lIns="0" tIns="0" rIns="0" bIns="0" rtlCol="0" anchor="ctr"/>
-          <a:lstStyle/>
-          <a:p>
-            <a:pPr algn="ctr" indent="0" marL="0">
+        </p:spPr>
+        <p:txBody>
+          <a:bodyPr wrap="square" lIns="0" tIns="0" rIns="0" bIns="0" rtlCol="0" anchor="ctr"/>
+          <a:lstStyle/>
+          <a:p>
+            <a:pPr marL="0" indent="0" algn="ctr">
               <a:buNone/>
             </a:pPr>
             <a:r>
@@ -10019,13 +9798,12 @@
             <a:avLst/>
           </a:prstGeom>
           <a:noFill/>
-          <a:ln/>
-        </p:spPr>
-        <p:txBody>
-          <a:bodyPr wrap="square" lIns="0" tIns="0" rIns="0" bIns="0" rtlCol="0" anchor="ctr"/>
-          <a:lstStyle/>
-          <a:p>
-            <a:pPr algn="ctr" indent="0" marL="0">
+        </p:spPr>
+        <p:txBody>
+          <a:bodyPr wrap="square" lIns="0" tIns="0" rIns="0" bIns="0" rtlCol="0" anchor="ctr"/>
+          <a:lstStyle/>
+          <a:p>
+            <a:pPr marL="0" indent="0" algn="ctr">
               <a:buNone/>
             </a:pPr>
             <a:r>
@@ -10080,13 +9858,12 @@
             <a:avLst/>
           </a:prstGeom>
           <a:noFill/>
-          <a:ln/>
-        </p:spPr>
-        <p:txBody>
-          <a:bodyPr wrap="square" lIns="0" tIns="0" rIns="0" bIns="0" rtlCol="0" anchor="ctr"/>
-          <a:lstStyle/>
-          <a:p>
-            <a:pPr algn="ctr" indent="0" marL="0">
+        </p:spPr>
+        <p:txBody>
+          <a:bodyPr wrap="square" lIns="0" tIns="0" rIns="0" bIns="0" rtlCol="0" anchor="ctr"/>
+          <a:lstStyle/>
+          <a:p>
+            <a:pPr marL="0" indent="0" algn="ctr">
               <a:buNone/>
             </a:pPr>
             <a:r>
@@ -10141,13 +9918,12 @@
             <a:avLst/>
           </a:prstGeom>
           <a:noFill/>
-          <a:ln/>
-        </p:spPr>
-        <p:txBody>
-          <a:bodyPr wrap="square" lIns="0" tIns="0" rIns="0" bIns="0" rtlCol="0" anchor="ctr"/>
-          <a:lstStyle/>
-          <a:p>
-            <a:pPr algn="ctr" indent="0" marL="0">
+        </p:spPr>
+        <p:txBody>
+          <a:bodyPr wrap="square" lIns="0" tIns="0" rIns="0" bIns="0" rtlCol="0" anchor="ctr"/>
+          <a:lstStyle/>
+          <a:p>
+            <a:pPr marL="0" indent="0" algn="ctr">
               <a:buNone/>
             </a:pPr>
             <a:r>
@@ -10202,13 +9978,12 @@
             <a:avLst/>
           </a:prstGeom>
           <a:noFill/>
-          <a:ln/>
-        </p:spPr>
-        <p:txBody>
-          <a:bodyPr wrap="square" lIns="0" tIns="0" rIns="0" bIns="0" rtlCol="0" anchor="ctr"/>
-          <a:lstStyle/>
-          <a:p>
-            <a:pPr algn="ctr" indent="0" marL="0">
+        </p:spPr>
+        <p:txBody>
+          <a:bodyPr wrap="square" lIns="0" tIns="0" rIns="0" bIns="0" rtlCol="0" anchor="ctr"/>
+          <a:lstStyle/>
+          <a:p>
+            <a:pPr marL="0" indent="0" algn="ctr">
               <a:buNone/>
             </a:pPr>
             <a:r>
@@ -10263,13 +10038,12 @@
             <a:avLst/>
           </a:prstGeom>
           <a:noFill/>
-          <a:ln/>
-        </p:spPr>
-        <p:txBody>
-          <a:bodyPr wrap="square" lIns="0" tIns="0" rIns="0" bIns="0" rtlCol="0" anchor="ctr"/>
-          <a:lstStyle/>
-          <a:p>
-            <a:pPr algn="ctr" indent="0" marL="0">
+        </p:spPr>
+        <p:txBody>
+          <a:bodyPr wrap="square" lIns="0" tIns="0" rIns="0" bIns="0" rtlCol="0" anchor="ctr"/>
+          <a:lstStyle/>
+          <a:p>
+            <a:pPr marL="0" indent="0" algn="ctr">
               <a:buNone/>
             </a:pPr>
             <a:r>
@@ -10324,13 +10098,12 @@
             <a:avLst/>
           </a:prstGeom>
           <a:noFill/>
-          <a:ln/>
-        </p:spPr>
-        <p:txBody>
-          <a:bodyPr wrap="square" lIns="0" tIns="0" rIns="0" bIns="0" rtlCol="0" anchor="ctr"/>
-          <a:lstStyle/>
-          <a:p>
-            <a:pPr algn="ctr" indent="0" marL="0">
+        </p:spPr>
+        <p:txBody>
+          <a:bodyPr wrap="square" lIns="0" tIns="0" rIns="0" bIns="0" rtlCol="0" anchor="ctr"/>
+          <a:lstStyle/>
+          <a:p>
+            <a:pPr marL="0" indent="0" algn="ctr">
               <a:buNone/>
             </a:pPr>
             <a:r>
@@ -10385,13 +10158,12 @@
             <a:avLst/>
           </a:prstGeom>
           <a:noFill/>
-          <a:ln/>
-        </p:spPr>
-        <p:txBody>
-          <a:bodyPr wrap="square" lIns="0" tIns="0" rIns="0" bIns="0" rtlCol="0" anchor="ctr"/>
-          <a:lstStyle/>
-          <a:p>
-            <a:pPr algn="ctr" indent="0" marL="0">
+        </p:spPr>
+        <p:txBody>
+          <a:bodyPr wrap="square" lIns="0" tIns="0" rIns="0" bIns="0" rtlCol="0" anchor="ctr"/>
+          <a:lstStyle/>
+          <a:p>
+            <a:pPr marL="0" indent="0" algn="ctr">
               <a:buNone/>
             </a:pPr>
             <a:r>
@@ -10446,13 +10218,12 @@
             <a:avLst/>
           </a:prstGeom>
           <a:noFill/>
-          <a:ln/>
-        </p:spPr>
-        <p:txBody>
-          <a:bodyPr wrap="square" lIns="0" tIns="0" rIns="0" bIns="0" rtlCol="0" anchor="ctr"/>
-          <a:lstStyle/>
-          <a:p>
-            <a:pPr algn="ctr" indent="0" marL="0">
+        </p:spPr>
+        <p:txBody>
+          <a:bodyPr wrap="square" lIns="0" tIns="0" rIns="0" bIns="0" rtlCol="0" anchor="ctr"/>
+          <a:lstStyle/>
+          <a:p>
+            <a:pPr marL="0" indent="0" algn="ctr">
               <a:buNone/>
             </a:pPr>
             <a:r>
@@ -10507,13 +10278,12 @@
             <a:avLst/>
           </a:prstGeom>
           <a:noFill/>
-          <a:ln/>
-        </p:spPr>
-        <p:txBody>
-          <a:bodyPr wrap="square" lIns="0" tIns="0" rIns="0" bIns="0" rtlCol="0" anchor="ctr"/>
-          <a:lstStyle/>
-          <a:p>
-            <a:pPr algn="ctr" indent="0" marL="0">
+        </p:spPr>
+        <p:txBody>
+          <a:bodyPr wrap="square" lIns="0" tIns="0" rIns="0" bIns="0" rtlCol="0" anchor="ctr"/>
+          <a:lstStyle/>
+          <a:p>
+            <a:pPr marL="0" indent="0" algn="ctr">
               <a:buNone/>
             </a:pPr>
             <a:r>
@@ -10568,13 +10338,12 @@
             <a:avLst/>
           </a:prstGeom>
           <a:noFill/>
-          <a:ln/>
-        </p:spPr>
-        <p:txBody>
-          <a:bodyPr wrap="square" lIns="0" tIns="0" rIns="0" bIns="0" rtlCol="0" anchor="ctr"/>
-          <a:lstStyle/>
-          <a:p>
-            <a:pPr algn="ctr" indent="0" marL="0">
+        </p:spPr>
+        <p:txBody>
+          <a:bodyPr wrap="square" lIns="0" tIns="0" rIns="0" bIns="0" rtlCol="0" anchor="ctr"/>
+          <a:lstStyle/>
+          <a:p>
+            <a:pPr marL="0" indent="0" algn="ctr">
               <a:buNone/>
             </a:pPr>
             <a:r>
@@ -10629,13 +10398,12 @@
             <a:avLst/>
           </a:prstGeom>
           <a:noFill/>
-          <a:ln/>
-        </p:spPr>
-        <p:txBody>
-          <a:bodyPr wrap="square" lIns="0" tIns="0" rIns="0" bIns="0" rtlCol="0" anchor="ctr"/>
-          <a:lstStyle/>
-          <a:p>
-            <a:pPr algn="ctr" indent="0" marL="0">
+        </p:spPr>
+        <p:txBody>
+          <a:bodyPr wrap="square" lIns="0" tIns="0" rIns="0" bIns="0" rtlCol="0" anchor="ctr"/>
+          <a:lstStyle/>
+          <a:p>
+            <a:pPr marL="0" indent="0" algn="ctr">
               <a:buNone/>
             </a:pPr>
             <a:r>
@@ -10690,13 +10458,12 @@
             <a:avLst/>
           </a:prstGeom>
           <a:noFill/>
-          <a:ln/>
-        </p:spPr>
-        <p:txBody>
-          <a:bodyPr wrap="square" lIns="0" tIns="0" rIns="0" bIns="0" rtlCol="0" anchor="ctr"/>
-          <a:lstStyle/>
-          <a:p>
-            <a:pPr algn="ctr" indent="0" marL="0">
+        </p:spPr>
+        <p:txBody>
+          <a:bodyPr wrap="square" lIns="0" tIns="0" rIns="0" bIns="0" rtlCol="0" anchor="ctr"/>
+          <a:lstStyle/>
+          <a:p>
+            <a:pPr marL="0" indent="0" algn="ctr">
               <a:buNone/>
             </a:pPr>
             <a:r>
@@ -10751,13 +10518,12 @@
             <a:avLst/>
           </a:prstGeom>
           <a:noFill/>
-          <a:ln/>
-        </p:spPr>
-        <p:txBody>
-          <a:bodyPr wrap="square" lIns="0" tIns="0" rIns="0" bIns="0" rtlCol="0" anchor="ctr"/>
-          <a:lstStyle/>
-          <a:p>
-            <a:pPr algn="ctr" indent="0" marL="0">
+        </p:spPr>
+        <p:txBody>
+          <a:bodyPr wrap="square" lIns="0" tIns="0" rIns="0" bIns="0" rtlCol="0" anchor="ctr"/>
+          <a:lstStyle/>
+          <a:p>
+            <a:pPr marL="0" indent="0" algn="ctr">
               <a:buNone/>
             </a:pPr>
             <a:r>
@@ -10812,13 +10578,12 @@
             <a:avLst/>
           </a:prstGeom>
           <a:noFill/>
-          <a:ln/>
-        </p:spPr>
-        <p:txBody>
-          <a:bodyPr wrap="square" lIns="0" tIns="0" rIns="0" bIns="0" rtlCol="0" anchor="ctr"/>
-          <a:lstStyle/>
-          <a:p>
-            <a:pPr algn="ctr" indent="0" marL="0">
+        </p:spPr>
+        <p:txBody>
+          <a:bodyPr wrap="square" lIns="0" tIns="0" rIns="0" bIns="0" rtlCol="0" anchor="ctr"/>
+          <a:lstStyle/>
+          <a:p>
+            <a:pPr marL="0" indent="0" algn="ctr">
               <a:buNone/>
             </a:pPr>
             <a:r>
@@ -10873,13 +10638,12 @@
             <a:avLst/>
           </a:prstGeom>
           <a:noFill/>
-          <a:ln/>
-        </p:spPr>
-        <p:txBody>
-          <a:bodyPr wrap="square" lIns="0" tIns="0" rIns="0" bIns="0" rtlCol="0" anchor="ctr"/>
-          <a:lstStyle/>
-          <a:p>
-            <a:pPr algn="ctr" indent="0" marL="0">
+        </p:spPr>
+        <p:txBody>
+          <a:bodyPr wrap="square" lIns="0" tIns="0" rIns="0" bIns="0" rtlCol="0" anchor="ctr"/>
+          <a:lstStyle/>
+          <a:p>
+            <a:pPr marL="0" indent="0" algn="ctr">
               <a:buNone/>
             </a:pPr>
             <a:r>
@@ -10934,13 +10698,12 @@
             <a:avLst/>
           </a:prstGeom>
           <a:noFill/>
-          <a:ln/>
-        </p:spPr>
-        <p:txBody>
-          <a:bodyPr wrap="square" lIns="0" tIns="0" rIns="0" bIns="0" rtlCol="0" anchor="ctr"/>
-          <a:lstStyle/>
-          <a:p>
-            <a:pPr algn="ctr" indent="0" marL="0">
+        </p:spPr>
+        <p:txBody>
+          <a:bodyPr wrap="square" lIns="0" tIns="0" rIns="0" bIns="0" rtlCol="0" anchor="ctr"/>
+          <a:lstStyle/>
+          <a:p>
+            <a:pPr marL="0" indent="0" algn="ctr">
               <a:buNone/>
             </a:pPr>
             <a:r>
@@ -10995,13 +10758,12 @@
             <a:avLst/>
           </a:prstGeom>
           <a:noFill/>
-          <a:ln/>
-        </p:spPr>
-        <p:txBody>
-          <a:bodyPr wrap="square" lIns="0" tIns="0" rIns="0" bIns="0" rtlCol="0" anchor="ctr"/>
-          <a:lstStyle/>
-          <a:p>
-            <a:pPr algn="ctr" indent="0" marL="0">
+        </p:spPr>
+        <p:txBody>
+          <a:bodyPr wrap="square" lIns="0" tIns="0" rIns="0" bIns="0" rtlCol="0" anchor="ctr"/>
+          <a:lstStyle/>
+          <a:p>
+            <a:pPr marL="0" indent="0" algn="ctr">
               <a:buNone/>
             </a:pPr>
             <a:r>
@@ -11056,13 +10818,12 @@
             <a:avLst/>
           </a:prstGeom>
           <a:noFill/>
-          <a:ln/>
-        </p:spPr>
-        <p:txBody>
-          <a:bodyPr wrap="square" lIns="0" tIns="0" rIns="0" bIns="0" rtlCol="0" anchor="ctr"/>
-          <a:lstStyle/>
-          <a:p>
-            <a:pPr algn="ctr" indent="0" marL="0">
+        </p:spPr>
+        <p:txBody>
+          <a:bodyPr wrap="square" lIns="0" tIns="0" rIns="0" bIns="0" rtlCol="0" anchor="ctr"/>
+          <a:lstStyle/>
+          <a:p>
+            <a:pPr marL="0" indent="0" algn="ctr">
               <a:buNone/>
             </a:pPr>
             <a:r>
@@ -11117,13 +10878,12 @@
             <a:avLst/>
           </a:prstGeom>
           <a:noFill/>
-          <a:ln/>
-        </p:spPr>
-        <p:txBody>
-          <a:bodyPr wrap="square" lIns="0" tIns="0" rIns="0" bIns="0" rtlCol="0" anchor="ctr"/>
-          <a:lstStyle/>
-          <a:p>
-            <a:pPr algn="ctr" indent="0" marL="0">
+        </p:spPr>
+        <p:txBody>
+          <a:bodyPr wrap="square" lIns="0" tIns="0" rIns="0" bIns="0" rtlCol="0" anchor="ctr"/>
+          <a:lstStyle/>
+          <a:p>
+            <a:pPr marL="0" indent="0" algn="ctr">
               <a:buNone/>
             </a:pPr>
             <a:r>
@@ -11178,13 +10938,12 @@
             <a:avLst/>
           </a:prstGeom>
           <a:noFill/>
-          <a:ln/>
-        </p:spPr>
-        <p:txBody>
-          <a:bodyPr wrap="square" lIns="0" tIns="0" rIns="0" bIns="0" rtlCol="0" anchor="ctr"/>
-          <a:lstStyle/>
-          <a:p>
-            <a:pPr algn="ctr" indent="0" marL="0">
+        </p:spPr>
+        <p:txBody>
+          <a:bodyPr wrap="square" lIns="0" tIns="0" rIns="0" bIns="0" rtlCol="0" anchor="ctr"/>
+          <a:lstStyle/>
+          <a:p>
+            <a:pPr marL="0" indent="0" algn="ctr">
               <a:buNone/>
             </a:pPr>
             <a:r>
@@ -11239,13 +10998,12 @@
             <a:avLst/>
           </a:prstGeom>
           <a:noFill/>
-          <a:ln/>
-        </p:spPr>
-        <p:txBody>
-          <a:bodyPr wrap="square" lIns="0" tIns="0" rIns="0" bIns="0" rtlCol="0" anchor="ctr"/>
-          <a:lstStyle/>
-          <a:p>
-            <a:pPr algn="ctr" indent="0" marL="0">
+        </p:spPr>
+        <p:txBody>
+          <a:bodyPr wrap="square" lIns="0" tIns="0" rIns="0" bIns="0" rtlCol="0" anchor="ctr"/>
+          <a:lstStyle/>
+          <a:p>
+            <a:pPr marL="0" indent="0" algn="ctr">
               <a:buNone/>
             </a:pPr>
             <a:r>
@@ -11300,13 +11058,12 @@
             <a:avLst/>
           </a:prstGeom>
           <a:noFill/>
-          <a:ln/>
-        </p:spPr>
-        <p:txBody>
-          <a:bodyPr wrap="square" lIns="0" tIns="0" rIns="0" bIns="0" rtlCol="0" anchor="ctr"/>
-          <a:lstStyle/>
-          <a:p>
-            <a:pPr algn="ctr" indent="0" marL="0">
+        </p:spPr>
+        <p:txBody>
+          <a:bodyPr wrap="square" lIns="0" tIns="0" rIns="0" bIns="0" rtlCol="0" anchor="ctr"/>
+          <a:lstStyle/>
+          <a:p>
+            <a:pPr marL="0" indent="0" algn="ctr">
               <a:buNone/>
             </a:pPr>
             <a:r>
@@ -11361,13 +11118,12 @@
             <a:avLst/>
           </a:prstGeom>
           <a:noFill/>
-          <a:ln/>
-        </p:spPr>
-        <p:txBody>
-          <a:bodyPr wrap="square" lIns="0" tIns="0" rIns="0" bIns="0" rtlCol="0" anchor="ctr"/>
-          <a:lstStyle/>
-          <a:p>
-            <a:pPr algn="ctr" indent="0" marL="0">
+        </p:spPr>
+        <p:txBody>
+          <a:bodyPr wrap="square" lIns="0" tIns="0" rIns="0" bIns="0" rtlCol="0" anchor="ctr"/>
+          <a:lstStyle/>
+          <a:p>
+            <a:pPr marL="0" indent="0" algn="ctr">
               <a:buNone/>
             </a:pPr>
             <a:r>
@@ -11422,13 +11178,12 @@
             <a:avLst/>
           </a:prstGeom>
           <a:noFill/>
-          <a:ln/>
-        </p:spPr>
-        <p:txBody>
-          <a:bodyPr wrap="square" lIns="0" tIns="0" rIns="0" bIns="0" rtlCol="0" anchor="ctr"/>
-          <a:lstStyle/>
-          <a:p>
-            <a:pPr algn="ctr" indent="0" marL="0">
+        </p:spPr>
+        <p:txBody>
+          <a:bodyPr wrap="square" lIns="0" tIns="0" rIns="0" bIns="0" rtlCol="0" anchor="ctr"/>
+          <a:lstStyle/>
+          <a:p>
+            <a:pPr marL="0" indent="0" algn="ctr">
               <a:buNone/>
             </a:pPr>
             <a:r>
@@ -11483,13 +11238,12 @@
             <a:avLst/>
           </a:prstGeom>
           <a:noFill/>
-          <a:ln/>
-        </p:spPr>
-        <p:txBody>
-          <a:bodyPr wrap="square" lIns="0" tIns="0" rIns="0" bIns="0" rtlCol="0" anchor="ctr"/>
-          <a:lstStyle/>
-          <a:p>
-            <a:pPr algn="ctr" indent="0" marL="0">
+        </p:spPr>
+        <p:txBody>
+          <a:bodyPr wrap="square" lIns="0" tIns="0" rIns="0" bIns="0" rtlCol="0" anchor="ctr"/>
+          <a:lstStyle/>
+          <a:p>
+            <a:pPr marL="0" indent="0" algn="ctr">
               <a:buNone/>
             </a:pPr>
             <a:r>
@@ -11544,13 +11298,12 @@
             <a:avLst/>
           </a:prstGeom>
           <a:noFill/>
-          <a:ln/>
-        </p:spPr>
-        <p:txBody>
-          <a:bodyPr wrap="square" lIns="0" tIns="0" rIns="0" bIns="0" rtlCol="0" anchor="ctr"/>
-          <a:lstStyle/>
-          <a:p>
-            <a:pPr algn="ctr" indent="0" marL="0">
+        </p:spPr>
+        <p:txBody>
+          <a:bodyPr wrap="square" lIns="0" tIns="0" rIns="0" bIns="0" rtlCol="0" anchor="ctr"/>
+          <a:lstStyle/>
+          <a:p>
+            <a:pPr marL="0" indent="0" algn="ctr">
               <a:buNone/>
             </a:pPr>
             <a:r>
@@ -11605,13 +11358,12 @@
             <a:avLst/>
           </a:prstGeom>
           <a:noFill/>
-          <a:ln/>
-        </p:spPr>
-        <p:txBody>
-          <a:bodyPr wrap="square" lIns="0" tIns="0" rIns="0" bIns="0" rtlCol="0" anchor="ctr"/>
-          <a:lstStyle/>
-          <a:p>
-            <a:pPr algn="ctr" indent="0" marL="0">
+        </p:spPr>
+        <p:txBody>
+          <a:bodyPr wrap="square" lIns="0" tIns="0" rIns="0" bIns="0" rtlCol="0" anchor="ctr"/>
+          <a:lstStyle/>
+          <a:p>
+            <a:pPr marL="0" indent="0" algn="ctr">
               <a:buNone/>
             </a:pPr>
             <a:r>
@@ -11666,13 +11418,12 @@
             <a:avLst/>
           </a:prstGeom>
           <a:noFill/>
-          <a:ln/>
-        </p:spPr>
-        <p:txBody>
-          <a:bodyPr wrap="square" lIns="0" tIns="0" rIns="0" bIns="0" rtlCol="0" anchor="ctr"/>
-          <a:lstStyle/>
-          <a:p>
-            <a:pPr algn="ctr" indent="0" marL="0">
+        </p:spPr>
+        <p:txBody>
+          <a:bodyPr wrap="square" lIns="0" tIns="0" rIns="0" bIns="0" rtlCol="0" anchor="ctr"/>
+          <a:lstStyle/>
+          <a:p>
+            <a:pPr marL="0" indent="0" algn="ctr">
               <a:buNone/>
             </a:pPr>
             <a:r>
@@ -11727,13 +11478,12 @@
             <a:avLst/>
           </a:prstGeom>
           <a:noFill/>
-          <a:ln/>
-        </p:spPr>
-        <p:txBody>
-          <a:bodyPr wrap="square" lIns="0" tIns="0" rIns="0" bIns="0" rtlCol="0" anchor="ctr"/>
-          <a:lstStyle/>
-          <a:p>
-            <a:pPr algn="ctr" indent="0" marL="0">
+        </p:spPr>
+        <p:txBody>
+          <a:bodyPr wrap="square" lIns="0" tIns="0" rIns="0" bIns="0" rtlCol="0" anchor="ctr"/>
+          <a:lstStyle/>
+          <a:p>
+            <a:pPr marL="0" indent="0" algn="ctr">
               <a:buNone/>
             </a:pPr>
             <a:r>
@@ -11788,13 +11538,12 @@
             <a:avLst/>
           </a:prstGeom>
           <a:noFill/>
-          <a:ln/>
-        </p:spPr>
-        <p:txBody>
-          <a:bodyPr wrap="square" lIns="0" tIns="0" rIns="0" bIns="0" rtlCol="0" anchor="ctr"/>
-          <a:lstStyle/>
-          <a:p>
-            <a:pPr algn="ctr" indent="0" marL="0">
+        </p:spPr>
+        <p:txBody>
+          <a:bodyPr wrap="square" lIns="0" tIns="0" rIns="0" bIns="0" rtlCol="0" anchor="ctr"/>
+          <a:lstStyle/>
+          <a:p>
+            <a:pPr marL="0" indent="0" algn="ctr">
               <a:buNone/>
             </a:pPr>
             <a:r>
@@ -11849,13 +11598,12 @@
             <a:avLst/>
           </a:prstGeom>
           <a:noFill/>
-          <a:ln/>
-        </p:spPr>
-        <p:txBody>
-          <a:bodyPr wrap="square" lIns="0" tIns="0" rIns="0" bIns="0" rtlCol="0" anchor="ctr"/>
-          <a:lstStyle/>
-          <a:p>
-            <a:pPr algn="ctr" indent="0" marL="0">
+        </p:spPr>
+        <p:txBody>
+          <a:bodyPr wrap="square" lIns="0" tIns="0" rIns="0" bIns="0" rtlCol="0" anchor="ctr"/>
+          <a:lstStyle/>
+          <a:p>
+            <a:pPr marL="0" indent="0" algn="ctr">
               <a:buNone/>
             </a:pPr>
             <a:r>
@@ -11910,13 +11658,12 @@
             <a:avLst/>
           </a:prstGeom>
           <a:noFill/>
-          <a:ln/>
-        </p:spPr>
-        <p:txBody>
-          <a:bodyPr wrap="square" lIns="0" tIns="0" rIns="0" bIns="0" rtlCol="0" anchor="ctr"/>
-          <a:lstStyle/>
-          <a:p>
-            <a:pPr algn="ctr" indent="0" marL="0">
+        </p:spPr>
+        <p:txBody>
+          <a:bodyPr wrap="square" lIns="0" tIns="0" rIns="0" bIns="0" rtlCol="0" anchor="ctr"/>
+          <a:lstStyle/>
+          <a:p>
+            <a:pPr marL="0" indent="0" algn="ctr">
               <a:buNone/>
             </a:pPr>
             <a:r>
@@ -11971,13 +11718,12 @@
             <a:avLst/>
           </a:prstGeom>
           <a:noFill/>
-          <a:ln/>
-        </p:spPr>
-        <p:txBody>
-          <a:bodyPr wrap="square" lIns="0" tIns="0" rIns="0" bIns="0" rtlCol="0" anchor="ctr"/>
-          <a:lstStyle/>
-          <a:p>
-            <a:pPr algn="ctr" indent="0" marL="0">
+        </p:spPr>
+        <p:txBody>
+          <a:bodyPr wrap="square" lIns="0" tIns="0" rIns="0" bIns="0" rtlCol="0" anchor="ctr"/>
+          <a:lstStyle/>
+          <a:p>
+            <a:pPr marL="0" indent="0" algn="ctr">
               <a:buNone/>
             </a:pPr>
             <a:r>
@@ -12032,13 +11778,12 @@
             <a:avLst/>
           </a:prstGeom>
           <a:noFill/>
-          <a:ln/>
-        </p:spPr>
-        <p:txBody>
-          <a:bodyPr wrap="square" lIns="0" tIns="0" rIns="0" bIns="0" rtlCol="0" anchor="ctr"/>
-          <a:lstStyle/>
-          <a:p>
-            <a:pPr algn="ctr" indent="0" marL="0">
+        </p:spPr>
+        <p:txBody>
+          <a:bodyPr wrap="square" lIns="0" tIns="0" rIns="0" bIns="0" rtlCol="0" anchor="ctr"/>
+          <a:lstStyle/>
+          <a:p>
+            <a:pPr marL="0" indent="0" algn="ctr">
               <a:buNone/>
             </a:pPr>
             <a:r>
@@ -12093,13 +11838,12 @@
             <a:avLst/>
           </a:prstGeom>
           <a:noFill/>
-          <a:ln/>
-        </p:spPr>
-        <p:txBody>
-          <a:bodyPr wrap="square" lIns="0" tIns="0" rIns="0" bIns="0" rtlCol="0" anchor="ctr"/>
-          <a:lstStyle/>
-          <a:p>
-            <a:pPr algn="ctr" indent="0" marL="0">
+        </p:spPr>
+        <p:txBody>
+          <a:bodyPr wrap="square" lIns="0" tIns="0" rIns="0" bIns="0" rtlCol="0" anchor="ctr"/>
+          <a:lstStyle/>
+          <a:p>
+            <a:pPr marL="0" indent="0" algn="ctr">
               <a:buNone/>
             </a:pPr>
             <a:r>
@@ -12154,13 +11898,12 @@
             <a:avLst/>
           </a:prstGeom>
           <a:noFill/>
-          <a:ln/>
-        </p:spPr>
-        <p:txBody>
-          <a:bodyPr wrap="square" lIns="0" tIns="0" rIns="0" bIns="0" rtlCol="0" anchor="ctr"/>
-          <a:lstStyle/>
-          <a:p>
-            <a:pPr algn="ctr" indent="0" marL="0">
+        </p:spPr>
+        <p:txBody>
+          <a:bodyPr wrap="square" lIns="0" tIns="0" rIns="0" bIns="0" rtlCol="0" anchor="ctr"/>
+          <a:lstStyle/>
+          <a:p>
+            <a:pPr marL="0" indent="0" algn="ctr">
               <a:buNone/>
             </a:pPr>
             <a:r>
@@ -12215,13 +11958,12 @@
             <a:avLst/>
           </a:prstGeom>
           <a:noFill/>
-          <a:ln/>
-        </p:spPr>
-        <p:txBody>
-          <a:bodyPr wrap="square" lIns="0" tIns="0" rIns="0" bIns="0" rtlCol="0" anchor="ctr"/>
-          <a:lstStyle/>
-          <a:p>
-            <a:pPr algn="ctr" indent="0" marL="0">
+        </p:spPr>
+        <p:txBody>
+          <a:bodyPr wrap="square" lIns="0" tIns="0" rIns="0" bIns="0" rtlCol="0" anchor="ctr"/>
+          <a:lstStyle/>
+          <a:p>
+            <a:pPr marL="0" indent="0" algn="ctr">
               <a:buNone/>
             </a:pPr>
             <a:r>
@@ -12276,13 +12018,12 @@
             <a:avLst/>
           </a:prstGeom>
           <a:noFill/>
-          <a:ln/>
-        </p:spPr>
-        <p:txBody>
-          <a:bodyPr wrap="square" lIns="0" tIns="0" rIns="0" bIns="0" rtlCol="0" anchor="ctr"/>
-          <a:lstStyle/>
-          <a:p>
-            <a:pPr algn="ctr" indent="0" marL="0">
+        </p:spPr>
+        <p:txBody>
+          <a:bodyPr wrap="square" lIns="0" tIns="0" rIns="0" bIns="0" rtlCol="0" anchor="ctr"/>
+          <a:lstStyle/>
+          <a:p>
+            <a:pPr marL="0" indent="0" algn="ctr">
               <a:buNone/>
             </a:pPr>
             <a:r>
@@ -12337,13 +12078,12 @@
             <a:avLst/>
           </a:prstGeom>
           <a:noFill/>
-          <a:ln/>
-        </p:spPr>
-        <p:txBody>
-          <a:bodyPr wrap="square" lIns="0" tIns="0" rIns="0" bIns="0" rtlCol="0" anchor="ctr"/>
-          <a:lstStyle/>
-          <a:p>
-            <a:pPr algn="ctr" indent="0" marL="0">
+        </p:spPr>
+        <p:txBody>
+          <a:bodyPr wrap="square" lIns="0" tIns="0" rIns="0" bIns="0" rtlCol="0" anchor="ctr"/>
+          <a:lstStyle/>
+          <a:p>
+            <a:pPr marL="0" indent="0" algn="ctr">
               <a:buNone/>
             </a:pPr>
             <a:r>
@@ -12398,13 +12138,12 @@
             <a:avLst/>
           </a:prstGeom>
           <a:noFill/>
-          <a:ln/>
-        </p:spPr>
-        <p:txBody>
-          <a:bodyPr wrap="square" lIns="0" tIns="0" rIns="0" bIns="0" rtlCol="0" anchor="ctr"/>
-          <a:lstStyle/>
-          <a:p>
-            <a:pPr algn="ctr" indent="0" marL="0">
+        </p:spPr>
+        <p:txBody>
+          <a:bodyPr wrap="square" lIns="0" tIns="0" rIns="0" bIns="0" rtlCol="0" anchor="ctr"/>
+          <a:lstStyle/>
+          <a:p>
+            <a:pPr marL="0" indent="0" algn="ctr">
               <a:buNone/>
             </a:pPr>
             <a:r>
@@ -12459,13 +12198,12 @@
             <a:avLst/>
           </a:prstGeom>
           <a:noFill/>
-          <a:ln/>
-        </p:spPr>
-        <p:txBody>
-          <a:bodyPr wrap="square" lIns="0" tIns="0" rIns="0" bIns="0" rtlCol="0" anchor="ctr"/>
-          <a:lstStyle/>
-          <a:p>
-            <a:pPr algn="ctr" indent="0" marL="0">
+        </p:spPr>
+        <p:txBody>
+          <a:bodyPr wrap="square" lIns="0" tIns="0" rIns="0" bIns="0" rtlCol="0" anchor="ctr"/>
+          <a:lstStyle/>
+          <a:p>
+            <a:pPr marL="0" indent="0" algn="ctr">
               <a:buNone/>
             </a:pPr>
             <a:r>
@@ -12520,13 +12258,12 @@
             <a:avLst/>
           </a:prstGeom>
           <a:noFill/>
-          <a:ln/>
-        </p:spPr>
-        <p:txBody>
-          <a:bodyPr wrap="square" lIns="0" tIns="0" rIns="0" bIns="0" rtlCol="0" anchor="ctr"/>
-          <a:lstStyle/>
-          <a:p>
-            <a:pPr algn="ctr" indent="0" marL="0">
+        </p:spPr>
+        <p:txBody>
+          <a:bodyPr wrap="square" lIns="0" tIns="0" rIns="0" bIns="0" rtlCol="0" anchor="ctr"/>
+          <a:lstStyle/>
+          <a:p>
+            <a:pPr marL="0" indent="0" algn="ctr">
               <a:buNone/>
             </a:pPr>
             <a:r>
@@ -12581,13 +12318,12 @@
             <a:avLst/>
           </a:prstGeom>
           <a:noFill/>
-          <a:ln/>
-        </p:spPr>
-        <p:txBody>
-          <a:bodyPr wrap="square" lIns="0" tIns="0" rIns="0" bIns="0" rtlCol="0" anchor="ctr"/>
-          <a:lstStyle/>
-          <a:p>
-            <a:pPr algn="ctr" indent="0" marL="0">
+        </p:spPr>
+        <p:txBody>
+          <a:bodyPr wrap="square" lIns="0" tIns="0" rIns="0" bIns="0" rtlCol="0" anchor="ctr"/>
+          <a:lstStyle/>
+          <a:p>
+            <a:pPr marL="0" indent="0" algn="ctr">
               <a:buNone/>
             </a:pPr>
             <a:r>
@@ -12642,13 +12378,12 @@
             <a:avLst/>
           </a:prstGeom>
           <a:noFill/>
-          <a:ln/>
-        </p:spPr>
-        <p:txBody>
-          <a:bodyPr wrap="square" lIns="0" tIns="0" rIns="0" bIns="0" rtlCol="0" anchor="ctr"/>
-          <a:lstStyle/>
-          <a:p>
-            <a:pPr algn="ctr" indent="0" marL="0">
+        </p:spPr>
+        <p:txBody>
+          <a:bodyPr wrap="square" lIns="0" tIns="0" rIns="0" bIns="0" rtlCol="0" anchor="ctr"/>
+          <a:lstStyle/>
+          <a:p>
+            <a:pPr marL="0" indent="0" algn="ctr">
               <a:buNone/>
             </a:pPr>
             <a:r>
@@ -12703,13 +12438,12 @@
             <a:avLst/>
           </a:prstGeom>
           <a:noFill/>
-          <a:ln/>
-        </p:spPr>
-        <p:txBody>
-          <a:bodyPr wrap="square" lIns="0" tIns="0" rIns="0" bIns="0" rtlCol="0" anchor="ctr"/>
-          <a:lstStyle/>
-          <a:p>
-            <a:pPr algn="ctr" indent="0" marL="0">
+        </p:spPr>
+        <p:txBody>
+          <a:bodyPr wrap="square" lIns="0" tIns="0" rIns="0" bIns="0" rtlCol="0" anchor="ctr"/>
+          <a:lstStyle/>
+          <a:p>
+            <a:pPr marL="0" indent="0" algn="ctr">
               <a:buNone/>
             </a:pPr>
             <a:r>
@@ -12764,13 +12498,12 @@
             <a:avLst/>
           </a:prstGeom>
           <a:noFill/>
-          <a:ln/>
-        </p:spPr>
-        <p:txBody>
-          <a:bodyPr wrap="square" lIns="0" tIns="0" rIns="0" bIns="0" rtlCol="0" anchor="ctr"/>
-          <a:lstStyle/>
-          <a:p>
-            <a:pPr algn="ctr" indent="0" marL="0">
+        </p:spPr>
+        <p:txBody>
+          <a:bodyPr wrap="square" lIns="0" tIns="0" rIns="0" bIns="0" rtlCol="0" anchor="ctr"/>
+          <a:lstStyle/>
+          <a:p>
+            <a:pPr marL="0" indent="0" algn="ctr">
               <a:buNone/>
             </a:pPr>
             <a:r>
@@ -12825,13 +12558,12 @@
             <a:avLst/>
           </a:prstGeom>
           <a:noFill/>
-          <a:ln/>
-        </p:spPr>
-        <p:txBody>
-          <a:bodyPr wrap="square" lIns="0" tIns="0" rIns="0" bIns="0" rtlCol="0" anchor="ctr"/>
-          <a:lstStyle/>
-          <a:p>
-            <a:pPr algn="ctr" indent="0" marL="0">
+        </p:spPr>
+        <p:txBody>
+          <a:bodyPr wrap="square" lIns="0" tIns="0" rIns="0" bIns="0" rtlCol="0" anchor="ctr"/>
+          <a:lstStyle/>
+          <a:p>
+            <a:pPr marL="0" indent="0" algn="ctr">
               <a:buNone/>
             </a:pPr>
             <a:r>
@@ -12886,13 +12618,12 @@
             <a:avLst/>
           </a:prstGeom>
           <a:noFill/>
-          <a:ln/>
-        </p:spPr>
-        <p:txBody>
-          <a:bodyPr wrap="square" lIns="0" tIns="0" rIns="0" bIns="0" rtlCol="0" anchor="ctr"/>
-          <a:lstStyle/>
-          <a:p>
-            <a:pPr algn="ctr" indent="0" marL="0">
+        </p:spPr>
+        <p:txBody>
+          <a:bodyPr wrap="square" lIns="0" tIns="0" rIns="0" bIns="0" rtlCol="0" anchor="ctr"/>
+          <a:lstStyle/>
+          <a:p>
+            <a:pPr marL="0" indent="0" algn="ctr">
               <a:buNone/>
             </a:pPr>
             <a:r>
@@ -12947,13 +12678,12 @@
             <a:avLst/>
           </a:prstGeom>
           <a:noFill/>
-          <a:ln/>
-        </p:spPr>
-        <p:txBody>
-          <a:bodyPr wrap="square" lIns="0" tIns="0" rIns="0" bIns="0" rtlCol="0" anchor="ctr"/>
-          <a:lstStyle/>
-          <a:p>
-            <a:pPr algn="ctr" indent="0" marL="0">
+        </p:spPr>
+        <p:txBody>
+          <a:bodyPr wrap="square" lIns="0" tIns="0" rIns="0" bIns="0" rtlCol="0" anchor="ctr"/>
+          <a:lstStyle/>
+          <a:p>
+            <a:pPr marL="0" indent="0" algn="ctr">
               <a:buNone/>
             </a:pPr>
             <a:r>
@@ -13008,13 +12738,12 @@
             <a:avLst/>
           </a:prstGeom>
           <a:noFill/>
-          <a:ln/>
-        </p:spPr>
-        <p:txBody>
-          <a:bodyPr wrap="square" lIns="0" tIns="0" rIns="0" bIns="0" rtlCol="0" anchor="ctr"/>
-          <a:lstStyle/>
-          <a:p>
-            <a:pPr algn="ctr" indent="0" marL="0">
+        </p:spPr>
+        <p:txBody>
+          <a:bodyPr wrap="square" lIns="0" tIns="0" rIns="0" bIns="0" rtlCol="0" anchor="ctr"/>
+          <a:lstStyle/>
+          <a:p>
+            <a:pPr marL="0" indent="0" algn="ctr">
               <a:buNone/>
             </a:pPr>
             <a:r>
@@ -13069,13 +12798,12 @@
             <a:avLst/>
           </a:prstGeom>
           <a:noFill/>
-          <a:ln/>
-        </p:spPr>
-        <p:txBody>
-          <a:bodyPr wrap="square" lIns="0" tIns="0" rIns="0" bIns="0" rtlCol="0" anchor="ctr"/>
-          <a:lstStyle/>
-          <a:p>
-            <a:pPr algn="ctr" indent="0" marL="0">
+        </p:spPr>
+        <p:txBody>
+          <a:bodyPr wrap="square" lIns="0" tIns="0" rIns="0" bIns="0" rtlCol="0" anchor="ctr"/>
+          <a:lstStyle/>
+          <a:p>
+            <a:pPr marL="0" indent="0" algn="ctr">
               <a:buNone/>
             </a:pPr>
             <a:r>
@@ -13130,13 +12858,12 @@
             <a:avLst/>
           </a:prstGeom>
           <a:noFill/>
-          <a:ln/>
-        </p:spPr>
-        <p:txBody>
-          <a:bodyPr wrap="square" lIns="0" tIns="0" rIns="0" bIns="0" rtlCol="0" anchor="ctr"/>
-          <a:lstStyle/>
-          <a:p>
-            <a:pPr algn="ctr" indent="0" marL="0">
+        </p:spPr>
+        <p:txBody>
+          <a:bodyPr wrap="square" lIns="0" tIns="0" rIns="0" bIns="0" rtlCol="0" anchor="ctr"/>
+          <a:lstStyle/>
+          <a:p>
+            <a:pPr marL="0" indent="0" algn="ctr">
               <a:buNone/>
             </a:pPr>
             <a:r>
@@ -13191,13 +12918,12 @@
             <a:avLst/>
           </a:prstGeom>
           <a:noFill/>
-          <a:ln/>
-        </p:spPr>
-        <p:txBody>
-          <a:bodyPr wrap="square" lIns="0" tIns="0" rIns="0" bIns="0" rtlCol="0" anchor="ctr"/>
-          <a:lstStyle/>
-          <a:p>
-            <a:pPr algn="ctr" indent="0" marL="0">
+        </p:spPr>
+        <p:txBody>
+          <a:bodyPr wrap="square" lIns="0" tIns="0" rIns="0" bIns="0" rtlCol="0" anchor="ctr"/>
+          <a:lstStyle/>
+          <a:p>
+            <a:pPr marL="0" indent="0" algn="ctr">
               <a:buNone/>
             </a:pPr>
             <a:r>
@@ -13252,13 +12978,12 @@
             <a:avLst/>
           </a:prstGeom>
           <a:noFill/>
-          <a:ln/>
-        </p:spPr>
-        <p:txBody>
-          <a:bodyPr wrap="square" lIns="0" tIns="0" rIns="0" bIns="0" rtlCol="0" anchor="ctr"/>
-          <a:lstStyle/>
-          <a:p>
-            <a:pPr algn="ctr" indent="0" marL="0">
+        </p:spPr>
+        <p:txBody>
+          <a:bodyPr wrap="square" lIns="0" tIns="0" rIns="0" bIns="0" rtlCol="0" anchor="ctr"/>
+          <a:lstStyle/>
+          <a:p>
+            <a:pPr marL="0" indent="0" algn="ctr">
               <a:buNone/>
             </a:pPr>
             <a:r>
@@ -13313,13 +13038,12 @@
             <a:avLst/>
           </a:prstGeom>
           <a:noFill/>
-          <a:ln/>
-        </p:spPr>
-        <p:txBody>
-          <a:bodyPr wrap="square" lIns="0" tIns="0" rIns="0" bIns="0" rtlCol="0" anchor="ctr"/>
-          <a:lstStyle/>
-          <a:p>
-            <a:pPr algn="ctr" indent="0" marL="0">
+        </p:spPr>
+        <p:txBody>
+          <a:bodyPr wrap="square" lIns="0" tIns="0" rIns="0" bIns="0" rtlCol="0" anchor="ctr"/>
+          <a:lstStyle/>
+          <a:p>
+            <a:pPr marL="0" indent="0" algn="ctr">
               <a:buNone/>
             </a:pPr>
             <a:r>
@@ -13374,13 +13098,12 @@
             <a:avLst/>
           </a:prstGeom>
           <a:noFill/>
-          <a:ln/>
-        </p:spPr>
-        <p:txBody>
-          <a:bodyPr wrap="square" lIns="0" tIns="0" rIns="0" bIns="0" rtlCol="0" anchor="ctr"/>
-          <a:lstStyle/>
-          <a:p>
-            <a:pPr algn="ctr" indent="0" marL="0">
+        </p:spPr>
+        <p:txBody>
+          <a:bodyPr wrap="square" lIns="0" tIns="0" rIns="0" bIns="0" rtlCol="0" anchor="ctr"/>
+          <a:lstStyle/>
+          <a:p>
+            <a:pPr marL="0" indent="0" algn="ctr">
               <a:buNone/>
             </a:pPr>
             <a:r>
@@ -13435,13 +13158,12 @@
             <a:avLst/>
           </a:prstGeom>
           <a:noFill/>
-          <a:ln/>
-        </p:spPr>
-        <p:txBody>
-          <a:bodyPr wrap="square" lIns="0" tIns="0" rIns="0" bIns="0" rtlCol="0" anchor="ctr"/>
-          <a:lstStyle/>
-          <a:p>
-            <a:pPr algn="ctr" indent="0" marL="0">
+        </p:spPr>
+        <p:txBody>
+          <a:bodyPr wrap="square" lIns="0" tIns="0" rIns="0" bIns="0" rtlCol="0" anchor="ctr"/>
+          <a:lstStyle/>
+          <a:p>
+            <a:pPr marL="0" indent="0" algn="ctr">
               <a:buNone/>
             </a:pPr>
             <a:r>
@@ -13496,13 +13218,12 @@
             <a:avLst/>
           </a:prstGeom>
           <a:noFill/>
-          <a:ln/>
-        </p:spPr>
-        <p:txBody>
-          <a:bodyPr wrap="square" lIns="0" tIns="0" rIns="0" bIns="0" rtlCol="0" anchor="ctr"/>
-          <a:lstStyle/>
-          <a:p>
-            <a:pPr algn="ctr" indent="0" marL="0">
+        </p:spPr>
+        <p:txBody>
+          <a:bodyPr wrap="square" lIns="0" tIns="0" rIns="0" bIns="0" rtlCol="0" anchor="ctr"/>
+          <a:lstStyle/>
+          <a:p>
+            <a:pPr marL="0" indent="0" algn="ctr">
               <a:buNone/>
             </a:pPr>
             <a:r>
@@ -13557,13 +13278,12 @@
             <a:avLst/>
           </a:prstGeom>
           <a:noFill/>
-          <a:ln/>
-        </p:spPr>
-        <p:txBody>
-          <a:bodyPr wrap="square" lIns="0" tIns="0" rIns="0" bIns="0" rtlCol="0" anchor="ctr"/>
-          <a:lstStyle/>
-          <a:p>
-            <a:pPr algn="ctr" indent="0" marL="0">
+        </p:spPr>
+        <p:txBody>
+          <a:bodyPr wrap="square" lIns="0" tIns="0" rIns="0" bIns="0" rtlCol="0" anchor="ctr"/>
+          <a:lstStyle/>
+          <a:p>
+            <a:pPr marL="0" indent="0" algn="ctr">
               <a:buNone/>
             </a:pPr>
             <a:r>
@@ -13618,13 +13338,12 @@
             <a:avLst/>
           </a:prstGeom>
           <a:noFill/>
-          <a:ln/>
-        </p:spPr>
-        <p:txBody>
-          <a:bodyPr wrap="square" lIns="0" tIns="0" rIns="0" bIns="0" rtlCol="0" anchor="ctr"/>
-          <a:lstStyle/>
-          <a:p>
-            <a:pPr algn="ctr" indent="0" marL="0">
+        </p:spPr>
+        <p:txBody>
+          <a:bodyPr wrap="square" lIns="0" tIns="0" rIns="0" bIns="0" rtlCol="0" anchor="ctr"/>
+          <a:lstStyle/>
+          <a:p>
+            <a:pPr marL="0" indent="0" algn="ctr">
               <a:buNone/>
             </a:pPr>
             <a:r>
@@ -13679,13 +13398,12 @@
             <a:avLst/>
           </a:prstGeom>
           <a:noFill/>
-          <a:ln/>
-        </p:spPr>
-        <p:txBody>
-          <a:bodyPr wrap="square" lIns="0" tIns="0" rIns="0" bIns="0" rtlCol="0" anchor="ctr"/>
-          <a:lstStyle/>
-          <a:p>
-            <a:pPr algn="ctr" indent="0" marL="0">
+        </p:spPr>
+        <p:txBody>
+          <a:bodyPr wrap="square" lIns="0" tIns="0" rIns="0" bIns="0" rtlCol="0" anchor="ctr"/>
+          <a:lstStyle/>
+          <a:p>
+            <a:pPr marL="0" indent="0" algn="ctr">
               <a:buNone/>
             </a:pPr>
             <a:r>
@@ -13740,13 +13458,12 @@
             <a:avLst/>
           </a:prstGeom>
           <a:noFill/>
-          <a:ln/>
-        </p:spPr>
-        <p:txBody>
-          <a:bodyPr wrap="square" lIns="0" tIns="0" rIns="0" bIns="0" rtlCol="0" anchor="ctr"/>
-          <a:lstStyle/>
-          <a:p>
-            <a:pPr algn="ctr" indent="0" marL="0">
+        </p:spPr>
+        <p:txBody>
+          <a:bodyPr wrap="square" lIns="0" tIns="0" rIns="0" bIns="0" rtlCol="0" anchor="ctr"/>
+          <a:lstStyle/>
+          <a:p>
+            <a:pPr marL="0" indent="0" algn="ctr">
               <a:buNone/>
             </a:pPr>
             <a:r>
@@ -13801,13 +13518,12 @@
             <a:avLst/>
           </a:prstGeom>
           <a:noFill/>
-          <a:ln/>
-        </p:spPr>
-        <p:txBody>
-          <a:bodyPr wrap="square" lIns="0" tIns="0" rIns="0" bIns="0" rtlCol="0" anchor="ctr"/>
-          <a:lstStyle/>
-          <a:p>
-            <a:pPr algn="ctr" indent="0" marL="0">
+        </p:spPr>
+        <p:txBody>
+          <a:bodyPr wrap="square" lIns="0" tIns="0" rIns="0" bIns="0" rtlCol="0" anchor="ctr"/>
+          <a:lstStyle/>
+          <a:p>
+            <a:pPr marL="0" indent="0" algn="ctr">
               <a:buNone/>
             </a:pPr>
             <a:r>
@@ -13862,13 +13578,12 @@
             <a:avLst/>
           </a:prstGeom>
           <a:noFill/>
-          <a:ln/>
-        </p:spPr>
-        <p:txBody>
-          <a:bodyPr wrap="square" lIns="0" tIns="0" rIns="0" bIns="0" rtlCol="0" anchor="ctr"/>
-          <a:lstStyle/>
-          <a:p>
-            <a:pPr algn="ctr" indent="0" marL="0">
+        </p:spPr>
+        <p:txBody>
+          <a:bodyPr wrap="square" lIns="0" tIns="0" rIns="0" bIns="0" rtlCol="0" anchor="ctr"/>
+          <a:lstStyle/>
+          <a:p>
+            <a:pPr marL="0" indent="0" algn="ctr">
               <a:buNone/>
             </a:pPr>
             <a:r>
@@ -13923,13 +13638,12 @@
             <a:avLst/>
           </a:prstGeom>
           <a:noFill/>
-          <a:ln/>
-        </p:spPr>
-        <p:txBody>
-          <a:bodyPr wrap="square" lIns="0" tIns="0" rIns="0" bIns="0" rtlCol="0" anchor="ctr"/>
-          <a:lstStyle/>
-          <a:p>
-            <a:pPr algn="ctr" indent="0" marL="0">
+        </p:spPr>
+        <p:txBody>
+          <a:bodyPr wrap="square" lIns="0" tIns="0" rIns="0" bIns="0" rtlCol="0" anchor="ctr"/>
+          <a:lstStyle/>
+          <a:p>
+            <a:pPr marL="0" indent="0" algn="ctr">
               <a:buNone/>
             </a:pPr>
             <a:r>
@@ -13984,13 +13698,12 @@
             <a:avLst/>
           </a:prstGeom>
           <a:noFill/>
-          <a:ln/>
-        </p:spPr>
-        <p:txBody>
-          <a:bodyPr wrap="square" lIns="0" tIns="0" rIns="0" bIns="0" rtlCol="0" anchor="ctr"/>
-          <a:lstStyle/>
-          <a:p>
-            <a:pPr algn="ctr" indent="0" marL="0">
+        </p:spPr>
+        <p:txBody>
+          <a:bodyPr wrap="square" lIns="0" tIns="0" rIns="0" bIns="0" rtlCol="0" anchor="ctr"/>
+          <a:lstStyle/>
+          <a:p>
+            <a:pPr marL="0" indent="0" algn="ctr">
               <a:buNone/>
             </a:pPr>
             <a:r>
@@ -14045,13 +13758,12 @@
             <a:avLst/>
           </a:prstGeom>
           <a:noFill/>
-          <a:ln/>
-        </p:spPr>
-        <p:txBody>
-          <a:bodyPr wrap="square" lIns="0" tIns="0" rIns="0" bIns="0" rtlCol="0" anchor="ctr"/>
-          <a:lstStyle/>
-          <a:p>
-            <a:pPr algn="ctr" indent="0" marL="0">
+        </p:spPr>
+        <p:txBody>
+          <a:bodyPr wrap="square" lIns="0" tIns="0" rIns="0" bIns="0" rtlCol="0" anchor="ctr"/>
+          <a:lstStyle/>
+          <a:p>
+            <a:pPr marL="0" indent="0" algn="ctr">
               <a:buNone/>
             </a:pPr>
             <a:r>
@@ -14106,13 +13818,12 @@
             <a:avLst/>
           </a:prstGeom>
           <a:noFill/>
-          <a:ln/>
-        </p:spPr>
-        <p:txBody>
-          <a:bodyPr wrap="square" lIns="0" tIns="0" rIns="0" bIns="0" rtlCol="0" anchor="ctr"/>
-          <a:lstStyle/>
-          <a:p>
-            <a:pPr algn="ctr" indent="0" marL="0">
+        </p:spPr>
+        <p:txBody>
+          <a:bodyPr wrap="square" lIns="0" tIns="0" rIns="0" bIns="0" rtlCol="0" anchor="ctr"/>
+          <a:lstStyle/>
+          <a:p>
+            <a:pPr marL="0" indent="0" algn="ctr">
               <a:buNone/>
             </a:pPr>
             <a:r>
@@ -14167,13 +13878,12 @@
             <a:avLst/>
           </a:prstGeom>
           <a:noFill/>
-          <a:ln/>
-        </p:spPr>
-        <p:txBody>
-          <a:bodyPr wrap="square" lIns="0" tIns="0" rIns="0" bIns="0" rtlCol="0" anchor="ctr"/>
-          <a:lstStyle/>
-          <a:p>
-            <a:pPr algn="ctr" indent="0" marL="0">
+        </p:spPr>
+        <p:txBody>
+          <a:bodyPr wrap="square" lIns="0" tIns="0" rIns="0" bIns="0" rtlCol="0" anchor="ctr"/>
+          <a:lstStyle/>
+          <a:p>
+            <a:pPr marL="0" indent="0" algn="ctr">
               <a:buNone/>
             </a:pPr>
             <a:r>
@@ -14228,13 +13938,12 @@
             <a:avLst/>
           </a:prstGeom>
           <a:noFill/>
-          <a:ln/>
-        </p:spPr>
-        <p:txBody>
-          <a:bodyPr wrap="square" lIns="0" tIns="0" rIns="0" bIns="0" rtlCol="0" anchor="ctr"/>
-          <a:lstStyle/>
-          <a:p>
-            <a:pPr algn="ctr" indent="0" marL="0">
+        </p:spPr>
+        <p:txBody>
+          <a:bodyPr wrap="square" lIns="0" tIns="0" rIns="0" bIns="0" rtlCol="0" anchor="ctr"/>
+          <a:lstStyle/>
+          <a:p>
+            <a:pPr marL="0" indent="0" algn="ctr">
               <a:buNone/>
             </a:pPr>
             <a:r>
@@ -14289,13 +13998,12 @@
             <a:avLst/>
           </a:prstGeom>
           <a:noFill/>
-          <a:ln/>
-        </p:spPr>
-        <p:txBody>
-          <a:bodyPr wrap="square" lIns="0" tIns="0" rIns="0" bIns="0" rtlCol="0" anchor="ctr"/>
-          <a:lstStyle/>
-          <a:p>
-            <a:pPr algn="ctr" indent="0" marL="0">
+        </p:spPr>
+        <p:txBody>
+          <a:bodyPr wrap="square" lIns="0" tIns="0" rIns="0" bIns="0" rtlCol="0" anchor="ctr"/>
+          <a:lstStyle/>
+          <a:p>
+            <a:pPr marL="0" indent="0" algn="ctr">
               <a:buNone/>
             </a:pPr>
             <a:r>
@@ -14350,13 +14058,12 @@
             <a:avLst/>
           </a:prstGeom>
           <a:noFill/>
-          <a:ln/>
-        </p:spPr>
-        <p:txBody>
-          <a:bodyPr wrap="square" lIns="0" tIns="0" rIns="0" bIns="0" rtlCol="0" anchor="ctr"/>
-          <a:lstStyle/>
-          <a:p>
-            <a:pPr algn="ctr" indent="0" marL="0">
+        </p:spPr>
+        <p:txBody>
+          <a:bodyPr wrap="square" lIns="0" tIns="0" rIns="0" bIns="0" rtlCol="0" anchor="ctr"/>
+          <a:lstStyle/>
+          <a:p>
+            <a:pPr marL="0" indent="0" algn="ctr">
               <a:buNone/>
             </a:pPr>
             <a:r>
@@ -14411,13 +14118,12 @@
             <a:avLst/>
           </a:prstGeom>
           <a:noFill/>
-          <a:ln/>
-        </p:spPr>
-        <p:txBody>
-          <a:bodyPr wrap="square" lIns="0" tIns="0" rIns="0" bIns="0" rtlCol="0" anchor="ctr"/>
-          <a:lstStyle/>
-          <a:p>
-            <a:pPr algn="ctr" indent="0" marL="0">
+        </p:spPr>
+        <p:txBody>
+          <a:bodyPr wrap="square" lIns="0" tIns="0" rIns="0" bIns="0" rtlCol="0" anchor="ctr"/>
+          <a:lstStyle/>
+          <a:p>
+            <a:pPr marL="0" indent="0" algn="ctr">
               <a:buNone/>
             </a:pPr>
             <a:r>
@@ -14472,13 +14178,12 @@
             <a:avLst/>
           </a:prstGeom>
           <a:noFill/>
-          <a:ln/>
-        </p:spPr>
-        <p:txBody>
-          <a:bodyPr wrap="square" lIns="0" tIns="0" rIns="0" bIns="0" rtlCol="0" anchor="ctr"/>
-          <a:lstStyle/>
-          <a:p>
-            <a:pPr algn="ctr" indent="0" marL="0">
+        </p:spPr>
+        <p:txBody>
+          <a:bodyPr wrap="square" lIns="0" tIns="0" rIns="0" bIns="0" rtlCol="0" anchor="ctr"/>
+          <a:lstStyle/>
+          <a:p>
+            <a:pPr marL="0" indent="0" algn="ctr">
               <a:buNone/>
             </a:pPr>
             <a:r>
@@ -14692,13 +14397,12 @@
             <a:avLst/>
           </a:prstGeom>
           <a:noFill/>
-          <a:ln/>
-        </p:spPr>
-        <p:txBody>
-          <a:bodyPr wrap="square" lIns="0" tIns="0" rIns="0" bIns="0" rtlCol="0" anchor="ctr"/>
-          <a:lstStyle/>
-          <a:p>
-            <a:pPr algn="ctr" indent="0" marL="0">
+        </p:spPr>
+        <p:txBody>
+          <a:bodyPr wrap="square" lIns="0" tIns="0" rIns="0" bIns="0" rtlCol="0" anchor="ctr"/>
+          <a:lstStyle/>
+          <a:p>
+            <a:pPr marL="0" indent="0" algn="ctr">
               <a:buNone/>
             </a:pPr>
             <a:r>
@@ -14706,9 +14410,9 @@
                 <a:solidFill>
                   <a:srgbClr val="1A1A2E"/>
                 </a:solidFill>
-                <a:latin typeface="Cambria" pitchFamily="34" charset="0"/>
-                <a:ea typeface="Cambria" pitchFamily="34" charset="-122"/>
-                <a:cs typeface="Cambria" pitchFamily="34" charset="-120"/>
+                <a:latin typeface="Cambria" panose="02040503050406030204" pitchFamily="34" charset="0"/>
+                <a:ea typeface="Cambria" panose="02040503050406030204" pitchFamily="34" charset="-122"/>
+                <a:cs typeface="Cambria" panose="02040503050406030204" pitchFamily="34" charset="-120"/>
               </a:rPr>
               <a:t>Solved Board  (green = filled)</a:t>
             </a:r>
@@ -14735,9 +14439,8 @@
           <a:solidFill>
             <a:srgbClr val="1A1A2E"/>
           </a:solidFill>
-          <a:ln/>
           <a:effectLst>
-            <a:outerShdw sx="100000" sy="100000" kx="0" ky="0" algn="bl" rotWithShape="0" blurRad="152400" dist="50800" dir="2700000">
+            <a:outerShdw blurRad="152400" dist="50800" dir="2700000" algn="bl" rotWithShape="0">
               <a:srgbClr val="000000">
                 <a:alpha val="25000"/>
               </a:srgbClr>
@@ -14760,13 +14463,12 @@
             <a:avLst/>
           </a:prstGeom>
           <a:noFill/>
-          <a:ln/>
-        </p:spPr>
-        <p:txBody>
-          <a:bodyPr wrap="square" lIns="0" tIns="0" rIns="0" bIns="0" rtlCol="0" anchor="ctr"/>
-          <a:lstStyle/>
-          <a:p>
-            <a:pPr algn="ctr" indent="0" marL="0">
+        </p:spPr>
+        <p:txBody>
+          <a:bodyPr wrap="square" lIns="0" tIns="0" rIns="0" bIns="0" rtlCol="0" anchor="ctr"/>
+          <a:lstStyle/>
+          <a:p>
+            <a:pPr marL="0" indent="0" algn="ctr">
               <a:buNone/>
             </a:pPr>
             <a:r>
@@ -14774,9 +14476,9 @@
                 <a:solidFill>
                   <a:srgbClr val="2DD4BF"/>
                 </a:solidFill>
-                <a:latin typeface="Calibri" pitchFamily="34" charset="0"/>
-                <a:ea typeface="Calibri" pitchFamily="34" charset="-122"/>
-                <a:cs typeface="Calibri" pitchFamily="34" charset="-120"/>
+                <a:latin typeface="Calibri" panose="020F0502020204030204" pitchFamily="34" charset="0"/>
+                <a:ea typeface="Calibri" panose="020F0502020204030204" pitchFamily="34" charset="-122"/>
+                <a:cs typeface="Calibri" panose="020F0502020204030204" pitchFamily="34" charset="-120"/>
               </a:rPr>
               <a:t>✔ User Input</a:t>
             </a:r>
@@ -14803,9 +14505,8 @@
           <a:solidFill>
             <a:srgbClr val="1A1A2E"/>
           </a:solidFill>
-          <a:ln/>
           <a:effectLst>
-            <a:outerShdw sx="100000" sy="100000" kx="0" ky="0" algn="bl" rotWithShape="0" blurRad="152400" dist="50800" dir="2700000">
+            <a:outerShdw blurRad="152400" dist="50800" dir="2700000" algn="bl" rotWithShape="0">
               <a:srgbClr val="000000">
                 <a:alpha val="25000"/>
               </a:srgbClr>
@@ -14828,13 +14529,12 @@
             <a:avLst/>
           </a:prstGeom>
           <a:noFill/>
-          <a:ln/>
-        </p:spPr>
-        <p:txBody>
-          <a:bodyPr wrap="square" lIns="0" tIns="0" rIns="0" bIns="0" rtlCol="0" anchor="ctr"/>
-          <a:lstStyle/>
-          <a:p>
-            <a:pPr algn="ctr" indent="0" marL="0">
+        </p:spPr>
+        <p:txBody>
+          <a:bodyPr wrap="square" lIns="0" tIns="0" rIns="0" bIns="0" rtlCol="0" anchor="ctr"/>
+          <a:lstStyle/>
+          <a:p>
+            <a:pPr marL="0" indent="0" algn="ctr">
               <a:buNone/>
             </a:pPr>
             <a:r>
@@ -14842,9 +14542,9 @@
                 <a:solidFill>
                   <a:srgbClr val="2DD4BF"/>
                 </a:solidFill>
-                <a:latin typeface="Calibri" pitchFamily="34" charset="0"/>
-                <a:ea typeface="Calibri" pitchFamily="34" charset="-122"/>
-                <a:cs typeface="Calibri" pitchFamily="34" charset="-120"/>
+                <a:latin typeface="Calibri" panose="020F0502020204030204" pitchFamily="34" charset="0"/>
+                <a:ea typeface="Calibri" panose="020F0502020204030204" pitchFamily="34" charset="-122"/>
+                <a:cs typeface="Calibri" panose="020F0502020204030204" pitchFamily="34" charset="-120"/>
               </a:rPr>
               <a:t>✔ Validation</a:t>
             </a:r>
@@ -14871,9 +14571,8 @@
           <a:solidFill>
             <a:srgbClr val="1A1A2E"/>
           </a:solidFill>
-          <a:ln/>
           <a:effectLst>
-            <a:outerShdw sx="100000" sy="100000" kx="0" ky="0" algn="bl" rotWithShape="0" blurRad="152400" dist="50800" dir="2700000">
+            <a:outerShdw blurRad="152400" dist="50800" dir="2700000" algn="bl" rotWithShape="0">
               <a:srgbClr val="000000">
                 <a:alpha val="25000"/>
               </a:srgbClr>
@@ -14896,13 +14595,12 @@
             <a:avLst/>
           </a:prstGeom>
           <a:noFill/>
-          <a:ln/>
-        </p:spPr>
-        <p:txBody>
-          <a:bodyPr wrap="square" lIns="0" tIns="0" rIns="0" bIns="0" rtlCol="0" anchor="ctr"/>
-          <a:lstStyle/>
-          <a:p>
-            <a:pPr algn="ctr" indent="0" marL="0">
+        </p:spPr>
+        <p:txBody>
+          <a:bodyPr wrap="square" lIns="0" tIns="0" rIns="0" bIns="0" rtlCol="0" anchor="ctr"/>
+          <a:lstStyle/>
+          <a:p>
+            <a:pPr marL="0" indent="0" algn="ctr">
               <a:buNone/>
             </a:pPr>
             <a:r>
@@ -14910,9 +14608,9 @@
                 <a:solidFill>
                   <a:srgbClr val="2DD4BF"/>
                 </a:solidFill>
-                <a:latin typeface="Calibri" pitchFamily="34" charset="0"/>
-                <a:ea typeface="Calibri" pitchFamily="34" charset="-122"/>
-                <a:cs typeface="Calibri" pitchFamily="34" charset="-120"/>
+                <a:latin typeface="Calibri" panose="020F0502020204030204" pitchFamily="34" charset="0"/>
+                <a:ea typeface="Calibri" panose="020F0502020204030204" pitchFamily="34" charset="-122"/>
+                <a:cs typeface="Calibri" panose="020F0502020204030204" pitchFamily="34" charset="-120"/>
               </a:rPr>
               <a:t>✔ No-Solution Handling</a:t>
             </a:r>
@@ -14939,9 +14637,8 @@
           <a:solidFill>
             <a:srgbClr val="1A1A2E"/>
           </a:solidFill>
-          <a:ln/>
           <a:effectLst>
-            <a:outerShdw sx="100000" sy="100000" kx="0" ky="0" algn="bl" rotWithShape="0" blurRad="152400" dist="50800" dir="2700000">
+            <a:outerShdw blurRad="152400" dist="50800" dir="2700000" algn="bl" rotWithShape="0">
               <a:srgbClr val="000000">
                 <a:alpha val="25000"/>
               </a:srgbClr>
@@ -14964,13 +14661,12 @@
             <a:avLst/>
           </a:prstGeom>
           <a:noFill/>
-          <a:ln/>
-        </p:spPr>
-        <p:txBody>
-          <a:bodyPr wrap="square" lIns="0" tIns="0" rIns="0" bIns="0" rtlCol="0" anchor="ctr"/>
-          <a:lstStyle/>
-          <a:p>
-            <a:pPr algn="ctr" indent="0" marL="0">
+        </p:spPr>
+        <p:txBody>
+          <a:bodyPr wrap="square" lIns="0" tIns="0" rIns="0" bIns="0" rtlCol="0" anchor="ctr"/>
+          <a:lstStyle/>
+          <a:p>
+            <a:pPr marL="0" indent="0" algn="ctr">
               <a:buNone/>
             </a:pPr>
             <a:r>
@@ -14978,9 +14674,9 @@
                 <a:solidFill>
                   <a:srgbClr val="2DD4BF"/>
                 </a:solidFill>
-                <a:latin typeface="Calibri" pitchFamily="34" charset="0"/>
-                <a:ea typeface="Calibri" pitchFamily="34" charset="-122"/>
-                <a:cs typeface="Calibri" pitchFamily="34" charset="-120"/>
+                <a:latin typeface="Calibri" panose="020F0502020204030204" pitchFamily="34" charset="0"/>
+                <a:ea typeface="Calibri" panose="020F0502020204030204" pitchFamily="34" charset="-122"/>
+                <a:cs typeface="Calibri" panose="020F0502020204030204" pitchFamily="34" charset="-120"/>
               </a:rPr>
               <a:t>✔ Clean Display</a:t>
             </a:r>
@@ -14998,12 +14694,13 @@
 
 <file path=ppt/slides/slide5.xml><?xml version="1.0" encoding="utf-8"?>
 <p:sld xmlns:a="http://schemas.openxmlformats.org/drawingml/2006/main" xmlns:r="http://schemas.openxmlformats.org/officeDocument/2006/relationships" xmlns:p="http://schemas.openxmlformats.org/presentationml/2006/main">
-  <p:cSld name="Slide 5">
+  <p:cSld>
     <p:bg>
       <p:bgPr>
         <a:solidFill>
           <a:srgbClr val="1A1A2E"/>
         </a:solidFill>
+        <a:effectLst/>
       </p:bgPr>
     </p:bg>
     <p:spTree>
@@ -15037,7 +14734,6 @@
           <a:solidFill>
             <a:srgbClr val="0F3460"/>
           </a:solidFill>
-          <a:ln/>
         </p:spPr>
       </p:sp>
       <p:sp>
@@ -15055,13 +14751,12 @@
             <a:avLst/>
           </a:prstGeom>
           <a:noFill/>
-          <a:ln/>
-        </p:spPr>
-        <p:txBody>
-          <a:bodyPr wrap="square" lIns="0" tIns="0" rIns="0" bIns="0" rtlCol="0" anchor="ctr"/>
-          <a:lstStyle/>
-          <a:p>
-            <a:pPr algn="l" indent="0" marL="0">
+        </p:spPr>
+        <p:txBody>
+          <a:bodyPr wrap="square" lIns="0" tIns="0" rIns="0" bIns="0" rtlCol="0" anchor="ctr"/>
+          <a:lstStyle/>
+          <a:p>
+            <a:pPr marL="0" indent="0" algn="l">
               <a:buNone/>
             </a:pPr>
             <a:r>
@@ -15069,9 +14764,9 @@
                 <a:solidFill>
                   <a:srgbClr val="FFFFFF"/>
                 </a:solidFill>
-                <a:latin typeface="Cambria" pitchFamily="34" charset="0"/>
-                <a:ea typeface="Cambria" pitchFamily="34" charset="-122"/>
-                <a:cs typeface="Cambria" pitchFamily="34" charset="-120"/>
+                <a:latin typeface="Cambria" panose="02040503050406030204" pitchFamily="34" charset="0"/>
+                <a:ea typeface="Cambria" panose="02040503050406030204" pitchFamily="34" charset="-122"/>
+                <a:cs typeface="Cambria" panose="02040503050406030204" pitchFamily="34" charset="-120"/>
               </a:rPr>
               <a:t>Conclusion</a:t>
             </a:r>
@@ -15121,9 +14816,8 @@
           <a:solidFill>
             <a:srgbClr val="0F3460"/>
           </a:solidFill>
-          <a:ln/>
           <a:effectLst>
-            <a:outerShdw sx="100000" sy="100000" kx="0" ky="0" algn="bl" rotWithShape="0" blurRad="152400" dist="50800" dir="2700000">
+            <a:outerShdw blurRad="152400" dist="50800" dir="2700000" algn="bl" rotWithShape="0">
               <a:srgbClr val="000000">
                 <a:alpha val="25000"/>
               </a:srgbClr>
@@ -15133,7 +14827,7 @@
       </p:sp>
       <p:pic>
         <p:nvPicPr>
-          <p:cNvPr id="6" name="Image 0" descr="preencoded.png">    </p:cNvPr>
+          <p:cNvPr id="6" name="Image 0" descr="preencoded.png"/>
           <p:cNvPicPr>
             <a:picLocks noChangeAspect="1"/>
           </p:cNvPicPr>
@@ -15170,13 +14864,12 @@
             <a:avLst/>
           </a:prstGeom>
           <a:noFill/>
-          <a:ln/>
-        </p:spPr>
-        <p:txBody>
-          <a:bodyPr wrap="square" lIns="0" tIns="0" rIns="0" bIns="0" rtlCol="0" anchor="ctr"/>
-          <a:lstStyle/>
-          <a:p>
-            <a:pPr algn="ctr" indent="0" marL="0">
+        </p:spPr>
+        <p:txBody>
+          <a:bodyPr wrap="square" lIns="0" tIns="0" rIns="0" bIns="0" rtlCol="0" anchor="ctr"/>
+          <a:lstStyle/>
+          <a:p>
+            <a:pPr marL="0" indent="0" algn="ctr">
               <a:buNone/>
             </a:pPr>
             <a:r>
@@ -15184,9 +14877,9 @@
                 <a:solidFill>
                   <a:srgbClr val="FFFFFF"/>
                 </a:solidFill>
-                <a:latin typeface="Cambria" pitchFamily="34" charset="0"/>
-                <a:ea typeface="Cambria" pitchFamily="34" charset="-122"/>
-                <a:cs typeface="Cambria" pitchFamily="34" charset="-120"/>
+                <a:latin typeface="Cambria" panose="02040503050406030204" pitchFamily="34" charset="0"/>
+                <a:ea typeface="Cambria" panose="02040503050406030204" pitchFamily="34" charset="-122"/>
+                <a:cs typeface="Cambria" panose="02040503050406030204" pitchFamily="34" charset="-120"/>
               </a:rPr>
               <a:t>Algorithm Mastery</a:t>
             </a:r>
@@ -15209,13 +14902,12 @@
             <a:avLst/>
           </a:prstGeom>
           <a:noFill/>
-          <a:ln/>
-        </p:spPr>
-        <p:txBody>
-          <a:bodyPr wrap="square" lIns="0" tIns="0" rIns="0" bIns="0" rtlCol="0" anchor="ctr"/>
-          <a:lstStyle/>
-          <a:p>
-            <a:pPr algn="ctr" indent="0" marL="0">
+        </p:spPr>
+        <p:txBody>
+          <a:bodyPr wrap="square" lIns="0" tIns="0" rIns="0" bIns="0" rtlCol="0" anchor="ctr"/>
+          <a:lstStyle/>
+          <a:p>
+            <a:pPr marL="0" indent="0" algn="ctr">
               <a:buNone/>
             </a:pPr>
             <a:r>
@@ -15223,9 +14915,9 @@
                 <a:solidFill>
                   <a:srgbClr val="A0AEC0"/>
                 </a:solidFill>
-                <a:latin typeface="Calibri" pitchFamily="34" charset="0"/>
-                <a:ea typeface="Calibri" pitchFamily="34" charset="-122"/>
-                <a:cs typeface="Calibri" pitchFamily="34" charset="-120"/>
+                <a:latin typeface="Calibri" panose="020F0502020204030204" pitchFamily="34" charset="0"/>
+                <a:ea typeface="Calibri" panose="020F0502020204030204" pitchFamily="34" charset="-122"/>
+                <a:cs typeface="Calibri" panose="020F0502020204030204" pitchFamily="34" charset="-120"/>
               </a:rPr>
               <a:t>Demonstrated effective use of Backtracking and Recursion to solve a real-world constraint satisfaction problem</a:t>
             </a:r>
@@ -15252,9 +14944,8 @@
           <a:solidFill>
             <a:srgbClr val="0F3460"/>
           </a:solidFill>
-          <a:ln/>
           <a:effectLst>
-            <a:outerShdw sx="100000" sy="100000" kx="0" ky="0" algn="bl" rotWithShape="0" blurRad="152400" dist="50800" dir="2700000">
+            <a:outerShdw blurRad="152400" dist="50800" dir="2700000" algn="bl" rotWithShape="0">
               <a:srgbClr val="000000">
                 <a:alpha val="25000"/>
               </a:srgbClr>
@@ -15264,7 +14955,7 @@
       </p:sp>
       <p:pic>
         <p:nvPicPr>
-          <p:cNvPr id="10" name="Image 1" descr="preencoded.png">    </p:cNvPr>
+          <p:cNvPr id="10" name="Image 1" descr="preencoded.png"/>
           <p:cNvPicPr>
             <a:picLocks noChangeAspect="1"/>
           </p:cNvPicPr>
@@ -15301,13 +14992,12 @@
             <a:avLst/>
           </a:prstGeom>
           <a:noFill/>
-          <a:ln/>
-        </p:spPr>
-        <p:txBody>
-          <a:bodyPr wrap="square" lIns="0" tIns="0" rIns="0" bIns="0" rtlCol="0" anchor="ctr"/>
-          <a:lstStyle/>
-          <a:p>
-            <a:pPr algn="ctr" indent="0" marL="0">
+        </p:spPr>
+        <p:txBody>
+          <a:bodyPr wrap="square" lIns="0" tIns="0" rIns="0" bIns="0" rtlCol="0" anchor="ctr"/>
+          <a:lstStyle/>
+          <a:p>
+            <a:pPr marL="0" indent="0" algn="ctr">
               <a:buNone/>
             </a:pPr>
             <a:r>
@@ -15315,9 +15005,9 @@
                 <a:solidFill>
                   <a:srgbClr val="FFFFFF"/>
                 </a:solidFill>
-                <a:latin typeface="Cambria" pitchFamily="34" charset="0"/>
-                <a:ea typeface="Cambria" pitchFamily="34" charset="-122"/>
-                <a:cs typeface="Cambria" pitchFamily="34" charset="-120"/>
+                <a:latin typeface="Cambria" panose="02040503050406030204" pitchFamily="34" charset="0"/>
+                <a:ea typeface="Cambria" panose="02040503050406030204" pitchFamily="34" charset="-122"/>
+                <a:cs typeface="Cambria" panose="02040503050406030204" pitchFamily="34" charset="-120"/>
               </a:rPr>
               <a:t>Python Proficiency</a:t>
             </a:r>
@@ -15340,13 +15030,12 @@
             <a:avLst/>
           </a:prstGeom>
           <a:noFill/>
-          <a:ln/>
-        </p:spPr>
-        <p:txBody>
-          <a:bodyPr wrap="square" lIns="0" tIns="0" rIns="0" bIns="0" rtlCol="0" anchor="ctr"/>
-          <a:lstStyle/>
-          <a:p>
-            <a:pPr algn="ctr" indent="0" marL="0">
+        </p:spPr>
+        <p:txBody>
+          <a:bodyPr wrap="square" lIns="0" tIns="0" rIns="0" bIns="0" rtlCol="0" anchor="ctr"/>
+          <a:lstStyle/>
+          <a:p>
+            <a:pPr marL="0" indent="0" algn="ctr">
               <a:buNone/>
             </a:pPr>
             <a:r>
@@ -15354,9 +15043,9 @@
                 <a:solidFill>
                   <a:srgbClr val="A0AEC0"/>
                 </a:solidFill>
-                <a:latin typeface="Calibri" pitchFamily="34" charset="0"/>
-                <a:ea typeface="Calibri" pitchFamily="34" charset="-122"/>
-                <a:cs typeface="Calibri" pitchFamily="34" charset="-120"/>
+                <a:latin typeface="Calibri" panose="020F0502020204030204" pitchFamily="34" charset="0"/>
+                <a:ea typeface="Calibri" panose="020F0502020204030204" pitchFamily="34" charset="-122"/>
+                <a:cs typeface="Calibri" panose="020F0502020204030204" pitchFamily="34" charset="-120"/>
               </a:rPr>
               <a:t>Clean, well-commented Python code with modular functions, input validation, and graceful error handling</a:t>
             </a:r>
@@ -15383,9 +15072,8 @@
           <a:solidFill>
             <a:srgbClr val="0F3460"/>
           </a:solidFill>
-          <a:ln/>
           <a:effectLst>
-            <a:outerShdw sx="100000" sy="100000" kx="0" ky="0" algn="bl" rotWithShape="0" blurRad="152400" dist="50800" dir="2700000">
+            <a:outerShdw blurRad="152400" dist="50800" dir="2700000" algn="bl" rotWithShape="0">
               <a:srgbClr val="000000">
                 <a:alpha val="25000"/>
               </a:srgbClr>
@@ -15395,7 +15083,7 @@
       </p:sp>
       <p:pic>
         <p:nvPicPr>
-          <p:cNvPr id="14" name="Image 2" descr="preencoded.png">    </p:cNvPr>
+          <p:cNvPr id="14" name="Image 2" descr="preencoded.png"/>
           <p:cNvPicPr>
             <a:picLocks noChangeAspect="1"/>
           </p:cNvPicPr>
@@ -15432,13 +15120,12 @@
             <a:avLst/>
           </a:prstGeom>
           <a:noFill/>
-          <a:ln/>
-        </p:spPr>
-        <p:txBody>
-          <a:bodyPr wrap="square" lIns="0" tIns="0" rIns="0" bIns="0" rtlCol="0" anchor="ctr"/>
-          <a:lstStyle/>
-          <a:p>
-            <a:pPr algn="ctr" indent="0" marL="0">
+        </p:spPr>
+        <p:txBody>
+          <a:bodyPr wrap="square" lIns="0" tIns="0" rIns="0" bIns="0" rtlCol="0" anchor="ctr"/>
+          <a:lstStyle/>
+          <a:p>
+            <a:pPr marL="0" indent="0" algn="ctr">
               <a:buNone/>
             </a:pPr>
             <a:r>
@@ -15446,9 +15133,9 @@
                 <a:solidFill>
                   <a:srgbClr val="FFFFFF"/>
                 </a:solidFill>
-                <a:latin typeface="Cambria" pitchFamily="34" charset="0"/>
-                <a:ea typeface="Cambria" pitchFamily="34" charset="-122"/>
-                <a:cs typeface="Cambria" pitchFamily="34" charset="-120"/>
+                <a:latin typeface="Cambria" panose="02040503050406030204" pitchFamily="34" charset="0"/>
+                <a:ea typeface="Cambria" panose="02040503050406030204" pitchFamily="34" charset="-122"/>
+                <a:cs typeface="Cambria" panose="02040503050406030204" pitchFamily="34" charset="-120"/>
               </a:rPr>
               <a:t>Practical Application</a:t>
             </a:r>
@@ -15471,13 +15158,12 @@
             <a:avLst/>
           </a:prstGeom>
           <a:noFill/>
-          <a:ln/>
-        </p:spPr>
-        <p:txBody>
-          <a:bodyPr wrap="square" lIns="0" tIns="0" rIns="0" bIns="0" rtlCol="0" anchor="ctr"/>
-          <a:lstStyle/>
-          <a:p>
-            <a:pPr algn="ctr" indent="0" marL="0">
+        </p:spPr>
+        <p:txBody>
+          <a:bodyPr wrap="square" lIns="0" tIns="0" rIns="0" bIns="0" rtlCol="0" anchor="ctr"/>
+          <a:lstStyle/>
+          <a:p>
+            <a:pPr marL="0" indent="0" algn="ctr">
               <a:buNone/>
             </a:pPr>
             <a:r>
@@ -15485,9 +15171,9 @@
                 <a:solidFill>
                   <a:srgbClr val="A0AEC0"/>
                 </a:solidFill>
-                <a:latin typeface="Calibri" pitchFamily="34" charset="0"/>
-                <a:ea typeface="Calibri" pitchFamily="34" charset="-122"/>
-                <a:cs typeface="Calibri" pitchFamily="34" charset="-120"/>
+                <a:latin typeface="Calibri" panose="020F0502020204030204" pitchFamily="34" charset="0"/>
+                <a:ea typeface="Calibri" panose="020F0502020204030204" pitchFamily="34" charset="-122"/>
+                <a:cs typeface="Calibri" panose="020F0502020204030204" pitchFamily="34" charset="-120"/>
               </a:rPr>
               <a:t>Fully functional interactive solver — any valid 9×9 Sudoku puzzle is accepted and solved automatically</a:t>
             </a:r>
@@ -15510,13 +15196,12 @@
             <a:avLst/>
           </a:prstGeom>
           <a:noFill/>
-          <a:ln/>
-        </p:spPr>
-        <p:txBody>
-          <a:bodyPr wrap="square" lIns="0" tIns="0" rIns="0" bIns="0" rtlCol="0" anchor="ctr"/>
-          <a:lstStyle/>
-          <a:p>
-            <a:pPr algn="ctr" indent="0" marL="0">
+        </p:spPr>
+        <p:txBody>
+          <a:bodyPr wrap="square" lIns="0" tIns="0" rIns="0" bIns="0" rtlCol="0" anchor="ctr"/>
+          <a:lstStyle/>
+          <a:p>
+            <a:pPr marL="0" indent="0" algn="ctr">
               <a:buNone/>
             </a:pPr>
             <a:r>
@@ -15524,9 +15209,9 @@
                 <a:solidFill>
                   <a:srgbClr val="A0AEC0"/>
                 </a:solidFill>
-                <a:latin typeface="Calibri" pitchFamily="34" charset="0"/>
-                <a:ea typeface="Calibri" pitchFamily="34" charset="-122"/>
-                <a:cs typeface="Calibri" pitchFamily="34" charset="-120"/>
+                <a:latin typeface="Calibri" panose="020F0502020204030204" pitchFamily="34" charset="0"/>
+                <a:ea typeface="Calibri" panose="020F0502020204030204" pitchFamily="34" charset="-122"/>
+                <a:cs typeface="Calibri" panose="020F0502020204030204" pitchFamily="34" charset="-120"/>
               </a:rPr>
               <a:t>References: CLRS (Algorithms) · Python Docs · GeeksforGeeks · Wikipedia (Sudoku algorithms)</a:t>
             </a:r>
@@ -15549,13 +15234,12 @@
             <a:avLst/>
           </a:prstGeom>
           <a:noFill/>
-          <a:ln/>
-        </p:spPr>
-        <p:txBody>
-          <a:bodyPr wrap="square" lIns="0" tIns="0" rIns="0" bIns="0" rtlCol="0" anchor="ctr"/>
-          <a:lstStyle/>
-          <a:p>
-            <a:pPr algn="ctr" indent="0" marL="0">
+        </p:spPr>
+        <p:txBody>
+          <a:bodyPr wrap="square" lIns="0" tIns="0" rIns="0" bIns="0" rtlCol="0" anchor="ctr"/>
+          <a:lstStyle/>
+          <a:p>
+            <a:pPr marL="0" indent="0" algn="ctr">
               <a:buNone/>
             </a:pPr>
             <a:r>
@@ -15563,11 +15247,11 @@
                 <a:solidFill>
                   <a:srgbClr val="2DD4BF"/>
                 </a:solidFill>
-                <a:latin typeface="Calibri" pitchFamily="34" charset="0"/>
-                <a:ea typeface="Calibri" pitchFamily="34" charset="-122"/>
-                <a:cs typeface="Calibri" pitchFamily="34" charset="-120"/>
-              </a:rPr>
-              <a:t>Department of Training &amp; Placements  ·  CRT Mini Project  ·  2027 Batch</a:t>
+                <a:latin typeface="Calibri" panose="020F0502020204030204" pitchFamily="34" charset="0"/>
+                <a:ea typeface="Calibri" panose="020F0502020204030204" pitchFamily="34" charset="-122"/>
+                <a:cs typeface="Calibri" panose="020F0502020204030204" pitchFamily="34" charset="-120"/>
+              </a:rPr>
+              <a:t>Department of Artificial Intelligence &amp; Machine Learning  ·  CRT Mini Project  ·  2027 Batch</a:t>
             </a:r>
             <a:endParaRPr lang="en-US" sz="1000" dirty="0"/>
           </a:p>
@@ -15624,7 +15308,7 @@
     </a:clrScheme>
     <a:fontScheme name="Office">
       <a:majorFont>
-        <a:latin typeface="Calibri Light" panose="020F0302020204030204"/>
+        <a:latin typeface="Calibri Light"/>
         <a:ea typeface=""/>
         <a:cs typeface=""/>
         <a:font script="Jpan" typeface="游ゴシック Light"/>
@@ -15657,26 +15341,9 @@
         <a:font script="Viet" typeface="Times New Roman"/>
         <a:font script="Uigh" typeface="Microsoft Uighur"/>
         <a:font script="Geor" typeface="Sylfaen"/>
-        <a:font script="Armn" typeface="Arial"/>
-        <a:font script="Bugi" typeface="Leelawadee UI"/>
-        <a:font script="Bopo" typeface="Microsoft JhengHei"/>
-        <a:font script="Java" typeface="Javanese Text"/>
-        <a:font script="Lisu" typeface="Segoe UI"/>
-        <a:font script="Mymr" typeface="Myanmar Text"/>
-        <a:font script="Nkoo" typeface="Ebrima"/>
-        <a:font script="Olck" typeface="Nirmala UI"/>
-        <a:font script="Osma" typeface="Ebrima"/>
-        <a:font script="Phag" typeface="Phagspa"/>
-        <a:font script="Syrn" typeface="Estrangelo Edessa"/>
-        <a:font script="Syrj" typeface="Estrangelo Edessa"/>
-        <a:font script="Syre" typeface="Estrangelo Edessa"/>
-        <a:font script="Sora" typeface="Nirmala UI"/>
-        <a:font script="Tale" typeface="Microsoft Tai Le"/>
-        <a:font script="Talu" typeface="Microsoft New Tai Lue"/>
-        <a:font script="Tfng" typeface="Ebrima"/>
       </a:majorFont>
       <a:minorFont>
-        <a:latin typeface="Calibri" panose="020F0502020204030204"/>
+        <a:latin typeface="Calibri"/>
         <a:ea typeface=""/>
         <a:cs typeface=""/>
         <a:font script="Jpan" typeface="游ゴシック"/>
@@ -15709,23 +15376,6 @@
         <a:font script="Viet" typeface="Arial"/>
         <a:font script="Uigh" typeface="Microsoft Uighur"/>
         <a:font script="Geor" typeface="Sylfaen"/>
-        <a:font script="Armn" typeface="Arial"/>
-        <a:font script="Bugi" typeface="Leelawadee UI"/>
-        <a:font script="Bopo" typeface="Microsoft JhengHei"/>
-        <a:font script="Java" typeface="Javanese Text"/>
-        <a:font script="Lisu" typeface="Segoe UI"/>
-        <a:font script="Mymr" typeface="Myanmar Text"/>
-        <a:font script="Nkoo" typeface="Ebrima"/>
-        <a:font script="Olck" typeface="Nirmala UI"/>
-        <a:font script="Osma" typeface="Ebrima"/>
-        <a:font script="Phag" typeface="Phagspa"/>
-        <a:font script="Syrn" typeface="Estrangelo Edessa"/>
-        <a:font script="Syrj" typeface="Estrangelo Edessa"/>
-        <a:font script="Syre" typeface="Estrangelo Edessa"/>
-        <a:font script="Sora" typeface="Nirmala UI"/>
-        <a:font script="Tale" typeface="Microsoft Tai Le"/>
-        <a:font script="Talu" typeface="Microsoft New Tai Lue"/>
-        <a:font script="Tfng" typeface="Ebrima"/>
       </a:minorFont>
     </a:fontScheme>
     <a:fmtScheme name="Office">
@@ -15866,8 +15516,265 @@
       </a:bgFillStyleLst>
     </a:fmtScheme>
   </a:themeElements>
-  <a:objectDefaults/>
-  <a:extraClrSchemeLst/>
+  <a:extLst>
+    <a:ext uri="{05A4C25C-085E-4340-85A3-A5531E510DB2}">
+      <thm15:themeFamily xmlns:thm15="http://schemas.microsoft.com/office/thememl/2012/main" name="Office Theme" id="{62F939B6-93AF-4DB8-9C6B-D6C7DFDC589F}" vid="{4A3C46E8-61CC-4603-A589-7422A47A8E4A}"/>
+    </a:ext>
+  </a:extLst>
+</a:theme>
+</file>
+
+<file path=ppt/theme/theme2.xml><?xml version="1.0" encoding="utf-8"?>
+<a:theme xmlns:a="http://schemas.openxmlformats.org/drawingml/2006/main" name="Office Theme">
+  <a:themeElements>
+    <a:clrScheme name="Office">
+      <a:dk1>
+        <a:sysClr val="windowText" lastClr="000000"/>
+      </a:dk1>
+      <a:lt1>
+        <a:sysClr val="window" lastClr="FFFFFF"/>
+      </a:lt1>
+      <a:dk2>
+        <a:srgbClr val="44546A"/>
+      </a:dk2>
+      <a:lt2>
+        <a:srgbClr val="E7E6E6"/>
+      </a:lt2>
+      <a:accent1>
+        <a:srgbClr val="4472C4"/>
+      </a:accent1>
+      <a:accent2>
+        <a:srgbClr val="ED7D31"/>
+      </a:accent2>
+      <a:accent3>
+        <a:srgbClr val="A5A5A5"/>
+      </a:accent3>
+      <a:accent4>
+        <a:srgbClr val="FFC000"/>
+      </a:accent4>
+      <a:accent5>
+        <a:srgbClr val="5B9BD5"/>
+      </a:accent5>
+      <a:accent6>
+        <a:srgbClr val="70AD47"/>
+      </a:accent6>
+      <a:hlink>
+        <a:srgbClr val="0563C1"/>
+      </a:hlink>
+      <a:folHlink>
+        <a:srgbClr val="954F72"/>
+      </a:folHlink>
+    </a:clrScheme>
+    <a:fontScheme name="Office">
+      <a:majorFont>
+        <a:latin typeface="Calibri Light"/>
+        <a:ea typeface=""/>
+        <a:cs typeface=""/>
+        <a:font script="Jpan" typeface="游ゴシック Light"/>
+        <a:font script="Hang" typeface="맑은 고딕"/>
+        <a:font script="Hans" typeface="等线 Light"/>
+        <a:font script="Hant" typeface="新細明體"/>
+        <a:font script="Arab" typeface="Times New Roman"/>
+        <a:font script="Hebr" typeface="Times New Roman"/>
+        <a:font script="Thai" typeface="Angsana New"/>
+        <a:font script="Ethi" typeface="Nyala"/>
+        <a:font script="Beng" typeface="Vrinda"/>
+        <a:font script="Gujr" typeface="Shruti"/>
+        <a:font script="Khmr" typeface="MoolBoran"/>
+        <a:font script="Knda" typeface="Tunga"/>
+        <a:font script="Guru" typeface="Raavi"/>
+        <a:font script="Cans" typeface="Euphemia"/>
+        <a:font script="Cher" typeface="Plantagenet Cherokee"/>
+        <a:font script="Yiii" typeface="Microsoft Yi Baiti"/>
+        <a:font script="Tibt" typeface="Microsoft Himalaya"/>
+        <a:font script="Thaa" typeface="MV Boli"/>
+        <a:font script="Deva" typeface="Mangal"/>
+        <a:font script="Telu" typeface="Gautami"/>
+        <a:font script="Taml" typeface="Latha"/>
+        <a:font script="Syrc" typeface="Estrangelo Edessa"/>
+        <a:font script="Orya" typeface="Kalinga"/>
+        <a:font script="Mlym" typeface="Kartika"/>
+        <a:font script="Laoo" typeface="DokChampa"/>
+        <a:font script="Sinh" typeface="Iskoola Pota"/>
+        <a:font script="Mong" typeface="Mongolian Baiti"/>
+        <a:font script="Viet" typeface="Times New Roman"/>
+        <a:font script="Uigh" typeface="Microsoft Uighur"/>
+        <a:font script="Geor" typeface="Sylfaen"/>
+      </a:majorFont>
+      <a:minorFont>
+        <a:latin typeface="Calibri"/>
+        <a:ea typeface=""/>
+        <a:cs typeface=""/>
+        <a:font script="Jpan" typeface="游ゴシック"/>
+        <a:font script="Hang" typeface="맑은 고딕"/>
+        <a:font script="Hans" typeface="等线"/>
+        <a:font script="Hant" typeface="新細明體"/>
+        <a:font script="Arab" typeface="Arial"/>
+        <a:font script="Hebr" typeface="Arial"/>
+        <a:font script="Thai" typeface="Cordia New"/>
+        <a:font script="Ethi" typeface="Nyala"/>
+        <a:font script="Beng" typeface="Vrinda"/>
+        <a:font script="Gujr" typeface="Shruti"/>
+        <a:font script="Khmr" typeface="DaunPenh"/>
+        <a:font script="Knda" typeface="Tunga"/>
+        <a:font script="Guru" typeface="Raavi"/>
+        <a:font script="Cans" typeface="Euphemia"/>
+        <a:font script="Cher" typeface="Plantagenet Cherokee"/>
+        <a:font script="Yiii" typeface="Microsoft Yi Baiti"/>
+        <a:font script="Tibt" typeface="Microsoft Himalaya"/>
+        <a:font script="Thaa" typeface="MV Boli"/>
+        <a:font script="Deva" typeface="Mangal"/>
+        <a:font script="Telu" typeface="Gautami"/>
+        <a:font script="Taml" typeface="Latha"/>
+        <a:font script="Syrc" typeface="Estrangelo Edessa"/>
+        <a:font script="Orya" typeface="Kalinga"/>
+        <a:font script="Mlym" typeface="Kartika"/>
+        <a:font script="Laoo" typeface="DokChampa"/>
+        <a:font script="Sinh" typeface="Iskoola Pota"/>
+        <a:font script="Mong" typeface="Mongolian Baiti"/>
+        <a:font script="Viet" typeface="Arial"/>
+        <a:font script="Uigh" typeface="Microsoft Uighur"/>
+        <a:font script="Geor" typeface="Sylfaen"/>
+      </a:minorFont>
+    </a:fontScheme>
+    <a:fmtScheme name="Office">
+      <a:fillStyleLst>
+        <a:solidFill>
+          <a:schemeClr val="phClr"/>
+        </a:solidFill>
+        <a:gradFill rotWithShape="1">
+          <a:gsLst>
+            <a:gs pos="0">
+              <a:schemeClr val="phClr">
+                <a:lumMod val="110000"/>
+                <a:satMod val="105000"/>
+                <a:tint val="67000"/>
+              </a:schemeClr>
+            </a:gs>
+            <a:gs pos="50000">
+              <a:schemeClr val="phClr">
+                <a:lumMod val="105000"/>
+                <a:satMod val="103000"/>
+                <a:tint val="73000"/>
+              </a:schemeClr>
+            </a:gs>
+            <a:gs pos="100000">
+              <a:schemeClr val="phClr">
+                <a:lumMod val="105000"/>
+                <a:satMod val="109000"/>
+                <a:tint val="81000"/>
+              </a:schemeClr>
+            </a:gs>
+          </a:gsLst>
+          <a:lin ang="5400000" scaled="0"/>
+        </a:gradFill>
+        <a:gradFill rotWithShape="1">
+          <a:gsLst>
+            <a:gs pos="0">
+              <a:schemeClr val="phClr">
+                <a:satMod val="103000"/>
+                <a:lumMod val="102000"/>
+                <a:tint val="94000"/>
+              </a:schemeClr>
+            </a:gs>
+            <a:gs pos="50000">
+              <a:schemeClr val="phClr">
+                <a:satMod val="110000"/>
+                <a:lumMod val="100000"/>
+                <a:shade val="100000"/>
+              </a:schemeClr>
+            </a:gs>
+            <a:gs pos="100000">
+              <a:schemeClr val="phClr">
+                <a:lumMod val="99000"/>
+                <a:satMod val="120000"/>
+                <a:shade val="78000"/>
+              </a:schemeClr>
+            </a:gs>
+          </a:gsLst>
+          <a:lin ang="5400000" scaled="0"/>
+        </a:gradFill>
+      </a:fillStyleLst>
+      <a:lnStyleLst>
+        <a:ln w="6350" cap="flat" cmpd="sng" algn="ctr">
+          <a:solidFill>
+            <a:schemeClr val="phClr"/>
+          </a:solidFill>
+          <a:prstDash val="solid"/>
+          <a:miter lim="800000"/>
+        </a:ln>
+        <a:ln w="12700" cap="flat" cmpd="sng" algn="ctr">
+          <a:solidFill>
+            <a:schemeClr val="phClr"/>
+          </a:solidFill>
+          <a:prstDash val="solid"/>
+          <a:miter lim="800000"/>
+        </a:ln>
+        <a:ln w="19050" cap="flat" cmpd="sng" algn="ctr">
+          <a:solidFill>
+            <a:schemeClr val="phClr"/>
+          </a:solidFill>
+          <a:prstDash val="solid"/>
+          <a:miter lim="800000"/>
+        </a:ln>
+      </a:lnStyleLst>
+      <a:effectStyleLst>
+        <a:effectStyle>
+          <a:effectLst/>
+        </a:effectStyle>
+        <a:effectStyle>
+          <a:effectLst/>
+        </a:effectStyle>
+        <a:effectStyle>
+          <a:effectLst>
+            <a:outerShdw blurRad="57150" dist="19050" dir="5400000" algn="ctr" rotWithShape="0">
+              <a:srgbClr val="000000">
+                <a:alpha val="63000"/>
+              </a:srgbClr>
+            </a:outerShdw>
+          </a:effectLst>
+        </a:effectStyle>
+      </a:effectStyleLst>
+      <a:bgFillStyleLst>
+        <a:solidFill>
+          <a:schemeClr val="phClr"/>
+        </a:solidFill>
+        <a:solidFill>
+          <a:schemeClr val="phClr">
+            <a:tint val="95000"/>
+            <a:satMod val="170000"/>
+          </a:schemeClr>
+        </a:solidFill>
+        <a:gradFill rotWithShape="1">
+          <a:gsLst>
+            <a:gs pos="0">
+              <a:schemeClr val="phClr">
+                <a:tint val="93000"/>
+                <a:satMod val="150000"/>
+                <a:shade val="98000"/>
+                <a:lumMod val="102000"/>
+              </a:schemeClr>
+            </a:gs>
+            <a:gs pos="50000">
+              <a:schemeClr val="phClr">
+                <a:tint val="98000"/>
+                <a:satMod val="130000"/>
+                <a:shade val="90000"/>
+                <a:lumMod val="103000"/>
+              </a:schemeClr>
+            </a:gs>
+            <a:gs pos="100000">
+              <a:schemeClr val="phClr">
+                <a:shade val="63000"/>
+                <a:satMod val="120000"/>
+              </a:schemeClr>
+            </a:gs>
+          </a:gsLst>
+          <a:lin ang="5400000" scaled="0"/>
+        </a:gradFill>
+      </a:bgFillStyleLst>
+    </a:fmtScheme>
+  </a:themeElements>
   <a:extLst>
     <a:ext uri="{05A4C25C-085E-4340-85A3-A5531E510DB2}">
       <thm15:themeFamily xmlns:thm15="http://schemas.microsoft.com/office/thememl/2012/main" name="Office Theme" id="{62F939B6-93AF-4DB8-9C6B-D6C7DFDC589F}" vid="{4A3C46E8-61CC-4603-A589-7422A47A8E4A}"/>
